--- a/M4/GDV_2D_Gym/les2/gdv-2d-gym-les2.pptx
+++ b/M4/GDV_2D_Gym/les2/gdv-2d-gym-les2.pptx
@@ -6,10 +6,16 @@
   </p:sldMasterIdLst>
   <p:sldIdLst>
     <p:sldId id="256" r:id="rId5"/>
-    <p:sldId id="257" r:id="rId6"/>
-    <p:sldId id="259" r:id="rId7"/>
-    <p:sldId id="258" r:id="rId8"/>
-    <p:sldId id="260" r:id="rId9"/>
+    <p:sldId id="271" r:id="rId6"/>
+    <p:sldId id="260" r:id="rId7"/>
+    <p:sldId id="267" r:id="rId8"/>
+    <p:sldId id="261" r:id="rId9"/>
+    <p:sldId id="269" r:id="rId10"/>
+    <p:sldId id="272" r:id="rId11"/>
+    <p:sldId id="273" r:id="rId12"/>
+    <p:sldId id="274" r:id="rId13"/>
+    <p:sldId id="275" r:id="rId14"/>
+    <p:sldId id="276" r:id="rId15"/>
   </p:sldIdLst>
   <p:sldSz cx="12192000" cy="6858000"/>
   <p:notesSz cx="6858000" cy="9144000"/>
@@ -265,7 +271,7 @@
           <a:p>
             <a:fld id="{7F6255D4-ABB5-456D-9970-B21DD0297007}" type="datetimeFigureOut">
               <a:rPr lang="en-US" smtClean="0"/>
-              <a:t>5/8/2026</a:t>
+              <a:t>5/12/2026</a:t>
             </a:fld>
             <a:endParaRPr lang="en-US"/>
           </a:p>
@@ -465,7 +471,7 @@
           <a:p>
             <a:fld id="{7F6255D4-ABB5-456D-9970-B21DD0297007}" type="datetimeFigureOut">
               <a:rPr lang="en-US" smtClean="0"/>
-              <a:t>5/8/2026</a:t>
+              <a:t>5/12/2026</a:t>
             </a:fld>
             <a:endParaRPr lang="en-US"/>
           </a:p>
@@ -675,7 +681,7 @@
           <a:p>
             <a:fld id="{7F6255D4-ABB5-456D-9970-B21DD0297007}" type="datetimeFigureOut">
               <a:rPr lang="en-US" smtClean="0"/>
-              <a:t>5/8/2026</a:t>
+              <a:t>5/12/2026</a:t>
             </a:fld>
             <a:endParaRPr lang="en-US"/>
           </a:p>
@@ -875,7 +881,7 @@
           <a:p>
             <a:fld id="{7F6255D4-ABB5-456D-9970-B21DD0297007}" type="datetimeFigureOut">
               <a:rPr lang="en-US" smtClean="0"/>
-              <a:t>5/8/2026</a:t>
+              <a:t>5/12/2026</a:t>
             </a:fld>
             <a:endParaRPr lang="en-US"/>
           </a:p>
@@ -1151,7 +1157,7 @@
           <a:p>
             <a:fld id="{7F6255D4-ABB5-456D-9970-B21DD0297007}" type="datetimeFigureOut">
               <a:rPr lang="en-US" smtClean="0"/>
-              <a:t>5/8/2026</a:t>
+              <a:t>5/12/2026</a:t>
             </a:fld>
             <a:endParaRPr lang="en-US"/>
           </a:p>
@@ -1419,7 +1425,7 @@
           <a:p>
             <a:fld id="{7F6255D4-ABB5-456D-9970-B21DD0297007}" type="datetimeFigureOut">
               <a:rPr lang="en-US" smtClean="0"/>
-              <a:t>5/8/2026</a:t>
+              <a:t>5/12/2026</a:t>
             </a:fld>
             <a:endParaRPr lang="en-US"/>
           </a:p>
@@ -1834,7 +1840,7 @@
           <a:p>
             <a:fld id="{7F6255D4-ABB5-456D-9970-B21DD0297007}" type="datetimeFigureOut">
               <a:rPr lang="en-US" smtClean="0"/>
-              <a:t>5/8/2026</a:t>
+              <a:t>5/12/2026</a:t>
             </a:fld>
             <a:endParaRPr lang="en-US"/>
           </a:p>
@@ -1976,7 +1982,7 @@
           <a:p>
             <a:fld id="{7F6255D4-ABB5-456D-9970-B21DD0297007}" type="datetimeFigureOut">
               <a:rPr lang="en-US" smtClean="0"/>
-              <a:t>5/8/2026</a:t>
+              <a:t>5/12/2026</a:t>
             </a:fld>
             <a:endParaRPr lang="en-US"/>
           </a:p>
@@ -2089,7 +2095,7 @@
           <a:p>
             <a:fld id="{7F6255D4-ABB5-456D-9970-B21DD0297007}" type="datetimeFigureOut">
               <a:rPr lang="en-US" smtClean="0"/>
-              <a:t>5/8/2026</a:t>
+              <a:t>5/12/2026</a:t>
             </a:fld>
             <a:endParaRPr lang="en-US"/>
           </a:p>
@@ -2402,7 +2408,7 @@
           <a:p>
             <a:fld id="{7F6255D4-ABB5-456D-9970-B21DD0297007}" type="datetimeFigureOut">
               <a:rPr lang="en-US" smtClean="0"/>
-              <a:t>5/8/2026</a:t>
+              <a:t>5/12/2026</a:t>
             </a:fld>
             <a:endParaRPr lang="en-US"/>
           </a:p>
@@ -2691,7 +2697,7 @@
           <a:p>
             <a:fld id="{7F6255D4-ABB5-456D-9970-B21DD0297007}" type="datetimeFigureOut">
               <a:rPr lang="en-US" smtClean="0"/>
-              <a:t>5/8/2026</a:t>
+              <a:t>5/12/2026</a:t>
             </a:fld>
             <a:endParaRPr lang="en-US"/>
           </a:p>
@@ -2934,7 +2940,7 @@
           <a:p>
             <a:fld id="{7F6255D4-ABB5-456D-9970-B21DD0297007}" type="datetimeFigureOut">
               <a:rPr lang="en-US" smtClean="0"/>
-              <a:t>5/8/2026</a:t>
+              <a:t>5/12/2026</a:t>
             </a:fld>
             <a:endParaRPr lang="en-US"/>
           </a:p>
@@ -3919,18 +3925,53 @@
           <a:p>
             <a:pPr algn="l"/>
             <a:r>
-              <a:rPr lang="nl-NL" sz="4800">
+              <a:rPr lang="en-US" sz="4800" dirty="0" err="1">
                 <a:solidFill>
                   <a:srgbClr val="FFFFFF"/>
                 </a:solidFill>
               </a:rPr>
-              <a:t>Tilemaps</a:t>
-            </a:r>
-            <a:endParaRPr lang="en-US" sz="4800">
-              <a:solidFill>
-                <a:srgbClr val="FFFFFF"/>
-              </a:solidFill>
-            </a:endParaRPr>
+              <a:t>Selecteer</a:t>
+            </a:r>
+            <a:r>
+              <a:rPr lang="en-US" sz="4800" dirty="0">
+                <a:solidFill>
+                  <a:srgbClr val="FFFFFF"/>
+                </a:solidFill>
+              </a:rPr>
+              <a:t> </a:t>
+            </a:r>
+            <a:r>
+              <a:rPr lang="en-US" sz="4800" dirty="0" err="1">
+                <a:solidFill>
+                  <a:srgbClr val="FFFFFF"/>
+                </a:solidFill>
+              </a:rPr>
+              <a:t>en</a:t>
+            </a:r>
+            <a:r>
+              <a:rPr lang="en-US" sz="4800" dirty="0">
+                <a:solidFill>
+                  <a:srgbClr val="FFFFFF"/>
+                </a:solidFill>
+              </a:rPr>
+              <a:t> </a:t>
+            </a:r>
+            <a:r>
+              <a:rPr lang="en-US" sz="4800" dirty="0" err="1">
+                <a:solidFill>
+                  <a:srgbClr val="FFFFFF"/>
+                </a:solidFill>
+              </a:rPr>
+              <a:t>verander</a:t>
+            </a:r>
+            <a:r>
+              <a:rPr lang="en-US" sz="4800" dirty="0">
+                <a:solidFill>
+                  <a:srgbClr val="FFFFFF"/>
+                </a:solidFill>
+              </a:rPr>
+              <a:t> Tiles</a:t>
+            </a:r>
           </a:p>
         </p:txBody>
       </p:sp>
@@ -4207,6 +4248,318 @@
 </p:sld>
 </file>
 
+<file path=ppt/slides/slide10.xml><?xml version="1.0" encoding="utf-8"?>
+<p:sld xmlns:a="http://schemas.openxmlformats.org/drawingml/2006/main" xmlns:r="http://schemas.openxmlformats.org/officeDocument/2006/relationships" xmlns:p="http://schemas.openxmlformats.org/presentationml/2006/main">
+  <p:cSld>
+    <p:spTree>
+      <p:nvGrpSpPr>
+        <p:cNvPr id="1" name=""/>
+        <p:cNvGrpSpPr/>
+        <p:nvPr/>
+      </p:nvGrpSpPr>
+      <p:grpSpPr>
+        <a:xfrm>
+          <a:off x="0" y="0"/>
+          <a:ext cx="0" cy="0"/>
+          <a:chOff x="0" y="0"/>
+          <a:chExt cx="0" cy="0"/>
+        </a:xfrm>
+      </p:grpSpPr>
+      <p:sp>
+        <p:nvSpPr>
+          <p:cNvPr id="2" name="Titel 1">
+            <a:extLst>
+              <a:ext uri="{FF2B5EF4-FFF2-40B4-BE49-F238E27FC236}">
+                <a16:creationId xmlns:a16="http://schemas.microsoft.com/office/drawing/2014/main" id="{E56AF117-C362-3968-CCA3-017E428D1388}"/>
+              </a:ext>
+            </a:extLst>
+          </p:cNvPr>
+          <p:cNvSpPr>
+            <a:spLocks noGrp="1"/>
+          </p:cNvSpPr>
+          <p:nvPr>
+            <p:ph type="title"/>
+          </p:nvPr>
+        </p:nvSpPr>
+        <p:spPr/>
+        <p:txBody>
+          <a:bodyPr/>
+          <a:lstStyle/>
+          <a:p>
+            <a:r>
+              <a:rPr lang="en-US" dirty="0" err="1"/>
+              <a:t>Verander</a:t>
+            </a:r>
+            <a:r>
+              <a:rPr lang="en-US" dirty="0"/>
+              <a:t> </a:t>
+            </a:r>
+            <a:r>
+              <a:rPr lang="en-US" dirty="0" err="1"/>
+              <a:t>een</a:t>
+            </a:r>
+            <a:r>
+              <a:rPr lang="en-US" dirty="0"/>
+              <a:t> </a:t>
+            </a:r>
+            <a:r>
+              <a:rPr lang="en-US" dirty="0" err="1"/>
+              <a:t>kleur</a:t>
+            </a:r>
+            <a:r>
+              <a:rPr lang="en-US" dirty="0"/>
+              <a:t> van </a:t>
+            </a:r>
+            <a:r>
+              <a:rPr lang="en-US" dirty="0" err="1"/>
+              <a:t>een</a:t>
+            </a:r>
+            <a:r>
+              <a:rPr lang="en-US" dirty="0"/>
+              <a:t> Tile</a:t>
+            </a:r>
+            <a:endParaRPr lang="nl-NL" dirty="0"/>
+          </a:p>
+        </p:txBody>
+      </p:sp>
+      <p:sp>
+        <p:nvSpPr>
+          <p:cNvPr id="3" name="Tijdelijke aanduiding voor inhoud 2">
+            <a:extLst>
+              <a:ext uri="{FF2B5EF4-FFF2-40B4-BE49-F238E27FC236}">
+                <a16:creationId xmlns:a16="http://schemas.microsoft.com/office/drawing/2014/main" id="{9DAEAE60-D897-7F9D-CC84-FE0405E83947}"/>
+              </a:ext>
+            </a:extLst>
+          </p:cNvPr>
+          <p:cNvSpPr>
+            <a:spLocks noGrp="1"/>
+          </p:cNvSpPr>
+          <p:nvPr>
+            <p:ph idx="1"/>
+          </p:nvPr>
+        </p:nvSpPr>
+        <p:spPr>
+          <a:xfrm>
+            <a:off x="838200" y="1825625"/>
+            <a:ext cx="10515600" cy="956486"/>
+          </a:xfrm>
+          <a:solidFill>
+            <a:schemeClr val="bg1">
+              <a:lumMod val="85000"/>
+            </a:schemeClr>
+          </a:solidFill>
+        </p:spPr>
+        <p:txBody>
+          <a:bodyPr/>
+          <a:lstStyle/>
+          <a:p>
+            <a:pPr marL="0" indent="0">
+              <a:buNone/>
+            </a:pPr>
+            <a:r>
+              <a:rPr lang="nl-NL" dirty="0" err="1">
+                <a:latin typeface="Courier New" panose="02070309020205020404" pitchFamily="49" charset="0"/>
+                <a:cs typeface="Courier New" panose="02070309020205020404" pitchFamily="49" charset="0"/>
+              </a:rPr>
+              <a:t>tilemap.</a:t>
+            </a:r>
+            <a:r>
+              <a:rPr lang="nl-NL" b="1" dirty="0" err="1">
+                <a:latin typeface="Courier New" panose="02070309020205020404" pitchFamily="49" charset="0"/>
+                <a:cs typeface="Courier New" panose="02070309020205020404" pitchFamily="49" charset="0"/>
+              </a:rPr>
+              <a:t>SetTileFlags</a:t>
+            </a:r>
+            <a:r>
+              <a:rPr lang="nl-NL" dirty="0">
+                <a:latin typeface="Courier New" panose="02070309020205020404" pitchFamily="49" charset="0"/>
+                <a:cs typeface="Courier New" panose="02070309020205020404" pitchFamily="49" charset="0"/>
+              </a:rPr>
+              <a:t>(pos, </a:t>
+            </a:r>
+            <a:r>
+              <a:rPr lang="nl-NL" dirty="0" err="1">
+                <a:latin typeface="Courier New" panose="02070309020205020404" pitchFamily="49" charset="0"/>
+                <a:cs typeface="Courier New" panose="02070309020205020404" pitchFamily="49" charset="0"/>
+              </a:rPr>
+              <a:t>TileFlags.None</a:t>
+            </a:r>
+            <a:r>
+              <a:rPr lang="nl-NL" dirty="0">
+                <a:latin typeface="Courier New" panose="02070309020205020404" pitchFamily="49" charset="0"/>
+                <a:cs typeface="Courier New" panose="02070309020205020404" pitchFamily="49" charset="0"/>
+              </a:rPr>
+              <a:t>);</a:t>
+            </a:r>
+            <a:br>
+              <a:rPr lang="nl-NL" dirty="0">
+                <a:latin typeface="Courier New" panose="02070309020205020404" pitchFamily="49" charset="0"/>
+                <a:cs typeface="Courier New" panose="02070309020205020404" pitchFamily="49" charset="0"/>
+              </a:rPr>
+            </a:br>
+            <a:r>
+              <a:rPr lang="nl-NL" dirty="0" err="1">
+                <a:latin typeface="Courier New" panose="02070309020205020404" pitchFamily="49" charset="0"/>
+                <a:cs typeface="Courier New" panose="02070309020205020404" pitchFamily="49" charset="0"/>
+              </a:rPr>
+              <a:t>tilemap.</a:t>
+            </a:r>
+            <a:r>
+              <a:rPr lang="nl-NL" b="1" dirty="0" err="1">
+                <a:latin typeface="Courier New" panose="02070309020205020404" pitchFamily="49" charset="0"/>
+                <a:cs typeface="Courier New" panose="02070309020205020404" pitchFamily="49" charset="0"/>
+              </a:rPr>
+              <a:t>SetColor</a:t>
+            </a:r>
+            <a:r>
+              <a:rPr lang="nl-NL" dirty="0">
+                <a:latin typeface="Courier New" panose="02070309020205020404" pitchFamily="49" charset="0"/>
+                <a:cs typeface="Courier New" panose="02070309020205020404" pitchFamily="49" charset="0"/>
+              </a:rPr>
+              <a:t>(pos, </a:t>
+            </a:r>
+            <a:r>
+              <a:rPr lang="nl-NL" dirty="0" err="1">
+                <a:latin typeface="Courier New" panose="02070309020205020404" pitchFamily="49" charset="0"/>
+                <a:cs typeface="Courier New" panose="02070309020205020404" pitchFamily="49" charset="0"/>
+              </a:rPr>
+              <a:t>Color.red</a:t>
+            </a:r>
+            <a:r>
+              <a:rPr lang="nl-NL" dirty="0">
+                <a:latin typeface="Courier New" panose="02070309020205020404" pitchFamily="49" charset="0"/>
+                <a:cs typeface="Courier New" panose="02070309020205020404" pitchFamily="49" charset="0"/>
+              </a:rPr>
+              <a:t>);</a:t>
+            </a:r>
+          </a:p>
+          <a:p>
+            <a:endParaRPr lang="nl-NL" dirty="0"/>
+          </a:p>
+        </p:txBody>
+      </p:sp>
+    </p:spTree>
+    <p:extLst>
+      <p:ext uri="{BB962C8B-B14F-4D97-AF65-F5344CB8AC3E}">
+        <p14:creationId xmlns:p14="http://schemas.microsoft.com/office/powerpoint/2010/main" val="3858322853"/>
+      </p:ext>
+    </p:extLst>
+  </p:cSld>
+  <p:clrMapOvr>
+    <a:masterClrMapping/>
+  </p:clrMapOvr>
+</p:sld>
+</file>
+
+<file path=ppt/slides/slide11.xml><?xml version="1.0" encoding="utf-8"?>
+<p:sld xmlns:a="http://schemas.openxmlformats.org/drawingml/2006/main" xmlns:r="http://schemas.openxmlformats.org/officeDocument/2006/relationships" xmlns:p="http://schemas.openxmlformats.org/presentationml/2006/main">
+  <p:cSld>
+    <p:spTree>
+      <p:nvGrpSpPr>
+        <p:cNvPr id="1" name=""/>
+        <p:cNvGrpSpPr/>
+        <p:nvPr/>
+      </p:nvGrpSpPr>
+      <p:grpSpPr>
+        <a:xfrm>
+          <a:off x="0" y="0"/>
+          <a:ext cx="0" cy="0"/>
+          <a:chOff x="0" y="0"/>
+          <a:chExt cx="0" cy="0"/>
+        </a:xfrm>
+      </p:grpSpPr>
+      <p:sp>
+        <p:nvSpPr>
+          <p:cNvPr id="2" name="Titel 1">
+            <a:extLst>
+              <a:ext uri="{FF2B5EF4-FFF2-40B4-BE49-F238E27FC236}">
+                <a16:creationId xmlns:a16="http://schemas.microsoft.com/office/drawing/2014/main" id="{1099DBC1-B90C-ECA9-2FA9-F3EA98812C6E}"/>
+              </a:ext>
+            </a:extLst>
+          </p:cNvPr>
+          <p:cNvSpPr>
+            <a:spLocks noGrp="1"/>
+          </p:cNvSpPr>
+          <p:nvPr>
+            <p:ph type="title"/>
+          </p:nvPr>
+        </p:nvSpPr>
+        <p:spPr/>
+        <p:txBody>
+          <a:bodyPr/>
+          <a:lstStyle/>
+          <a:p>
+            <a:r>
+              <a:rPr lang="en-US" dirty="0" err="1"/>
+              <a:t>Opdracht</a:t>
+            </a:r>
+            <a:r>
+              <a:rPr lang="en-US" dirty="0"/>
+              <a:t> 2 - </a:t>
+            </a:r>
+            <a:r>
+              <a:rPr lang="en-US" dirty="0" err="1"/>
+              <a:t>Eindproduct</a:t>
+            </a:r>
+            <a:r>
+              <a:rPr lang="en-US" dirty="0"/>
+              <a:t> </a:t>
+            </a:r>
+            <a:endParaRPr lang="nl-NL" dirty="0"/>
+          </a:p>
+        </p:txBody>
+      </p:sp>
+      <p:pic>
+        <p:nvPicPr>
+          <p:cNvPr id="5" name="Tijdelijke aanduiding voor inhoud 4">
+            <a:extLst>
+              <a:ext uri="{FF2B5EF4-FFF2-40B4-BE49-F238E27FC236}">
+                <a16:creationId xmlns:a16="http://schemas.microsoft.com/office/drawing/2014/main" id="{1C6441FB-0467-8CC2-9165-7585F8C63607}"/>
+              </a:ext>
+            </a:extLst>
+          </p:cNvPr>
+          <p:cNvPicPr>
+            <a:picLocks noGrp="1" noChangeAspect="1"/>
+          </p:cNvPicPr>
+          <p:nvPr>
+            <p:ph idx="1"/>
+          </p:nvPr>
+        </p:nvPicPr>
+        <p:blipFill>
+          <a:blip r:embed="rId2">
+            <a:extLst>
+              <a:ext uri="{28A0092B-C50C-407E-A947-70E740481C1C}">
+                <a14:useLocalDpi xmlns:a14="http://schemas.microsoft.com/office/drawing/2010/main" val="0"/>
+              </a:ext>
+            </a:extLst>
+          </a:blip>
+          <a:stretch>
+            <a:fillRect/>
+          </a:stretch>
+        </p:blipFill>
+        <p:spPr>
+          <a:xfrm>
+            <a:off x="2705100" y="2067719"/>
+            <a:ext cx="6781800" cy="3867150"/>
+          </a:xfrm>
+          <a:prstGeom prst="rect">
+            <a:avLst/>
+          </a:prstGeom>
+        </p:spPr>
+      </p:pic>
+    </p:spTree>
+    <p:extLst>
+      <p:ext uri="{BB962C8B-B14F-4D97-AF65-F5344CB8AC3E}">
+        <p14:creationId xmlns:p14="http://schemas.microsoft.com/office/powerpoint/2010/main" val="2520735894"/>
+      </p:ext>
+    </p:extLst>
+  </p:cSld>
+  <p:clrMapOvr>
+    <a:masterClrMapping/>
+  </p:clrMapOvr>
+</p:sld>
+</file>
+
 <file path=ppt/slides/slide2.xml><?xml version="1.0" encoding="utf-8"?>
 <p:sld xmlns:a="http://schemas.openxmlformats.org/drawingml/2006/main" xmlns:r="http://schemas.openxmlformats.org/officeDocument/2006/relationships" xmlns:p="http://schemas.openxmlformats.org/presentationml/2006/main">
   <p:cSld>
@@ -4226,10 +4579,10 @@
       </p:grpSpPr>
       <p:sp>
         <p:nvSpPr>
-          <p:cNvPr id="2" name="Titel 1">
-            <a:extLst>
-              <a:ext uri="{FF2B5EF4-FFF2-40B4-BE49-F238E27FC236}">
-                <a16:creationId xmlns:a16="http://schemas.microsoft.com/office/drawing/2014/main" id="{E1AFACB2-DA6C-BDD7-71E2-314506816300}"/>
+          <p:cNvPr id="4" name="Titel 3">
+            <a:extLst>
+              <a:ext uri="{FF2B5EF4-FFF2-40B4-BE49-F238E27FC236}">
+                <a16:creationId xmlns:a16="http://schemas.microsoft.com/office/drawing/2014/main" id="{1B4634BC-B9DA-EA70-DB9F-329A80D6D852}"/>
               </a:ext>
             </a:extLst>
           </p:cNvPr>
@@ -4247,1146 +4600,45 @@
           <a:p>
             <a:r>
               <a:rPr lang="en-US" dirty="0" err="1"/>
-              <a:t>Gebruikte</a:t>
+              <a:t>Herhaling</a:t>
             </a:r>
             <a:r>
               <a:rPr lang="en-US" dirty="0"/>
-              <a:t> termen</a:t>
-            </a:r>
-          </a:p>
-        </p:txBody>
-      </p:sp>
-      <p:grpSp>
-        <p:nvGrpSpPr>
-          <p:cNvPr id="26" name="Groep 25">
-            <a:extLst>
-              <a:ext uri="{FF2B5EF4-FFF2-40B4-BE49-F238E27FC236}">
-                <a16:creationId xmlns:a16="http://schemas.microsoft.com/office/drawing/2014/main" id="{692C2740-6E09-FE8D-A09F-FE27B192559F}"/>
-              </a:ext>
-            </a:extLst>
-          </p:cNvPr>
-          <p:cNvGrpSpPr/>
-          <p:nvPr/>
-        </p:nvGrpSpPr>
-        <p:grpSpPr>
-          <a:xfrm>
-            <a:off x="2671945" y="3529883"/>
-            <a:ext cx="2388389" cy="605693"/>
-            <a:chOff x="1160815" y="2247009"/>
-            <a:chExt cx="2388389" cy="605693"/>
-          </a:xfrm>
-        </p:grpSpPr>
-        <p:sp>
-          <p:nvSpPr>
-            <p:cNvPr id="4" name="Rechthoek 3">
-              <a:extLst>
-                <a:ext uri="{FF2B5EF4-FFF2-40B4-BE49-F238E27FC236}">
-                  <a16:creationId xmlns:a16="http://schemas.microsoft.com/office/drawing/2014/main" id="{3D7F51DA-0BDF-8AF6-37AB-630133EAE4A4}"/>
-                </a:ext>
-              </a:extLst>
-            </p:cNvPr>
-            <p:cNvSpPr/>
-            <p:nvPr/>
-          </p:nvSpPr>
-          <p:spPr>
-            <a:xfrm>
-              <a:off x="1160815" y="2248761"/>
-              <a:ext cx="301752" cy="301752"/>
-            </a:xfrm>
-            <a:prstGeom prst="rect">
-              <a:avLst/>
-            </a:prstGeom>
-            <a:solidFill>
-              <a:schemeClr val="bg1"/>
-            </a:solidFill>
-          </p:spPr>
-          <p:style>
-            <a:lnRef idx="2">
-              <a:schemeClr val="accent1">
-                <a:shade val="15000"/>
-              </a:schemeClr>
-            </a:lnRef>
-            <a:fillRef idx="1">
-              <a:schemeClr val="accent1"/>
-            </a:fillRef>
-            <a:effectRef idx="0">
-              <a:schemeClr val="accent1"/>
-            </a:effectRef>
-            <a:fontRef idx="minor">
-              <a:schemeClr val="lt1"/>
-            </a:fontRef>
-          </p:style>
-          <p:txBody>
-            <a:bodyPr rtlCol="0" anchor="ctr"/>
-            <a:lstStyle/>
-            <a:p>
-              <a:pPr algn="ctr"/>
-              <a:endParaRPr lang="en-US"/>
-            </a:p>
-          </p:txBody>
-        </p:sp>
-        <p:sp>
-          <p:nvSpPr>
-            <p:cNvPr id="5" name="Rechthoek 4">
-              <a:extLst>
-                <a:ext uri="{FF2B5EF4-FFF2-40B4-BE49-F238E27FC236}">
-                  <a16:creationId xmlns:a16="http://schemas.microsoft.com/office/drawing/2014/main" id="{E5D06084-9E44-40F2-2BE3-75FCA6C0B28A}"/>
-                </a:ext>
-              </a:extLst>
-            </p:cNvPr>
-            <p:cNvSpPr/>
-            <p:nvPr/>
-          </p:nvSpPr>
-          <p:spPr>
-            <a:xfrm>
-              <a:off x="1461805" y="2248761"/>
-              <a:ext cx="301752" cy="301752"/>
-            </a:xfrm>
-            <a:prstGeom prst="rect">
-              <a:avLst/>
-            </a:prstGeom>
-            <a:solidFill>
-              <a:schemeClr val="bg1">
-                <a:lumMod val="95000"/>
-              </a:schemeClr>
-            </a:solidFill>
-          </p:spPr>
-          <p:style>
-            <a:lnRef idx="2">
-              <a:schemeClr val="accent1">
-                <a:shade val="15000"/>
-              </a:schemeClr>
-            </a:lnRef>
-            <a:fillRef idx="1">
-              <a:schemeClr val="accent1"/>
-            </a:fillRef>
-            <a:effectRef idx="0">
-              <a:schemeClr val="accent1"/>
-            </a:effectRef>
-            <a:fontRef idx="minor">
-              <a:schemeClr val="lt1"/>
-            </a:fontRef>
-          </p:style>
-          <p:txBody>
-            <a:bodyPr rtlCol="0" anchor="ctr"/>
-            <a:lstStyle/>
-            <a:p>
-              <a:pPr algn="ctr"/>
-              <a:endParaRPr lang="en-US"/>
-            </a:p>
-          </p:txBody>
-        </p:sp>
-        <p:sp>
-          <p:nvSpPr>
-            <p:cNvPr id="6" name="Rechthoek 5">
-              <a:extLst>
-                <a:ext uri="{FF2B5EF4-FFF2-40B4-BE49-F238E27FC236}">
-                  <a16:creationId xmlns:a16="http://schemas.microsoft.com/office/drawing/2014/main" id="{2B414635-EA8B-13AB-4B72-675F7CBD5324}"/>
-                </a:ext>
-              </a:extLst>
-            </p:cNvPr>
-            <p:cNvSpPr/>
-            <p:nvPr/>
-          </p:nvSpPr>
-          <p:spPr>
-            <a:xfrm>
-              <a:off x="1763557" y="2248761"/>
-              <a:ext cx="301752" cy="301752"/>
-            </a:xfrm>
-            <a:prstGeom prst="rect">
-              <a:avLst/>
-            </a:prstGeom>
-            <a:solidFill>
-              <a:schemeClr val="bg1">
-                <a:lumMod val="85000"/>
-              </a:schemeClr>
-            </a:solidFill>
-          </p:spPr>
-          <p:style>
-            <a:lnRef idx="2">
-              <a:schemeClr val="accent1">
-                <a:shade val="15000"/>
-              </a:schemeClr>
-            </a:lnRef>
-            <a:fillRef idx="1">
-              <a:schemeClr val="accent1"/>
-            </a:fillRef>
-            <a:effectRef idx="0">
-              <a:schemeClr val="accent1"/>
-            </a:effectRef>
-            <a:fontRef idx="minor">
-              <a:schemeClr val="lt1"/>
-            </a:fontRef>
-          </p:style>
-          <p:txBody>
-            <a:bodyPr rtlCol="0" anchor="ctr"/>
-            <a:lstStyle/>
-            <a:p>
-              <a:pPr algn="ctr"/>
-              <a:endParaRPr lang="en-US"/>
-            </a:p>
-          </p:txBody>
-        </p:sp>
-        <p:sp>
-          <p:nvSpPr>
-            <p:cNvPr id="7" name="Rechthoek 6">
-              <a:extLst>
-                <a:ext uri="{FF2B5EF4-FFF2-40B4-BE49-F238E27FC236}">
-                  <a16:creationId xmlns:a16="http://schemas.microsoft.com/office/drawing/2014/main" id="{88274186-8DC8-E4C9-524E-402767E8A421}"/>
-                </a:ext>
-              </a:extLst>
-            </p:cNvPr>
-            <p:cNvSpPr/>
-            <p:nvPr/>
-          </p:nvSpPr>
-          <p:spPr>
-            <a:xfrm>
-              <a:off x="2051565" y="2248761"/>
-              <a:ext cx="301752" cy="301752"/>
-            </a:xfrm>
-            <a:prstGeom prst="rect">
-              <a:avLst/>
-            </a:prstGeom>
-            <a:solidFill>
-              <a:schemeClr val="bg1">
-                <a:lumMod val="75000"/>
-              </a:schemeClr>
-            </a:solidFill>
-          </p:spPr>
-          <p:style>
-            <a:lnRef idx="2">
-              <a:schemeClr val="accent1">
-                <a:shade val="15000"/>
-              </a:schemeClr>
-            </a:lnRef>
-            <a:fillRef idx="1">
-              <a:schemeClr val="accent1"/>
-            </a:fillRef>
-            <a:effectRef idx="0">
-              <a:schemeClr val="accent1"/>
-            </a:effectRef>
-            <a:fontRef idx="minor">
-              <a:schemeClr val="lt1"/>
-            </a:fontRef>
-          </p:style>
-          <p:txBody>
-            <a:bodyPr rtlCol="0" anchor="ctr"/>
-            <a:lstStyle/>
-            <a:p>
-              <a:pPr algn="ctr"/>
-              <a:endParaRPr lang="en-US"/>
-            </a:p>
-          </p:txBody>
-        </p:sp>
-        <p:sp>
-          <p:nvSpPr>
-            <p:cNvPr id="8" name="Rechthoek 7">
-              <a:extLst>
-                <a:ext uri="{FF2B5EF4-FFF2-40B4-BE49-F238E27FC236}">
-                  <a16:creationId xmlns:a16="http://schemas.microsoft.com/office/drawing/2014/main" id="{0B377830-B6F0-8DCF-03CD-0EBB6AD921E1}"/>
-                </a:ext>
-              </a:extLst>
-            </p:cNvPr>
-            <p:cNvSpPr/>
-            <p:nvPr/>
-          </p:nvSpPr>
-          <p:spPr>
-            <a:xfrm>
-              <a:off x="2353317" y="2247009"/>
-              <a:ext cx="301752" cy="301752"/>
-            </a:xfrm>
-            <a:prstGeom prst="rect">
-              <a:avLst/>
-            </a:prstGeom>
-            <a:solidFill>
-              <a:schemeClr val="bg1">
-                <a:lumMod val="65000"/>
-              </a:schemeClr>
-            </a:solidFill>
-          </p:spPr>
-          <p:style>
-            <a:lnRef idx="2">
-              <a:schemeClr val="accent1">
-                <a:shade val="15000"/>
-              </a:schemeClr>
-            </a:lnRef>
-            <a:fillRef idx="1">
-              <a:schemeClr val="accent1"/>
-            </a:fillRef>
-            <a:effectRef idx="0">
-              <a:schemeClr val="accent1"/>
-            </a:effectRef>
-            <a:fontRef idx="minor">
-              <a:schemeClr val="lt1"/>
-            </a:fontRef>
-          </p:style>
-          <p:txBody>
-            <a:bodyPr rtlCol="0" anchor="ctr"/>
-            <a:lstStyle/>
-            <a:p>
-              <a:pPr algn="ctr"/>
-              <a:endParaRPr lang="en-US"/>
-            </a:p>
-          </p:txBody>
-        </p:sp>
-        <p:sp>
-          <p:nvSpPr>
-            <p:cNvPr id="9" name="Rechthoek 8">
-              <a:extLst>
-                <a:ext uri="{FF2B5EF4-FFF2-40B4-BE49-F238E27FC236}">
-                  <a16:creationId xmlns:a16="http://schemas.microsoft.com/office/drawing/2014/main" id="{13550900-7AF9-81C7-38FA-35BE4B3F83B7}"/>
-                </a:ext>
-              </a:extLst>
-            </p:cNvPr>
-            <p:cNvSpPr/>
-            <p:nvPr/>
-          </p:nvSpPr>
-          <p:spPr>
-            <a:xfrm>
-              <a:off x="2655069" y="2247009"/>
-              <a:ext cx="301752" cy="301752"/>
-            </a:xfrm>
-            <a:prstGeom prst="rect">
-              <a:avLst/>
-            </a:prstGeom>
-            <a:solidFill>
-              <a:schemeClr val="bg1">
-                <a:lumMod val="50000"/>
-              </a:schemeClr>
-            </a:solidFill>
-          </p:spPr>
-          <p:style>
-            <a:lnRef idx="2">
-              <a:schemeClr val="accent1">
-                <a:shade val="15000"/>
-              </a:schemeClr>
-            </a:lnRef>
-            <a:fillRef idx="1">
-              <a:schemeClr val="accent1"/>
-            </a:fillRef>
-            <a:effectRef idx="0">
-              <a:schemeClr val="accent1"/>
-            </a:effectRef>
-            <a:fontRef idx="minor">
-              <a:schemeClr val="lt1"/>
-            </a:fontRef>
-          </p:style>
-          <p:txBody>
-            <a:bodyPr rtlCol="0" anchor="ctr"/>
-            <a:lstStyle/>
-            <a:p>
-              <a:pPr algn="ctr"/>
-              <a:endParaRPr lang="en-US"/>
-            </a:p>
-          </p:txBody>
-        </p:sp>
-        <p:sp>
-          <p:nvSpPr>
-            <p:cNvPr id="10" name="Rechthoek 9">
-              <a:extLst>
-                <a:ext uri="{FF2B5EF4-FFF2-40B4-BE49-F238E27FC236}">
-                  <a16:creationId xmlns:a16="http://schemas.microsoft.com/office/drawing/2014/main" id="{35B630B2-AD89-3F9C-6568-7AD944D7B30E}"/>
-                </a:ext>
-              </a:extLst>
-            </p:cNvPr>
-            <p:cNvSpPr/>
-            <p:nvPr/>
-          </p:nvSpPr>
-          <p:spPr>
-            <a:xfrm>
-              <a:off x="2943077" y="2247009"/>
-              <a:ext cx="301752" cy="301752"/>
-            </a:xfrm>
-            <a:prstGeom prst="rect">
-              <a:avLst/>
-            </a:prstGeom>
-            <a:solidFill>
-              <a:schemeClr val="bg2">
-                <a:lumMod val="90000"/>
-              </a:schemeClr>
-            </a:solidFill>
-          </p:spPr>
-          <p:style>
-            <a:lnRef idx="2">
-              <a:schemeClr val="accent1">
-                <a:shade val="15000"/>
-              </a:schemeClr>
-            </a:lnRef>
-            <a:fillRef idx="1">
-              <a:schemeClr val="accent1"/>
-            </a:fillRef>
-            <a:effectRef idx="0">
-              <a:schemeClr val="accent1"/>
-            </a:effectRef>
-            <a:fontRef idx="minor">
-              <a:schemeClr val="lt1"/>
-            </a:fontRef>
-          </p:style>
-          <p:txBody>
-            <a:bodyPr rtlCol="0" anchor="ctr"/>
-            <a:lstStyle/>
-            <a:p>
-              <a:pPr algn="ctr"/>
-              <a:endParaRPr lang="en-US"/>
-            </a:p>
-          </p:txBody>
-        </p:sp>
-        <p:sp>
-          <p:nvSpPr>
-            <p:cNvPr id="11" name="Rechthoek 10">
-              <a:extLst>
-                <a:ext uri="{FF2B5EF4-FFF2-40B4-BE49-F238E27FC236}">
-                  <a16:creationId xmlns:a16="http://schemas.microsoft.com/office/drawing/2014/main" id="{8FAF3625-8F65-2B18-1842-892C5319FBCD}"/>
-                </a:ext>
-              </a:extLst>
-            </p:cNvPr>
-            <p:cNvSpPr/>
-            <p:nvPr/>
-          </p:nvSpPr>
-          <p:spPr>
-            <a:xfrm>
-              <a:off x="3245547" y="2247009"/>
-              <a:ext cx="301752" cy="301752"/>
-            </a:xfrm>
-            <a:prstGeom prst="rect">
-              <a:avLst/>
-            </a:prstGeom>
-            <a:solidFill>
-              <a:schemeClr val="bg2"/>
-            </a:solidFill>
-          </p:spPr>
-          <p:style>
-            <a:lnRef idx="2">
-              <a:schemeClr val="accent1">
-                <a:shade val="15000"/>
-              </a:schemeClr>
-            </a:lnRef>
-            <a:fillRef idx="1">
-              <a:schemeClr val="accent1"/>
-            </a:fillRef>
-            <a:effectRef idx="0">
-              <a:schemeClr val="accent1"/>
-            </a:effectRef>
-            <a:fontRef idx="minor">
-              <a:schemeClr val="lt1"/>
-            </a:fontRef>
-          </p:style>
-          <p:txBody>
-            <a:bodyPr rtlCol="0" anchor="ctr"/>
-            <a:lstStyle/>
-            <a:p>
-              <a:pPr algn="ctr"/>
-              <a:endParaRPr lang="en-US"/>
-            </a:p>
-          </p:txBody>
-        </p:sp>
-        <p:sp>
-          <p:nvSpPr>
-            <p:cNvPr id="12" name="Rechthoek 11">
-              <a:extLst>
-                <a:ext uri="{FF2B5EF4-FFF2-40B4-BE49-F238E27FC236}">
-                  <a16:creationId xmlns:a16="http://schemas.microsoft.com/office/drawing/2014/main" id="{D4904885-8C13-8233-1FA6-F1FAEF8960F4}"/>
-                </a:ext>
-              </a:extLst>
-            </p:cNvPr>
-            <p:cNvSpPr/>
-            <p:nvPr/>
-          </p:nvSpPr>
-          <p:spPr>
-            <a:xfrm>
-              <a:off x="1160815" y="2550950"/>
-              <a:ext cx="301752" cy="301752"/>
-            </a:xfrm>
-            <a:prstGeom prst="rect">
-              <a:avLst/>
-            </a:prstGeom>
-            <a:solidFill>
-              <a:schemeClr val="bg2">
-                <a:lumMod val="25000"/>
-              </a:schemeClr>
-            </a:solidFill>
-          </p:spPr>
-          <p:style>
-            <a:lnRef idx="2">
-              <a:schemeClr val="accent1">
-                <a:shade val="15000"/>
-              </a:schemeClr>
-            </a:lnRef>
-            <a:fillRef idx="1">
-              <a:schemeClr val="accent1"/>
-            </a:fillRef>
-            <a:effectRef idx="0">
-              <a:schemeClr val="accent1"/>
-            </a:effectRef>
-            <a:fontRef idx="minor">
-              <a:schemeClr val="lt1"/>
-            </a:fontRef>
-          </p:style>
-          <p:txBody>
-            <a:bodyPr rtlCol="0" anchor="ctr"/>
-            <a:lstStyle/>
-            <a:p>
-              <a:pPr algn="ctr"/>
-              <a:endParaRPr lang="en-US"/>
-            </a:p>
-          </p:txBody>
-        </p:sp>
-        <p:sp>
-          <p:nvSpPr>
-            <p:cNvPr id="13" name="Rechthoek 12">
-              <a:extLst>
-                <a:ext uri="{FF2B5EF4-FFF2-40B4-BE49-F238E27FC236}">
-                  <a16:creationId xmlns:a16="http://schemas.microsoft.com/office/drawing/2014/main" id="{C5BD4AC2-48E5-FE4F-1B85-6EB533F9FE81}"/>
-                </a:ext>
-              </a:extLst>
-            </p:cNvPr>
-            <p:cNvSpPr/>
-            <p:nvPr/>
-          </p:nvSpPr>
-          <p:spPr>
-            <a:xfrm>
-              <a:off x="1461805" y="2550950"/>
-              <a:ext cx="301752" cy="301752"/>
-            </a:xfrm>
-            <a:prstGeom prst="rect">
-              <a:avLst/>
-            </a:prstGeom>
-            <a:solidFill>
-              <a:schemeClr val="bg2">
-                <a:lumMod val="10000"/>
-              </a:schemeClr>
-            </a:solidFill>
-          </p:spPr>
-          <p:style>
-            <a:lnRef idx="2">
-              <a:schemeClr val="accent1">
-                <a:shade val="15000"/>
-              </a:schemeClr>
-            </a:lnRef>
-            <a:fillRef idx="1">
-              <a:schemeClr val="accent1"/>
-            </a:fillRef>
-            <a:effectRef idx="0">
-              <a:schemeClr val="accent1"/>
-            </a:effectRef>
-            <a:fontRef idx="minor">
-              <a:schemeClr val="lt1"/>
-            </a:fontRef>
-          </p:style>
-          <p:txBody>
-            <a:bodyPr rtlCol="0" anchor="ctr"/>
-            <a:lstStyle/>
-            <a:p>
-              <a:pPr algn="ctr"/>
-              <a:endParaRPr lang="en-US"/>
-            </a:p>
-          </p:txBody>
-        </p:sp>
-        <p:sp>
-          <p:nvSpPr>
-            <p:cNvPr id="14" name="Rechthoek 13">
-              <a:extLst>
-                <a:ext uri="{FF2B5EF4-FFF2-40B4-BE49-F238E27FC236}">
-                  <a16:creationId xmlns:a16="http://schemas.microsoft.com/office/drawing/2014/main" id="{6C4F9075-E3DA-3E32-22F3-8C729E249E0A}"/>
-                </a:ext>
-              </a:extLst>
-            </p:cNvPr>
-            <p:cNvSpPr/>
-            <p:nvPr/>
-          </p:nvSpPr>
-          <p:spPr>
-            <a:xfrm>
-              <a:off x="1763557" y="2550950"/>
-              <a:ext cx="301752" cy="301752"/>
-            </a:xfrm>
-            <a:prstGeom prst="rect">
-              <a:avLst/>
-            </a:prstGeom>
-            <a:solidFill>
-              <a:schemeClr val="bg2">
-                <a:lumMod val="50000"/>
-              </a:schemeClr>
-            </a:solidFill>
-          </p:spPr>
-          <p:style>
-            <a:lnRef idx="2">
-              <a:schemeClr val="accent1">
-                <a:shade val="15000"/>
-              </a:schemeClr>
-            </a:lnRef>
-            <a:fillRef idx="1">
-              <a:schemeClr val="accent1"/>
-            </a:fillRef>
-            <a:effectRef idx="0">
-              <a:schemeClr val="accent1"/>
-            </a:effectRef>
-            <a:fontRef idx="minor">
-              <a:schemeClr val="lt1"/>
-            </a:fontRef>
-          </p:style>
-          <p:txBody>
-            <a:bodyPr rtlCol="0" anchor="ctr"/>
-            <a:lstStyle/>
-            <a:p>
-              <a:pPr algn="ctr"/>
-              <a:endParaRPr lang="en-US"/>
-            </a:p>
-          </p:txBody>
-        </p:sp>
-        <p:sp>
-          <p:nvSpPr>
-            <p:cNvPr id="15" name="Rechthoek 14">
-              <a:extLst>
-                <a:ext uri="{FF2B5EF4-FFF2-40B4-BE49-F238E27FC236}">
-                  <a16:creationId xmlns:a16="http://schemas.microsoft.com/office/drawing/2014/main" id="{4BE23436-7B74-FCCD-F8B6-AC078CDBF081}"/>
-                </a:ext>
-              </a:extLst>
-            </p:cNvPr>
-            <p:cNvSpPr/>
-            <p:nvPr/>
-          </p:nvSpPr>
-          <p:spPr>
-            <a:xfrm>
-              <a:off x="2051565" y="2550950"/>
-              <a:ext cx="301752" cy="301752"/>
-            </a:xfrm>
-            <a:prstGeom prst="rect">
-              <a:avLst/>
-            </a:prstGeom>
-            <a:solidFill>
-              <a:schemeClr val="tx1">
-                <a:lumMod val="85000"/>
-                <a:lumOff val="15000"/>
-              </a:schemeClr>
-            </a:solidFill>
-          </p:spPr>
-          <p:style>
-            <a:lnRef idx="2">
-              <a:schemeClr val="accent1">
-                <a:shade val="15000"/>
-              </a:schemeClr>
-            </a:lnRef>
-            <a:fillRef idx="1">
-              <a:schemeClr val="accent1"/>
-            </a:fillRef>
-            <a:effectRef idx="0">
-              <a:schemeClr val="accent1"/>
-            </a:effectRef>
-            <a:fontRef idx="minor">
-              <a:schemeClr val="lt1"/>
-            </a:fontRef>
-          </p:style>
-          <p:txBody>
-            <a:bodyPr rtlCol="0" anchor="ctr"/>
-            <a:lstStyle/>
-            <a:p>
-              <a:pPr algn="ctr"/>
-              <a:endParaRPr lang="en-US"/>
-            </a:p>
-          </p:txBody>
-        </p:sp>
-        <p:sp>
-          <p:nvSpPr>
-            <p:cNvPr id="16" name="Rechthoek 15">
-              <a:extLst>
-                <a:ext uri="{FF2B5EF4-FFF2-40B4-BE49-F238E27FC236}">
-                  <a16:creationId xmlns:a16="http://schemas.microsoft.com/office/drawing/2014/main" id="{707ED4D9-79B8-D961-C5DD-635AEBE843C0}"/>
-                </a:ext>
-              </a:extLst>
-            </p:cNvPr>
-            <p:cNvSpPr/>
-            <p:nvPr/>
-          </p:nvSpPr>
-          <p:spPr>
-            <a:xfrm>
-              <a:off x="2353317" y="2549198"/>
-              <a:ext cx="301752" cy="301752"/>
-            </a:xfrm>
-            <a:prstGeom prst="rect">
-              <a:avLst/>
-            </a:prstGeom>
-            <a:solidFill>
-              <a:schemeClr val="tx1">
-                <a:lumMod val="75000"/>
-                <a:lumOff val="25000"/>
-              </a:schemeClr>
-            </a:solidFill>
-          </p:spPr>
-          <p:style>
-            <a:lnRef idx="2">
-              <a:schemeClr val="accent1">
-                <a:shade val="15000"/>
-              </a:schemeClr>
-            </a:lnRef>
-            <a:fillRef idx="1">
-              <a:schemeClr val="accent1"/>
-            </a:fillRef>
-            <a:effectRef idx="0">
-              <a:schemeClr val="accent1"/>
-            </a:effectRef>
-            <a:fontRef idx="minor">
-              <a:schemeClr val="lt1"/>
-            </a:fontRef>
-          </p:style>
-          <p:txBody>
-            <a:bodyPr rtlCol="0" anchor="ctr"/>
-            <a:lstStyle/>
-            <a:p>
-              <a:pPr algn="ctr"/>
-              <a:endParaRPr lang="en-US"/>
-            </a:p>
-          </p:txBody>
-        </p:sp>
-        <p:sp>
-          <p:nvSpPr>
-            <p:cNvPr id="17" name="Rechthoek 16">
-              <a:extLst>
-                <a:ext uri="{FF2B5EF4-FFF2-40B4-BE49-F238E27FC236}">
-                  <a16:creationId xmlns:a16="http://schemas.microsoft.com/office/drawing/2014/main" id="{669B7264-6470-C013-C25E-3BE69B7361D5}"/>
-                </a:ext>
-              </a:extLst>
-            </p:cNvPr>
-            <p:cNvSpPr/>
-            <p:nvPr/>
-          </p:nvSpPr>
-          <p:spPr>
-            <a:xfrm>
-              <a:off x="2655069" y="2549198"/>
-              <a:ext cx="301752" cy="301752"/>
-            </a:xfrm>
-            <a:prstGeom prst="rect">
-              <a:avLst/>
-            </a:prstGeom>
-            <a:solidFill>
-              <a:schemeClr val="tx1">
-                <a:lumMod val="65000"/>
-                <a:lumOff val="35000"/>
-              </a:schemeClr>
-            </a:solidFill>
-          </p:spPr>
-          <p:style>
-            <a:lnRef idx="2">
-              <a:schemeClr val="accent1">
-                <a:shade val="15000"/>
-              </a:schemeClr>
-            </a:lnRef>
-            <a:fillRef idx="1">
-              <a:schemeClr val="accent1"/>
-            </a:fillRef>
-            <a:effectRef idx="0">
-              <a:schemeClr val="accent1"/>
-            </a:effectRef>
-            <a:fontRef idx="minor">
-              <a:schemeClr val="lt1"/>
-            </a:fontRef>
-          </p:style>
-          <p:txBody>
-            <a:bodyPr rtlCol="0" anchor="ctr"/>
-            <a:lstStyle/>
-            <a:p>
-              <a:pPr algn="ctr"/>
-              <a:endParaRPr lang="en-US"/>
-            </a:p>
-          </p:txBody>
-        </p:sp>
-        <p:sp>
-          <p:nvSpPr>
-            <p:cNvPr id="18" name="Rechthoek 17">
-              <a:extLst>
-                <a:ext uri="{FF2B5EF4-FFF2-40B4-BE49-F238E27FC236}">
-                  <a16:creationId xmlns:a16="http://schemas.microsoft.com/office/drawing/2014/main" id="{BC1B9FE4-8C78-634A-C87F-5EF27F9CBB87}"/>
-                </a:ext>
-              </a:extLst>
-            </p:cNvPr>
-            <p:cNvSpPr/>
-            <p:nvPr/>
-          </p:nvSpPr>
-          <p:spPr>
-            <a:xfrm>
-              <a:off x="2943077" y="2549198"/>
-              <a:ext cx="301752" cy="301752"/>
-            </a:xfrm>
-            <a:prstGeom prst="rect">
-              <a:avLst/>
-            </a:prstGeom>
-            <a:solidFill>
-              <a:schemeClr val="tx1">
-                <a:lumMod val="50000"/>
-                <a:lumOff val="50000"/>
-              </a:schemeClr>
-            </a:solidFill>
-          </p:spPr>
-          <p:style>
-            <a:lnRef idx="2">
-              <a:schemeClr val="accent1">
-                <a:shade val="15000"/>
-              </a:schemeClr>
-            </a:lnRef>
-            <a:fillRef idx="1">
-              <a:schemeClr val="accent1"/>
-            </a:fillRef>
-            <a:effectRef idx="0">
-              <a:schemeClr val="accent1"/>
-            </a:effectRef>
-            <a:fontRef idx="minor">
-              <a:schemeClr val="lt1"/>
-            </a:fontRef>
-          </p:style>
-          <p:txBody>
-            <a:bodyPr rtlCol="0" anchor="ctr"/>
-            <a:lstStyle/>
-            <a:p>
-              <a:pPr algn="ctr"/>
-              <a:endParaRPr lang="en-US"/>
-            </a:p>
-          </p:txBody>
-        </p:sp>
-        <p:sp>
-          <p:nvSpPr>
-            <p:cNvPr id="19" name="Rechthoek 18">
-              <a:extLst>
-                <a:ext uri="{FF2B5EF4-FFF2-40B4-BE49-F238E27FC236}">
-                  <a16:creationId xmlns:a16="http://schemas.microsoft.com/office/drawing/2014/main" id="{55388109-F9EC-B7CF-D2E3-63679B7A8E78}"/>
-                </a:ext>
-              </a:extLst>
-            </p:cNvPr>
-            <p:cNvSpPr/>
-            <p:nvPr/>
-          </p:nvSpPr>
-          <p:spPr>
-            <a:xfrm>
-              <a:off x="3247452" y="2549198"/>
-              <a:ext cx="301752" cy="301752"/>
-            </a:xfrm>
-            <a:prstGeom prst="rect">
-              <a:avLst/>
-            </a:prstGeom>
-            <a:solidFill>
-              <a:schemeClr val="tx1"/>
-            </a:solidFill>
-            <a:ln>
-              <a:solidFill>
-                <a:srgbClr val="7030A0"/>
-              </a:solidFill>
-            </a:ln>
-          </p:spPr>
-          <p:style>
-            <a:lnRef idx="2">
-              <a:schemeClr val="accent1">
-                <a:shade val="15000"/>
-              </a:schemeClr>
-            </a:lnRef>
-            <a:fillRef idx="1">
-              <a:schemeClr val="accent1"/>
-            </a:fillRef>
-            <a:effectRef idx="0">
-              <a:schemeClr val="accent1"/>
-            </a:effectRef>
-            <a:fontRef idx="minor">
-              <a:schemeClr val="lt1"/>
-            </a:fontRef>
-          </p:style>
-          <p:txBody>
-            <a:bodyPr rtlCol="0" anchor="ctr"/>
-            <a:lstStyle/>
-            <a:p>
-              <a:pPr algn="ctr"/>
-              <a:endParaRPr lang="en-US"/>
-            </a:p>
-          </p:txBody>
-        </p:sp>
-      </p:grpSp>
-      <p:sp>
-        <p:nvSpPr>
-          <p:cNvPr id="21" name="Tekstvak 20">
-            <a:extLst>
-              <a:ext uri="{FF2B5EF4-FFF2-40B4-BE49-F238E27FC236}">
-                <a16:creationId xmlns:a16="http://schemas.microsoft.com/office/drawing/2014/main" id="{0654BD71-B84A-8ECC-62A1-0DD2C1F00147}"/>
-              </a:ext>
-            </a:extLst>
-          </p:cNvPr>
-          <p:cNvSpPr txBox="1"/>
-          <p:nvPr/>
-        </p:nvSpPr>
-        <p:spPr>
-          <a:xfrm>
-            <a:off x="3572422" y="4325073"/>
-            <a:ext cx="857927" cy="369332"/>
-          </a:xfrm>
-          <a:prstGeom prst="rect">
-            <a:avLst/>
-          </a:prstGeom>
-          <a:noFill/>
-        </p:spPr>
-        <p:txBody>
-          <a:bodyPr wrap="none" rtlCol="0">
-            <a:spAutoFit/>
-          </a:bodyPr>
+              <a:t> les 1</a:t>
+            </a:r>
+            <a:endParaRPr lang="nl-NL" dirty="0"/>
+          </a:p>
+        </p:txBody>
+      </p:sp>
+      <p:sp>
+        <p:nvSpPr>
+          <p:cNvPr id="5" name="Tijdelijke aanduiding voor tekst 4">
+            <a:extLst>
+              <a:ext uri="{FF2B5EF4-FFF2-40B4-BE49-F238E27FC236}">
+                <a16:creationId xmlns:a16="http://schemas.microsoft.com/office/drawing/2014/main" id="{857E8C8B-0B96-7CCA-BEA8-F2351A479B05}"/>
+              </a:ext>
+            </a:extLst>
+          </p:cNvPr>
+          <p:cNvSpPr>
+            <a:spLocks noGrp="1"/>
+          </p:cNvSpPr>
+          <p:nvPr>
+            <p:ph type="body" idx="1"/>
+          </p:nvPr>
+        </p:nvSpPr>
+        <p:spPr/>
+        <p:txBody>
+          <a:bodyPr/>
           <a:lstStyle/>
           <a:p>
-            <a:r>
-              <a:rPr lang="en-US" dirty="0" err="1"/>
-              <a:t>Tileset</a:t>
-            </a:r>
-            <a:endParaRPr lang="nl-NL" dirty="0"/>
-          </a:p>
-        </p:txBody>
-      </p:sp>
-      <p:pic>
-        <p:nvPicPr>
-          <p:cNvPr id="1026" name="Picture 2" descr="Unity Tilemap | Unity Tutorial | NotSlot">
-            <a:extLst>
-              <a:ext uri="{FF2B5EF4-FFF2-40B4-BE49-F238E27FC236}">
-                <a16:creationId xmlns:a16="http://schemas.microsoft.com/office/drawing/2014/main" id="{43AEABFB-9FD5-086D-B9B0-9718A14C06F8}"/>
-              </a:ext>
-            </a:extLst>
-          </p:cNvPr>
-          <p:cNvPicPr>
-            <a:picLocks noChangeAspect="1" noChangeArrowheads="1"/>
-          </p:cNvPicPr>
-          <p:nvPr/>
-        </p:nvPicPr>
-        <p:blipFill>
-          <a:blip r:embed="rId2">
-            <a:extLst>
-              <a:ext uri="{28A0092B-C50C-407E-A947-70E740481C1C}">
-                <a14:useLocalDpi xmlns:a14="http://schemas.microsoft.com/office/drawing/2010/main" val="0"/>
-              </a:ext>
-            </a:extLst>
-          </a:blip>
-          <a:srcRect/>
-          <a:stretch>
-            <a:fillRect/>
-          </a:stretch>
-        </p:blipFill>
-        <p:spPr bwMode="auto">
-          <a:xfrm>
-            <a:off x="8869467" y="2532927"/>
-            <a:ext cx="2857500" cy="1600200"/>
-          </a:xfrm>
-          <a:prstGeom prst="rect">
-            <a:avLst/>
-          </a:prstGeom>
-          <a:noFill/>
-          <a:extLst>
-            <a:ext uri="{909E8E84-426E-40DD-AFC4-6F175D3DCCD1}">
-              <a14:hiddenFill xmlns:a14="http://schemas.microsoft.com/office/drawing/2010/main">
-                <a:solidFill>
-                  <a:srgbClr val="FFFFFF"/>
-                </a:solidFill>
-              </a14:hiddenFill>
-            </a:ext>
-          </a:extLst>
-        </p:spPr>
-      </p:pic>
-      <p:sp>
-        <p:nvSpPr>
-          <p:cNvPr id="22" name="Tekstvak 21">
-            <a:extLst>
-              <a:ext uri="{FF2B5EF4-FFF2-40B4-BE49-F238E27FC236}">
-                <a16:creationId xmlns:a16="http://schemas.microsoft.com/office/drawing/2014/main" id="{D2D6B2E7-0F62-2999-CF54-F65F2BD4336C}"/>
-              </a:ext>
-            </a:extLst>
-          </p:cNvPr>
-          <p:cNvSpPr txBox="1"/>
-          <p:nvPr/>
-        </p:nvSpPr>
-        <p:spPr>
-          <a:xfrm>
-            <a:off x="9807538" y="4325073"/>
-            <a:ext cx="981359" cy="369332"/>
-          </a:xfrm>
-          <a:prstGeom prst="rect">
-            <a:avLst/>
-          </a:prstGeom>
-          <a:noFill/>
-        </p:spPr>
-        <p:txBody>
-          <a:bodyPr wrap="none" rtlCol="0">
-            <a:spAutoFit/>
-          </a:bodyPr>
-          <a:lstStyle/>
-          <a:p>
-            <a:r>
-              <a:rPr lang="en-US" dirty="0" err="1"/>
-              <a:t>Tilemap</a:t>
-            </a:r>
-            <a:endParaRPr lang="nl-NL" dirty="0"/>
-          </a:p>
-        </p:txBody>
-      </p:sp>
-      <p:pic>
-        <p:nvPicPr>
-          <p:cNvPr id="1028" name="Picture 4" descr="Introduction to Tilemaps - Unity Learn">
-            <a:extLst>
-              <a:ext uri="{FF2B5EF4-FFF2-40B4-BE49-F238E27FC236}">
-                <a16:creationId xmlns:a16="http://schemas.microsoft.com/office/drawing/2014/main" id="{C675DF7F-0740-7EDB-A76F-820CD885E19F}"/>
-              </a:ext>
-            </a:extLst>
-          </p:cNvPr>
-          <p:cNvPicPr>
-            <a:picLocks noChangeAspect="1" noChangeArrowheads="1"/>
-          </p:cNvPicPr>
-          <p:nvPr/>
-        </p:nvPicPr>
-        <p:blipFill>
-          <a:blip r:embed="rId3">
-            <a:extLst>
-              <a:ext uri="{28A0092B-C50C-407E-A947-70E740481C1C}">
-                <a14:useLocalDpi xmlns:a14="http://schemas.microsoft.com/office/drawing/2010/main" val="0"/>
-              </a:ext>
-            </a:extLst>
-          </a:blip>
-          <a:srcRect/>
-          <a:stretch>
-            <a:fillRect/>
-          </a:stretch>
-        </p:blipFill>
-        <p:spPr bwMode="auto">
-          <a:xfrm>
-            <a:off x="5900442" y="1467482"/>
-            <a:ext cx="1714500" cy="2667000"/>
-          </a:xfrm>
-          <a:prstGeom prst="rect">
-            <a:avLst/>
-          </a:prstGeom>
-          <a:noFill/>
-          <a:extLst>
-            <a:ext uri="{909E8E84-426E-40DD-AFC4-6F175D3DCCD1}">
-              <a14:hiddenFill xmlns:a14="http://schemas.microsoft.com/office/drawing/2010/main">
-                <a:solidFill>
-                  <a:srgbClr val="FFFFFF"/>
-                </a:solidFill>
-              </a14:hiddenFill>
-            </a:ext>
-          </a:extLst>
-        </p:spPr>
-      </p:pic>
-      <p:sp>
-        <p:nvSpPr>
-          <p:cNvPr id="23" name="Tekstvak 22">
-            <a:extLst>
-              <a:ext uri="{FF2B5EF4-FFF2-40B4-BE49-F238E27FC236}">
-                <a16:creationId xmlns:a16="http://schemas.microsoft.com/office/drawing/2014/main" id="{E51EEAEE-DBA6-3D3D-4A73-7E980208A1A9}"/>
-              </a:ext>
-            </a:extLst>
-          </p:cNvPr>
-          <p:cNvSpPr txBox="1"/>
-          <p:nvPr/>
-        </p:nvSpPr>
-        <p:spPr>
-          <a:xfrm>
-            <a:off x="6118382" y="4325073"/>
-            <a:ext cx="1278620" cy="369332"/>
-          </a:xfrm>
-          <a:prstGeom prst="rect">
-            <a:avLst/>
-          </a:prstGeom>
-          <a:noFill/>
-        </p:spPr>
-        <p:txBody>
-          <a:bodyPr wrap="none" rtlCol="0">
-            <a:spAutoFit/>
-          </a:bodyPr>
-          <a:lstStyle/>
-          <a:p>
-            <a:r>
-              <a:rPr lang="en-US" dirty="0"/>
-              <a:t>Tile Palette</a:t>
-            </a:r>
-            <a:endParaRPr lang="nl-NL" dirty="0"/>
-          </a:p>
-        </p:txBody>
-      </p:sp>
-      <p:sp>
-        <p:nvSpPr>
-          <p:cNvPr id="24" name="Rechthoek 23">
-            <a:extLst>
-              <a:ext uri="{FF2B5EF4-FFF2-40B4-BE49-F238E27FC236}">
-                <a16:creationId xmlns:a16="http://schemas.microsoft.com/office/drawing/2014/main" id="{74CABFD4-BDFD-B882-8CA9-6F247858FA61}"/>
-              </a:ext>
-            </a:extLst>
-          </p:cNvPr>
-          <p:cNvSpPr/>
-          <p:nvPr/>
-        </p:nvSpPr>
-        <p:spPr>
-          <a:xfrm>
-            <a:off x="1302393" y="3832730"/>
-            <a:ext cx="301752" cy="301752"/>
-          </a:xfrm>
-          <a:prstGeom prst="rect">
-            <a:avLst/>
-          </a:prstGeom>
-          <a:solidFill>
-            <a:schemeClr val="bg1"/>
-          </a:solidFill>
-        </p:spPr>
-        <p:style>
-          <a:lnRef idx="2">
-            <a:schemeClr val="accent1">
-              <a:shade val="15000"/>
-            </a:schemeClr>
-          </a:lnRef>
-          <a:fillRef idx="1">
-            <a:schemeClr val="accent1"/>
-          </a:fillRef>
-          <a:effectRef idx="0">
-            <a:schemeClr val="accent1"/>
-          </a:effectRef>
-          <a:fontRef idx="minor">
-            <a:schemeClr val="lt1"/>
-          </a:fontRef>
-        </p:style>
-        <p:txBody>
-          <a:bodyPr rtlCol="0" anchor="ctr"/>
-          <a:lstStyle/>
-          <a:p>
-            <a:pPr algn="ctr"/>
-            <a:endParaRPr lang="en-US"/>
-          </a:p>
-        </p:txBody>
-      </p:sp>
-      <p:sp>
-        <p:nvSpPr>
-          <p:cNvPr id="25" name="Tekstvak 24">
-            <a:extLst>
-              <a:ext uri="{FF2B5EF4-FFF2-40B4-BE49-F238E27FC236}">
-                <a16:creationId xmlns:a16="http://schemas.microsoft.com/office/drawing/2014/main" id="{5A4FE018-0C5E-9B74-E2E3-9CCAFC6BBD9D}"/>
-              </a:ext>
-            </a:extLst>
-          </p:cNvPr>
-          <p:cNvSpPr txBox="1"/>
-          <p:nvPr/>
-        </p:nvSpPr>
-        <p:spPr>
-          <a:xfrm>
-            <a:off x="1187812" y="4325073"/>
-            <a:ext cx="530915" cy="369332"/>
-          </a:xfrm>
-          <a:prstGeom prst="rect">
-            <a:avLst/>
-          </a:prstGeom>
-          <a:noFill/>
-        </p:spPr>
-        <p:txBody>
-          <a:bodyPr wrap="none" rtlCol="0">
-            <a:spAutoFit/>
-          </a:bodyPr>
-          <a:lstStyle/>
-          <a:p>
-            <a:r>
-              <a:rPr lang="en-US" dirty="0"/>
-              <a:t>Tile</a:t>
-            </a:r>
-            <a:endParaRPr lang="nl-NL" dirty="0"/>
+            <a:endParaRPr lang="nl-NL"/>
           </a:p>
         </p:txBody>
       </p:sp>
     </p:spTree>
     <p:extLst>
       <p:ext uri="{BB962C8B-B14F-4D97-AF65-F5344CB8AC3E}">
-        <p14:creationId xmlns:p14="http://schemas.microsoft.com/office/powerpoint/2010/main" val="4238619311"/>
+        <p14:creationId xmlns:p14="http://schemas.microsoft.com/office/powerpoint/2010/main" val="2447193920"/>
       </p:ext>
     </p:extLst>
   </p:cSld>
@@ -5399,14 +4651,6 @@
 <file path=ppt/slides/slide3.xml><?xml version="1.0" encoding="utf-8"?>
 <p:sld xmlns:a="http://schemas.openxmlformats.org/drawingml/2006/main" xmlns:r="http://schemas.openxmlformats.org/officeDocument/2006/relationships" xmlns:p="http://schemas.openxmlformats.org/presentationml/2006/main">
   <p:cSld>
-    <p:bg>
-      <p:bgPr>
-        <a:solidFill>
-          <a:schemeClr val="bg1"/>
-        </a:solidFill>
-        <a:effectLst/>
-      </p:bgPr>
-    </p:bg>
     <p:spTree>
       <p:nvGrpSpPr>
         <p:cNvPr id="1" name=""/>
@@ -5421,542 +4665,21 @@
           <a:chExt cx="0" cy="0"/>
         </a:xfrm>
       </p:grpSpPr>
-      <p:sp useBgFill="1">
-        <p:nvSpPr>
-          <p:cNvPr id="11" name="Rectangle 10">
-            <a:extLst>
-              <a:ext uri="{FF2B5EF4-FFF2-40B4-BE49-F238E27FC236}">
-                <a16:creationId xmlns:a16="http://schemas.microsoft.com/office/drawing/2014/main" id="{8555C5B3-193A-4749-9AFD-682E53CDDE8F}"/>
-              </a:ext>
-              <a:ext uri="{C183D7F6-B498-43B3-948B-1728B52AA6E4}">
-                <adec:decorative xmlns:adec="http://schemas.microsoft.com/office/drawing/2017/decorative" val="1"/>
-              </a:ext>
-            </a:extLst>
-          </p:cNvPr>
-          <p:cNvSpPr>
-            <a:spLocks noGrp="1" noRot="1" noChangeAspect="1" noMove="1" noResize="1" noEditPoints="1" noAdjustHandles="1" noChangeArrowheads="1" noChangeShapeType="1" noTextEdit="1"/>
-          </p:cNvSpPr>
-          <p:nvPr>
-            <p:extLst>
-              <p:ext uri="{386F3935-93C4-4BCD-93E2-E3B085C9AB24}">
-                <p16:designElem xmlns:p16="http://schemas.microsoft.com/office/powerpoint/2015/main" val="1"/>
-              </p:ext>
-            </p:extLst>
-          </p:nvPr>
-        </p:nvSpPr>
-        <p:spPr>
-          <a:xfrm>
-            <a:off x="0" y="0"/>
-            <a:ext cx="12192000" cy="6858000"/>
-          </a:xfrm>
-          <a:prstGeom prst="rect">
-            <a:avLst/>
-          </a:prstGeom>
-          <a:ln w="12700" cap="flat" cmpd="sng" algn="ctr">
-            <a:noFill/>
-            <a:prstDash val="solid"/>
-            <a:miter lim="800000"/>
-          </a:ln>
-          <a:effectLst/>
-          <a:extLst>
-            <a:ext uri="{91240B29-F687-4F45-9708-019B960494DF}">
-              <a14:hiddenLine xmlns:a14="http://schemas.microsoft.com/office/drawing/2010/main" w="12700" cap="flat" cmpd="sng" algn="ctr">
-                <a:solidFill>
-                  <a:schemeClr val="accent1">
-                    <a:shade val="50000"/>
-                  </a:schemeClr>
-                </a:solidFill>
-                <a:prstDash val="solid"/>
-                <a:miter lim="800000"/>
-              </a14:hiddenLine>
-            </a:ext>
-          </a:extLst>
-        </p:spPr>
-        <p:style>
-          <a:lnRef idx="2">
-            <a:schemeClr val="accent1">
-              <a:shade val="50000"/>
-            </a:schemeClr>
-          </a:lnRef>
-          <a:fillRef idx="1">
-            <a:schemeClr val="accent1"/>
-          </a:fillRef>
-          <a:effectRef idx="0">
-            <a:schemeClr val="accent1"/>
-          </a:effectRef>
-          <a:fontRef idx="minor">
-            <a:schemeClr val="lt1"/>
-          </a:fontRef>
-        </p:style>
-        <p:txBody>
-          <a:bodyPr rtlCol="0" anchor="ctr"/>
-          <a:lstStyle/>
-          <a:p>
-            <a:pPr algn="ctr"/>
-            <a:endParaRPr lang="en-US" dirty="0"/>
-          </a:p>
-        </p:txBody>
-      </p:sp>
-      <p:sp>
-        <p:nvSpPr>
-          <p:cNvPr id="13" name="Rectangle 12">
-            <a:extLst>
-              <a:ext uri="{FF2B5EF4-FFF2-40B4-BE49-F238E27FC236}">
-                <a16:creationId xmlns:a16="http://schemas.microsoft.com/office/drawing/2014/main" id="{2EAE06A6-F76A-41C9-827A-C561B004485C}"/>
-              </a:ext>
-              <a:ext uri="{C183D7F6-B498-43B3-948B-1728B52AA6E4}">
-                <adec:decorative xmlns:adec="http://schemas.microsoft.com/office/drawing/2017/decorative" val="1"/>
-              </a:ext>
-            </a:extLst>
-          </p:cNvPr>
-          <p:cNvSpPr>
-            <a:spLocks noGrp="1" noRot="1" noChangeAspect="1" noMove="1" noResize="1" noEditPoints="1" noAdjustHandles="1" noChangeArrowheads="1" noChangeShapeType="1" noTextEdit="1"/>
-          </p:cNvSpPr>
-          <p:nvPr>
-            <p:extLst>
-              <p:ext uri="{386F3935-93C4-4BCD-93E2-E3B085C9AB24}">
-                <p16:designElem xmlns:p16="http://schemas.microsoft.com/office/powerpoint/2015/main" val="1"/>
-              </p:ext>
-            </p:extLst>
-          </p:nvPr>
-        </p:nvSpPr>
-        <p:spPr>
-          <a:xfrm flipH="1">
-            <a:off x="0" y="-3"/>
-            <a:ext cx="12192000" cy="6858000"/>
-          </a:xfrm>
-          <a:prstGeom prst="rect">
-            <a:avLst/>
-          </a:prstGeom>
-          <a:gradFill>
-            <a:gsLst>
-              <a:gs pos="0">
-                <a:srgbClr val="000000"/>
-              </a:gs>
-              <a:gs pos="100000">
-                <a:schemeClr val="accent1">
-                  <a:lumMod val="75000"/>
-                </a:schemeClr>
-              </a:gs>
-            </a:gsLst>
-            <a:lin ang="6600000" scaled="0"/>
-          </a:gradFill>
-          <a:ln>
-            <a:noFill/>
-          </a:ln>
-        </p:spPr>
-        <p:style>
-          <a:lnRef idx="2">
-            <a:schemeClr val="accent1">
-              <a:shade val="50000"/>
-            </a:schemeClr>
-          </a:lnRef>
-          <a:fillRef idx="1">
-            <a:schemeClr val="accent1"/>
-          </a:fillRef>
-          <a:effectRef idx="0">
-            <a:schemeClr val="accent1"/>
-          </a:effectRef>
-          <a:fontRef idx="minor">
-            <a:schemeClr val="lt1"/>
-          </a:fontRef>
-        </p:style>
-        <p:txBody>
-          <a:bodyPr rtlCol="0" anchor="ctr"/>
-          <a:lstStyle/>
-          <a:p>
-            <a:pPr algn="ctr"/>
-            <a:endParaRPr lang="en-US" dirty="0"/>
-          </a:p>
-        </p:txBody>
-      </p:sp>
-      <p:sp>
-        <p:nvSpPr>
-          <p:cNvPr id="15" name="Rectangle 14">
-            <a:extLst>
-              <a:ext uri="{FF2B5EF4-FFF2-40B4-BE49-F238E27FC236}">
-                <a16:creationId xmlns:a16="http://schemas.microsoft.com/office/drawing/2014/main" id="{89F9D4E8-0639-444B-949B-9518585061AF}"/>
-              </a:ext>
-              <a:ext uri="{C183D7F6-B498-43B3-948B-1728B52AA6E4}">
-                <adec:decorative xmlns:adec="http://schemas.microsoft.com/office/drawing/2017/decorative" val="1"/>
-              </a:ext>
-            </a:extLst>
-          </p:cNvPr>
-          <p:cNvSpPr>
-            <a:spLocks noGrp="1" noRot="1" noChangeAspect="1" noMove="1" noResize="1" noEditPoints="1" noAdjustHandles="1" noChangeArrowheads="1" noChangeShapeType="1" noTextEdit="1"/>
-          </p:cNvSpPr>
-          <p:nvPr>
-            <p:extLst>
-              <p:ext uri="{386F3935-93C4-4BCD-93E2-E3B085C9AB24}">
-                <p16:designElem xmlns:p16="http://schemas.microsoft.com/office/powerpoint/2015/main" val="1"/>
-              </p:ext>
-            </p:extLst>
-          </p:nvPr>
-        </p:nvSpPr>
-        <p:spPr>
-          <a:xfrm flipH="1">
-            <a:off x="480861" y="0"/>
-            <a:ext cx="7661934" cy="6858000"/>
-          </a:xfrm>
-          <a:prstGeom prst="rect">
-            <a:avLst/>
-          </a:prstGeom>
-          <a:gradFill>
-            <a:gsLst>
-              <a:gs pos="0">
-                <a:schemeClr val="accent1">
-                  <a:lumMod val="75000"/>
-                  <a:alpha val="45000"/>
-                </a:schemeClr>
-              </a:gs>
-              <a:gs pos="100000">
-                <a:srgbClr val="000000">
-                  <a:alpha val="29000"/>
-                </a:srgbClr>
-              </a:gs>
-            </a:gsLst>
-            <a:lin ang="12000000" scaled="0"/>
-          </a:gradFill>
-          <a:ln>
-            <a:noFill/>
-          </a:ln>
-        </p:spPr>
-        <p:style>
-          <a:lnRef idx="2">
-            <a:schemeClr val="accent1">
-              <a:shade val="50000"/>
-            </a:schemeClr>
-          </a:lnRef>
-          <a:fillRef idx="1">
-            <a:schemeClr val="accent1"/>
-          </a:fillRef>
-          <a:effectRef idx="0">
-            <a:schemeClr val="accent1"/>
-          </a:effectRef>
-          <a:fontRef idx="minor">
-            <a:schemeClr val="lt1"/>
-          </a:fontRef>
-        </p:style>
-        <p:txBody>
-          <a:bodyPr rtlCol="0" anchor="ctr"/>
-          <a:lstStyle/>
-          <a:p>
-            <a:pPr algn="ctr"/>
-            <a:endParaRPr lang="en-US" dirty="0"/>
-          </a:p>
-        </p:txBody>
-      </p:sp>
-      <p:sp>
-        <p:nvSpPr>
-          <p:cNvPr id="17" name="Rectangle 16">
-            <a:extLst>
-              <a:ext uri="{FF2B5EF4-FFF2-40B4-BE49-F238E27FC236}">
-                <a16:creationId xmlns:a16="http://schemas.microsoft.com/office/drawing/2014/main" id="{7E3DA7A2-ED70-4BBA-AB72-00AD461FA405}"/>
-              </a:ext>
-              <a:ext uri="{C183D7F6-B498-43B3-948B-1728B52AA6E4}">
-                <adec:decorative xmlns:adec="http://schemas.microsoft.com/office/drawing/2017/decorative" val="1"/>
-              </a:ext>
-            </a:extLst>
-          </p:cNvPr>
-          <p:cNvSpPr>
-            <a:spLocks noGrp="1" noRot="1" noChangeAspect="1" noMove="1" noResize="1" noEditPoints="1" noAdjustHandles="1" noChangeArrowheads="1" noChangeShapeType="1" noTextEdit="1"/>
-          </p:cNvSpPr>
-          <p:nvPr>
-            <p:extLst>
-              <p:ext uri="{386F3935-93C4-4BCD-93E2-E3B085C9AB24}">
-                <p16:designElem xmlns:p16="http://schemas.microsoft.com/office/powerpoint/2015/main" val="1"/>
-              </p:ext>
-            </p:extLst>
-          </p:nvPr>
-        </p:nvSpPr>
-        <p:spPr>
-          <a:xfrm rot="10800000" flipH="1">
-            <a:off x="480862" y="-6"/>
-            <a:ext cx="11711138" cy="6410334"/>
-          </a:xfrm>
-          <a:prstGeom prst="rect">
-            <a:avLst/>
-          </a:prstGeom>
-          <a:gradFill>
-            <a:gsLst>
-              <a:gs pos="0">
-                <a:schemeClr val="accent1">
-                  <a:alpha val="0"/>
-                </a:schemeClr>
-              </a:gs>
-              <a:gs pos="100000">
-                <a:srgbClr val="000000">
-                  <a:alpha val="41000"/>
-                </a:srgbClr>
-              </a:gs>
-            </a:gsLst>
-            <a:lin ang="18000000" scaled="0"/>
-          </a:gradFill>
-          <a:ln>
-            <a:noFill/>
-          </a:ln>
-        </p:spPr>
-        <p:style>
-          <a:lnRef idx="2">
-            <a:schemeClr val="accent1">
-              <a:shade val="50000"/>
-            </a:schemeClr>
-          </a:lnRef>
-          <a:fillRef idx="1">
-            <a:schemeClr val="accent1"/>
-          </a:fillRef>
-          <a:effectRef idx="0">
-            <a:schemeClr val="accent1"/>
-          </a:effectRef>
-          <a:fontRef idx="minor">
-            <a:schemeClr val="lt1"/>
-          </a:fontRef>
-        </p:style>
-        <p:txBody>
-          <a:bodyPr rtlCol="0" anchor="ctr"/>
-          <a:lstStyle/>
-          <a:p>
-            <a:pPr algn="ctr"/>
-            <a:endParaRPr lang="en-US" dirty="0"/>
-          </a:p>
-        </p:txBody>
-      </p:sp>
-      <p:sp>
-        <p:nvSpPr>
-          <p:cNvPr id="4" name="Titel 3">
-            <a:extLst>
-              <a:ext uri="{FF2B5EF4-FFF2-40B4-BE49-F238E27FC236}">
-                <a16:creationId xmlns:a16="http://schemas.microsoft.com/office/drawing/2014/main" id="{889A43D4-4D3C-1E05-E15E-4D5A7B1A7B7A}"/>
-              </a:ext>
-            </a:extLst>
-          </p:cNvPr>
-          <p:cNvSpPr>
-            <a:spLocks noGrp="1"/>
-          </p:cNvSpPr>
-          <p:nvPr>
-            <p:ph type="title"/>
-          </p:nvPr>
-        </p:nvSpPr>
-        <p:spPr>
-          <a:xfrm>
-            <a:off x="1127208" y="857251"/>
-            <a:ext cx="4747280" cy="3098061"/>
-          </a:xfrm>
-        </p:spPr>
-        <p:txBody>
-          <a:bodyPr vert="horz" lIns="91440" tIns="45720" rIns="91440" bIns="45720" rtlCol="0" anchor="b">
-            <a:normAutofit/>
-          </a:bodyPr>
-          <a:lstStyle/>
-          <a:p>
-            <a:r>
-              <a:rPr lang="en-US" sz="4800" kern="1200">
-                <a:solidFill>
-                  <a:srgbClr val="FFFFFF"/>
-                </a:solidFill>
-                <a:latin typeface="+mj-lt"/>
-                <a:ea typeface="+mj-ea"/>
-                <a:cs typeface="+mj-cs"/>
-              </a:rPr>
-              <a:t>De tilemap</a:t>
-            </a:r>
-          </a:p>
-        </p:txBody>
-      </p:sp>
-      <p:sp>
-        <p:nvSpPr>
-          <p:cNvPr id="19" name="Rectangle 18">
-            <a:extLst>
-              <a:ext uri="{FF2B5EF4-FFF2-40B4-BE49-F238E27FC236}">
-                <a16:creationId xmlns:a16="http://schemas.microsoft.com/office/drawing/2014/main" id="{FC485432-3647-4218-B5D3-15D3FA222B13}"/>
-              </a:ext>
-              <a:ext uri="{C183D7F6-B498-43B3-948B-1728B52AA6E4}">
-                <adec:decorative xmlns:adec="http://schemas.microsoft.com/office/drawing/2017/decorative" val="1"/>
-              </a:ext>
-            </a:extLst>
-          </p:cNvPr>
-          <p:cNvSpPr>
-            <a:spLocks noGrp="1" noRot="1" noChangeAspect="1" noMove="1" noResize="1" noEditPoints="1" noAdjustHandles="1" noChangeArrowheads="1" noChangeShapeType="1" noTextEdit="1"/>
-          </p:cNvSpPr>
-          <p:nvPr>
-            <p:extLst>
-              <p:ext uri="{386F3935-93C4-4BCD-93E2-E3B085C9AB24}">
-                <p16:designElem xmlns:p16="http://schemas.microsoft.com/office/powerpoint/2015/main" val="1"/>
-              </p:ext>
-            </p:extLst>
-          </p:nvPr>
-        </p:nvSpPr>
-        <p:spPr>
-          <a:xfrm rot="16200000">
-            <a:off x="4844797" y="-489206"/>
-            <a:ext cx="2502408" cy="12191998"/>
-          </a:xfrm>
-          <a:prstGeom prst="rect">
-            <a:avLst/>
-          </a:prstGeom>
-          <a:gradFill>
-            <a:gsLst>
-              <a:gs pos="0">
-                <a:schemeClr val="accent1">
-                  <a:alpha val="24000"/>
-                </a:schemeClr>
-              </a:gs>
-              <a:gs pos="78000">
-                <a:schemeClr val="accent1">
-                  <a:lumMod val="50000"/>
-                  <a:alpha val="0"/>
-                </a:schemeClr>
-              </a:gs>
-            </a:gsLst>
-            <a:lin ang="10200000" scaled="0"/>
-          </a:gradFill>
-          <a:ln>
-            <a:noFill/>
-          </a:ln>
-        </p:spPr>
-        <p:style>
-          <a:lnRef idx="2">
-            <a:schemeClr val="accent1">
-              <a:shade val="50000"/>
-            </a:schemeClr>
-          </a:lnRef>
-          <a:fillRef idx="1">
-            <a:schemeClr val="accent1"/>
-          </a:fillRef>
-          <a:effectRef idx="0">
-            <a:schemeClr val="accent1"/>
-          </a:effectRef>
-          <a:fontRef idx="minor">
-            <a:schemeClr val="lt1"/>
-          </a:fontRef>
-        </p:style>
-        <p:txBody>
-          <a:bodyPr rtlCol="0" anchor="ctr"/>
-          <a:lstStyle/>
-          <a:p>
-            <a:pPr algn="ctr"/>
-            <a:endParaRPr lang="en-US"/>
-          </a:p>
-        </p:txBody>
-      </p:sp>
-      <p:sp>
-        <p:nvSpPr>
-          <p:cNvPr id="5" name="Tijdelijke aanduiding voor tekst 4">
-            <a:extLst>
-              <a:ext uri="{FF2B5EF4-FFF2-40B4-BE49-F238E27FC236}">
-                <a16:creationId xmlns:a16="http://schemas.microsoft.com/office/drawing/2014/main" id="{29130633-EF9A-B9B3-1A1F-DFA039DD88D5}"/>
-              </a:ext>
-            </a:extLst>
-          </p:cNvPr>
-          <p:cNvSpPr>
-            <a:spLocks noGrp="1"/>
-          </p:cNvSpPr>
-          <p:nvPr>
-            <p:ph type="body" idx="1"/>
-          </p:nvPr>
-        </p:nvSpPr>
-        <p:spPr>
-          <a:xfrm>
-            <a:off x="1127208" y="4756265"/>
-            <a:ext cx="4393278" cy="1244483"/>
-          </a:xfrm>
-        </p:spPr>
-        <p:txBody>
-          <a:bodyPr vert="horz" lIns="91440" tIns="45720" rIns="91440" bIns="45720" rtlCol="0" anchor="t">
-            <a:normAutofit/>
-          </a:bodyPr>
-          <a:lstStyle/>
-          <a:p>
-            <a:r>
-              <a:rPr lang="en-US" kern="1200">
-                <a:solidFill>
-                  <a:srgbClr val="FFFFFF"/>
-                </a:solidFill>
-                <a:latin typeface="+mn-lt"/>
-                <a:ea typeface="+mn-ea"/>
-                <a:cs typeface="+mn-cs"/>
-              </a:rPr>
-              <a:t>Eigenschappen van de tilemap</a:t>
-            </a:r>
-          </a:p>
-        </p:txBody>
-      </p:sp>
-      <p:sp>
-        <p:nvSpPr>
-          <p:cNvPr id="21" name="Oval 20">
-            <a:extLst>
-              <a:ext uri="{FF2B5EF4-FFF2-40B4-BE49-F238E27FC236}">
-                <a16:creationId xmlns:a16="http://schemas.microsoft.com/office/drawing/2014/main" id="{F4AFDDCA-6ABA-4D23-8A5C-1BF0F4308148}"/>
-              </a:ext>
-              <a:ext uri="{C183D7F6-B498-43B3-948B-1728B52AA6E4}">
-                <adec:decorative xmlns:adec="http://schemas.microsoft.com/office/drawing/2017/decorative" val="1"/>
-              </a:ext>
-            </a:extLst>
-          </p:cNvPr>
-          <p:cNvSpPr>
-            <a:spLocks noGrp="1" noRot="1" noChangeAspect="1" noMove="1" noResize="1" noEditPoints="1" noAdjustHandles="1" noChangeArrowheads="1" noChangeShapeType="1" noTextEdit="1"/>
-          </p:cNvSpPr>
-          <p:nvPr>
-            <p:extLst>
-              <p:ext uri="{386F3935-93C4-4BCD-93E2-E3B085C9AB24}">
-                <p16:designElem xmlns:p16="http://schemas.microsoft.com/office/powerpoint/2015/main" val="1"/>
-              </p:ext>
-            </p:extLst>
-          </p:nvPr>
-        </p:nvSpPr>
-        <p:spPr>
-          <a:xfrm>
-            <a:off x="6390589" y="1062544"/>
-            <a:ext cx="4756162" cy="4756162"/>
-          </a:xfrm>
-          <a:prstGeom prst="ellipse">
-            <a:avLst/>
-          </a:prstGeom>
-          <a:solidFill>
-            <a:schemeClr val="bg1"/>
-          </a:solidFill>
-          <a:ln>
-            <a:noFill/>
-          </a:ln>
-        </p:spPr>
-        <p:style>
-          <a:lnRef idx="2">
-            <a:schemeClr val="accent1">
-              <a:shade val="50000"/>
-            </a:schemeClr>
-          </a:lnRef>
-          <a:fillRef idx="1">
-            <a:schemeClr val="accent1"/>
-          </a:fillRef>
-          <a:effectRef idx="0">
-            <a:schemeClr val="accent1"/>
-          </a:effectRef>
-          <a:fontRef idx="minor">
-            <a:schemeClr val="lt1"/>
-          </a:fontRef>
-        </p:style>
-        <p:txBody>
-          <a:bodyPr rtlCol="0" anchor="ctr"/>
-          <a:lstStyle/>
-          <a:p>
-            <a:pPr algn="ctr"/>
-            <a:endParaRPr lang="en-US"/>
-          </a:p>
-        </p:txBody>
-      </p:sp>
       <p:pic>
         <p:nvPicPr>
-          <p:cNvPr id="6" name="Picture 2" descr="Unity Tilemap | Unity Tutorial | NotSlot">
-            <a:extLst>
-              <a:ext uri="{FF2B5EF4-FFF2-40B4-BE49-F238E27FC236}">
-                <a16:creationId xmlns:a16="http://schemas.microsoft.com/office/drawing/2014/main" id="{EBC18240-EEA5-507E-2205-869626DA9B69}"/>
+          <p:cNvPr id="6" name="Tijdelijke aanduiding voor inhoud 5">
+            <a:extLst>
+              <a:ext uri="{FF2B5EF4-FFF2-40B4-BE49-F238E27FC236}">
+                <a16:creationId xmlns:a16="http://schemas.microsoft.com/office/drawing/2014/main" id="{80FD150A-F37A-99BA-45AE-066FD046F732}"/>
               </a:ext>
             </a:extLst>
           </p:cNvPr>
           <p:cNvPicPr>
-            <a:picLocks noChangeAspect="1" noChangeArrowheads="1"/>
+            <a:picLocks noGrp="1" noChangeAspect="1"/>
           </p:cNvPicPr>
-          <p:nvPr/>
+          <p:nvPr>
+            <p:ph idx="1"/>
+          </p:nvPr>
         </p:nvPicPr>
         <p:blipFill>
           <a:blip r:embed="rId2">
@@ -5972,8 +4695,8 @@
         </p:blipFill>
         <p:spPr bwMode="auto">
           <a:xfrm>
-            <a:off x="6920559" y="2389738"/>
-            <a:ext cx="3737164" cy="2092811"/>
+            <a:off x="-202828" y="216310"/>
+            <a:ext cx="12298750" cy="6572070"/>
           </a:xfrm>
           <a:prstGeom prst="rect">
             <a:avLst/>
@@ -5993,7 +4716,7 @@
     </p:spTree>
     <p:extLst>
       <p:ext uri="{BB962C8B-B14F-4D97-AF65-F5344CB8AC3E}">
-        <p14:creationId xmlns:p14="http://schemas.microsoft.com/office/powerpoint/2010/main" val="256746609"/>
+        <p14:creationId xmlns:p14="http://schemas.microsoft.com/office/powerpoint/2010/main" val="1003066990"/>
       </p:ext>
     </p:extLst>
   </p:cSld>
@@ -6025,7 +4748,7 @@
           <p:cNvPr id="2" name="Titel 1">
             <a:extLst>
               <a:ext uri="{FF2B5EF4-FFF2-40B4-BE49-F238E27FC236}">
-                <a16:creationId xmlns:a16="http://schemas.microsoft.com/office/drawing/2014/main" id="{B6BDB707-AB32-D122-E661-8FD7F9C4AD56}"/>
+                <a16:creationId xmlns:a16="http://schemas.microsoft.com/office/drawing/2014/main" id="{06C1E204-452E-2559-3616-AAAB30F4DC86}"/>
               </a:ext>
             </a:extLst>
           </p:cNvPr>
@@ -6042,767 +4765,276 @@
           <a:lstStyle/>
           <a:p>
             <a:r>
+              <a:rPr lang="en-US" dirty="0" err="1"/>
+              <a:t>Drie</a:t>
+            </a:r>
+            <a:r>
+              <a:rPr lang="en-US" dirty="0"/>
+              <a:t> </a:t>
+            </a:r>
+            <a:r>
+              <a:rPr lang="en-US" dirty="0" err="1"/>
+              <a:t>posities</a:t>
+            </a:r>
+            <a:r>
+              <a:rPr lang="en-US" dirty="0"/>
+              <a:t> van </a:t>
+            </a:r>
+            <a:r>
+              <a:rPr lang="en-US" dirty="0" err="1"/>
+              <a:t>belang</a:t>
+            </a:r>
+            <a:endParaRPr lang="nl-NL" dirty="0"/>
+          </a:p>
+        </p:txBody>
+      </p:sp>
+      <p:sp>
+        <p:nvSpPr>
+          <p:cNvPr id="3" name="Tijdelijke aanduiding voor inhoud 2">
+            <a:extLst>
+              <a:ext uri="{FF2B5EF4-FFF2-40B4-BE49-F238E27FC236}">
+                <a16:creationId xmlns:a16="http://schemas.microsoft.com/office/drawing/2014/main" id="{8CE2174D-010B-280B-4236-C0B83D51DEC2}"/>
+              </a:ext>
+            </a:extLst>
+          </p:cNvPr>
+          <p:cNvSpPr>
+            <a:spLocks noGrp="1"/>
+          </p:cNvSpPr>
+          <p:nvPr>
+            <p:ph idx="1"/>
+          </p:nvPr>
+        </p:nvSpPr>
+        <p:spPr/>
+        <p:txBody>
+          <a:bodyPr>
+            <a:normAutofit/>
+          </a:bodyPr>
+          <a:lstStyle/>
+          <a:p>
+            <a:r>
               <a:rPr lang="en-US" dirty="0"/>
               <a:t>De </a:t>
             </a:r>
             <a:r>
               <a:rPr lang="en-US" dirty="0" err="1"/>
-              <a:t>CellBounds</a:t>
-            </a:r>
-            <a:endParaRPr lang="nl-NL" dirty="0"/>
-          </a:p>
-        </p:txBody>
-      </p:sp>
-      <p:pic>
-        <p:nvPicPr>
-          <p:cNvPr id="7" name="Tijdelijke aanduiding voor inhoud 6">
-            <a:extLst>
-              <a:ext uri="{FF2B5EF4-FFF2-40B4-BE49-F238E27FC236}">
-                <a16:creationId xmlns:a16="http://schemas.microsoft.com/office/drawing/2014/main" id="{43C5FD52-9E3B-87CF-C494-8178E57EABB4}"/>
-              </a:ext>
-            </a:extLst>
-          </p:cNvPr>
-          <p:cNvPicPr>
-            <a:picLocks noGrp="1" noChangeAspect="1"/>
-          </p:cNvPicPr>
-          <p:nvPr>
-            <p:ph idx="1"/>
-          </p:nvPr>
-        </p:nvPicPr>
-        <p:blipFill>
-          <a:blip r:embed="rId2"/>
-          <a:stretch>
-            <a:fillRect/>
-          </a:stretch>
-        </p:blipFill>
-        <p:spPr>
-          <a:xfrm>
-            <a:off x="3012384" y="2649636"/>
-            <a:ext cx="5068007" cy="3219899"/>
-          </a:xfrm>
-          <a:prstGeom prst="rect">
-            <a:avLst/>
-          </a:prstGeom>
-        </p:spPr>
-      </p:pic>
-      <p:cxnSp>
-        <p:nvCxnSpPr>
-          <p:cNvPr id="9" name="Rechte verbindingslijn met pijl 8">
-            <a:extLst>
-              <a:ext uri="{FF2B5EF4-FFF2-40B4-BE49-F238E27FC236}">
-                <a16:creationId xmlns:a16="http://schemas.microsoft.com/office/drawing/2014/main" id="{4F1E30A8-8F9D-C306-7BCE-C75D685BAA2E}"/>
-              </a:ext>
-            </a:extLst>
-          </p:cNvPr>
-          <p:cNvCxnSpPr>
-            <a:cxnSpLocks/>
-          </p:cNvCxnSpPr>
-          <p:nvPr/>
-        </p:nvCxnSpPr>
-        <p:spPr>
-          <a:xfrm flipV="1">
-            <a:off x="3579779" y="2360747"/>
-            <a:ext cx="411804" cy="968260"/>
-          </a:xfrm>
-          <a:prstGeom prst="straightConnector1">
-            <a:avLst/>
-          </a:prstGeom>
-          <a:ln w="57150">
-            <a:solidFill>
-              <a:srgbClr val="FF0000"/>
-            </a:solidFill>
-            <a:tailEnd type="triangle"/>
-          </a:ln>
-        </p:spPr>
-        <p:style>
-          <a:lnRef idx="2">
-            <a:schemeClr val="accent1"/>
-          </a:lnRef>
-          <a:fillRef idx="0">
-            <a:schemeClr val="accent1"/>
-          </a:fillRef>
-          <a:effectRef idx="1">
-            <a:schemeClr val="accent1"/>
-          </a:effectRef>
-          <a:fontRef idx="minor">
-            <a:schemeClr val="tx1"/>
-          </a:fontRef>
-        </p:style>
-      </p:cxnSp>
-      <p:sp>
-        <p:nvSpPr>
-          <p:cNvPr id="11" name="Tekstvak 10">
-            <a:extLst>
-              <a:ext uri="{FF2B5EF4-FFF2-40B4-BE49-F238E27FC236}">
-                <a16:creationId xmlns:a16="http://schemas.microsoft.com/office/drawing/2014/main" id="{A05EC34E-A8FA-C87B-6B40-D4BFE1BAF03C}"/>
-              </a:ext>
-            </a:extLst>
-          </p:cNvPr>
-          <p:cNvSpPr txBox="1"/>
-          <p:nvPr/>
-        </p:nvSpPr>
-        <p:spPr>
-          <a:xfrm>
-            <a:off x="5051086" y="843240"/>
-            <a:ext cx="6094378" cy="369332"/>
-          </a:xfrm>
-          <a:prstGeom prst="rect">
-            <a:avLst/>
-          </a:prstGeom>
-          <a:noFill/>
-        </p:spPr>
-        <p:txBody>
-          <a:bodyPr wrap="square">
-            <a:spAutoFit/>
-          </a:bodyPr>
-          <a:lstStyle/>
-          <a:p>
-            <a:r>
-              <a:rPr lang="nl-NL" sz="1800" dirty="0" err="1">
-                <a:solidFill>
-                  <a:srgbClr val="2B91AF"/>
-                </a:solidFill>
-                <a:highlight>
-                  <a:srgbClr val="FFFFFF"/>
-                </a:highlight>
-                <a:latin typeface="Cascadia Mono" panose="020B0609020000020004" pitchFamily="49" charset="0"/>
+              <a:t>positie</a:t>
+            </a:r>
+            <a:r>
+              <a:rPr lang="en-US" dirty="0"/>
+              <a:t> van de </a:t>
+            </a:r>
+            <a:r>
+              <a:rPr lang="en-US" dirty="0" err="1"/>
+              <a:t>muis</a:t>
+            </a:r>
+            <a:endParaRPr lang="en-US" dirty="0"/>
+          </a:p>
+          <a:p>
+            <a:pPr lvl="1"/>
+            <a:r>
+              <a:rPr lang="nl-NL" dirty="0">
+                <a:latin typeface="Courier New" panose="02070309020205020404" pitchFamily="49" charset="0"/>
+                <a:cs typeface="Courier New" panose="02070309020205020404" pitchFamily="49" charset="0"/>
               </a:rPr>
-              <a:t>BoundsInt</a:t>
-            </a:r>
-            <a:r>
-              <a:rPr lang="nl-NL" sz="1800" dirty="0">
-                <a:solidFill>
-                  <a:srgbClr val="000000"/>
-                </a:solidFill>
-                <a:highlight>
-                  <a:srgbClr val="FFFFFF"/>
-                </a:highlight>
-                <a:latin typeface="Cascadia Mono" panose="020B0609020000020004" pitchFamily="49" charset="0"/>
+              <a:t>Vector3 </a:t>
+            </a:r>
+            <a:r>
+              <a:rPr lang="nl-NL" dirty="0" err="1">
+                <a:latin typeface="Courier New" panose="02070309020205020404" pitchFamily="49" charset="0"/>
+                <a:cs typeface="Courier New" panose="02070309020205020404" pitchFamily="49" charset="0"/>
               </a:rPr>
-              <a:t> </a:t>
-            </a:r>
-            <a:r>
-              <a:rPr lang="nl-NL" sz="1800" dirty="0" err="1">
-                <a:solidFill>
-                  <a:srgbClr val="000000"/>
-                </a:solidFill>
-                <a:highlight>
-                  <a:srgbClr val="FFFFFF"/>
-                </a:highlight>
-                <a:latin typeface="Cascadia Mono" panose="020B0609020000020004" pitchFamily="49" charset="0"/>
-              </a:rPr>
-              <a:t>bounds</a:t>
-            </a:r>
-            <a:r>
-              <a:rPr lang="nl-NL" sz="1800" dirty="0">
-                <a:solidFill>
-                  <a:srgbClr val="000000"/>
-                </a:solidFill>
-                <a:highlight>
-                  <a:srgbClr val="FFFFFF"/>
-                </a:highlight>
-                <a:latin typeface="Cascadia Mono" panose="020B0609020000020004" pitchFamily="49" charset="0"/>
+              <a:t>MousePosition</a:t>
+            </a:r>
+            <a:r>
+              <a:rPr lang="nl-NL" dirty="0">
+                <a:latin typeface="Courier New" panose="02070309020205020404" pitchFamily="49" charset="0"/>
+                <a:cs typeface="Courier New" panose="02070309020205020404" pitchFamily="49" charset="0"/>
               </a:rPr>
               <a:t> = </a:t>
             </a:r>
             <a:r>
-              <a:rPr lang="nl-NL" sz="1800" dirty="0" err="1">
-                <a:solidFill>
-                  <a:srgbClr val="000000"/>
-                </a:solidFill>
-                <a:highlight>
-                  <a:srgbClr val="FFFFFF"/>
-                </a:highlight>
-                <a:latin typeface="Cascadia Mono" panose="020B0609020000020004" pitchFamily="49" charset="0"/>
+              <a:rPr lang="nl-NL" dirty="0" err="1">
+                <a:latin typeface="Courier New" panose="02070309020205020404" pitchFamily="49" charset="0"/>
+                <a:cs typeface="Courier New" panose="02070309020205020404" pitchFamily="49" charset="0"/>
               </a:rPr>
-              <a:t>tilemap.cellBounds</a:t>
-            </a:r>
-            <a:r>
-              <a:rPr lang="nl-NL" sz="1800" dirty="0">
-                <a:solidFill>
-                  <a:srgbClr val="000000"/>
-                </a:solidFill>
-                <a:highlight>
-                  <a:srgbClr val="FFFFFF"/>
-                </a:highlight>
-                <a:latin typeface="Cascadia Mono" panose="020B0609020000020004" pitchFamily="49" charset="0"/>
+              <a:t>Input.mousePosition</a:t>
+            </a:r>
+            <a:r>
+              <a:rPr lang="nl-NL" dirty="0">
+                <a:latin typeface="Courier New" panose="02070309020205020404" pitchFamily="49" charset="0"/>
+                <a:cs typeface="Courier New" panose="02070309020205020404" pitchFamily="49" charset="0"/>
               </a:rPr>
               <a:t>;</a:t>
             </a:r>
-            <a:endParaRPr lang="nl-NL" dirty="0"/>
-          </a:p>
-        </p:txBody>
-      </p:sp>
-      <p:sp>
-        <p:nvSpPr>
-          <p:cNvPr id="14" name="Tekstvak 13">
-            <a:extLst>
-              <a:ext uri="{FF2B5EF4-FFF2-40B4-BE49-F238E27FC236}">
-                <a16:creationId xmlns:a16="http://schemas.microsoft.com/office/drawing/2014/main" id="{302623E3-6240-1F4B-AB8F-F67D0B3A6948}"/>
-              </a:ext>
-            </a:extLst>
-          </p:cNvPr>
-          <p:cNvSpPr txBox="1"/>
-          <p:nvPr/>
-        </p:nvSpPr>
-        <p:spPr>
-          <a:xfrm>
-            <a:off x="2679160" y="1991415"/>
-            <a:ext cx="6094378" cy="369332"/>
-          </a:xfrm>
-          <a:prstGeom prst="rect">
-            <a:avLst/>
-          </a:prstGeom>
-          <a:noFill/>
-        </p:spPr>
-        <p:txBody>
-          <a:bodyPr wrap="square">
-            <a:spAutoFit/>
-          </a:bodyPr>
-          <a:lstStyle/>
-          <a:p>
-            <a:r>
-              <a:rPr lang="nl-NL" sz="1800" dirty="0">
-                <a:solidFill>
-                  <a:srgbClr val="2B91AF"/>
-                </a:solidFill>
-                <a:highlight>
-                  <a:srgbClr val="FFFFFF"/>
-                </a:highlight>
-                <a:latin typeface="Cascadia Mono" panose="020B0609020000020004" pitchFamily="49" charset="0"/>
+          </a:p>
+          <a:p>
+            <a:pPr lvl="1"/>
+            <a:endParaRPr lang="en-US" dirty="0"/>
+          </a:p>
+          <a:p>
+            <a:r>
+              <a:rPr lang="en-US" dirty="0"/>
+              <a:t>De </a:t>
+            </a:r>
+            <a:r>
+              <a:rPr lang="en-US" dirty="0" err="1"/>
+              <a:t>wereldpositie</a:t>
+            </a:r>
+            <a:r>
+              <a:rPr lang="en-US" dirty="0"/>
+              <a:t> van de </a:t>
+            </a:r>
+            <a:r>
+              <a:rPr lang="en-US" dirty="0" err="1"/>
+              <a:t>muis</a:t>
+            </a:r>
+            <a:endParaRPr lang="en-US" dirty="0"/>
+          </a:p>
+          <a:p>
+            <a:pPr lvl="1"/>
+            <a:r>
+              <a:rPr lang="en-US" dirty="0">
+                <a:latin typeface="Courier New" panose="02070309020205020404" pitchFamily="49" charset="0"/>
+                <a:cs typeface="Courier New" panose="02070309020205020404" pitchFamily="49" charset="0"/>
               </a:rPr>
-              <a:t>Vector3Int</a:t>
-            </a:r>
-            <a:r>
-              <a:rPr lang="nl-NL" sz="1800" dirty="0">
-                <a:solidFill>
-                  <a:srgbClr val="000000"/>
-                </a:solidFill>
-                <a:highlight>
-                  <a:srgbClr val="FFFFFF"/>
-                </a:highlight>
-                <a:latin typeface="Cascadia Mono" panose="020B0609020000020004" pitchFamily="49" charset="0"/>
+              <a:t>Vector3 </a:t>
+            </a:r>
+            <a:r>
+              <a:rPr lang="en-US" dirty="0" err="1">
+                <a:latin typeface="Courier New" panose="02070309020205020404" pitchFamily="49" charset="0"/>
+                <a:cs typeface="Courier New" panose="02070309020205020404" pitchFamily="49" charset="0"/>
               </a:rPr>
-              <a:t> </a:t>
-            </a:r>
-            <a:r>
-              <a:rPr lang="nl-NL" sz="1800" dirty="0" err="1">
-                <a:solidFill>
-                  <a:srgbClr val="000000"/>
-                </a:solidFill>
-                <a:highlight>
-                  <a:srgbClr val="FFFFFF"/>
-                </a:highlight>
-                <a:latin typeface="Cascadia Mono" panose="020B0609020000020004" pitchFamily="49" charset="0"/>
-              </a:rPr>
-              <a:t>position</a:t>
-            </a:r>
-            <a:r>
-              <a:rPr lang="nl-NL" sz="1800" dirty="0">
-                <a:solidFill>
-                  <a:srgbClr val="000000"/>
-                </a:solidFill>
-                <a:highlight>
-                  <a:srgbClr val="FFFFFF"/>
-                </a:highlight>
-                <a:latin typeface="Cascadia Mono" panose="020B0609020000020004" pitchFamily="49" charset="0"/>
+              <a:t>WorldPosition</a:t>
+            </a:r>
+            <a:r>
+              <a:rPr lang="en-US" dirty="0">
+                <a:latin typeface="Courier New" panose="02070309020205020404" pitchFamily="49" charset="0"/>
+                <a:cs typeface="Courier New" panose="02070309020205020404" pitchFamily="49" charset="0"/>
               </a:rPr>
               <a:t> = </a:t>
             </a:r>
             <a:r>
-              <a:rPr lang="nl-NL" sz="1800" dirty="0" err="1">
-                <a:solidFill>
-                  <a:srgbClr val="000000"/>
-                </a:solidFill>
-                <a:highlight>
-                  <a:srgbClr val="FFFFFF"/>
-                </a:highlight>
-                <a:latin typeface="Cascadia Mono" panose="020B0609020000020004" pitchFamily="49" charset="0"/>
+              <a:rPr lang="en-US" dirty="0" err="1">
+                <a:latin typeface="Courier New" panose="02070309020205020404" pitchFamily="49" charset="0"/>
+                <a:cs typeface="Courier New" panose="02070309020205020404" pitchFamily="49" charset="0"/>
               </a:rPr>
-              <a:t>bounds.position</a:t>
-            </a:r>
-            <a:r>
-              <a:rPr lang="nl-NL" sz="1800" dirty="0">
-                <a:solidFill>
-                  <a:srgbClr val="000000"/>
-                </a:solidFill>
-                <a:highlight>
-                  <a:srgbClr val="FFFFFF"/>
-                </a:highlight>
-                <a:latin typeface="Cascadia Mono" panose="020B0609020000020004" pitchFamily="49" charset="0"/>
+              <a:t>Camera.main.ScreenToWorldPoint</a:t>
+            </a:r>
+            <a:r>
+              <a:rPr lang="en-US" dirty="0">
+                <a:latin typeface="Courier New" panose="02070309020205020404" pitchFamily="49" charset="0"/>
+                <a:cs typeface="Courier New" panose="02070309020205020404" pitchFamily="49" charset="0"/>
               </a:rPr>
-              <a:t>;</a:t>
-            </a:r>
-            <a:endParaRPr lang="nl-NL" dirty="0"/>
-          </a:p>
-        </p:txBody>
-      </p:sp>
-      <p:sp>
-        <p:nvSpPr>
-          <p:cNvPr id="16" name="Tekstvak 15">
-            <a:extLst>
-              <a:ext uri="{FF2B5EF4-FFF2-40B4-BE49-F238E27FC236}">
-                <a16:creationId xmlns:a16="http://schemas.microsoft.com/office/drawing/2014/main" id="{491EE298-4AA6-16DB-479F-A0E2111FEECF}"/>
-              </a:ext>
-            </a:extLst>
-          </p:cNvPr>
-          <p:cNvSpPr txBox="1"/>
-          <p:nvPr/>
-        </p:nvSpPr>
-        <p:spPr>
-          <a:xfrm>
-            <a:off x="3426568" y="6407366"/>
-            <a:ext cx="6094378" cy="369332"/>
-          </a:xfrm>
-          <a:prstGeom prst="rect">
-            <a:avLst/>
-          </a:prstGeom>
-          <a:noFill/>
-        </p:spPr>
-        <p:txBody>
-          <a:bodyPr wrap="square">
-            <a:spAutoFit/>
-          </a:bodyPr>
-          <a:lstStyle/>
-          <a:p>
-            <a:r>
-              <a:rPr lang="en-US" sz="1800">
-                <a:solidFill>
-                  <a:srgbClr val="0000FF"/>
-                </a:solidFill>
-                <a:highlight>
-                  <a:srgbClr val="FFFFFF"/>
-                </a:highlight>
-                <a:latin typeface="Cascadia Mono" panose="020B0609020000020004" pitchFamily="49" charset="0"/>
+              <a:t>( </a:t>
+            </a:r>
+            <a:r>
+              <a:rPr lang="en-US" dirty="0" err="1">
+                <a:latin typeface="Courier New" panose="02070309020205020404" pitchFamily="49" charset="0"/>
+                <a:cs typeface="Courier New" panose="02070309020205020404" pitchFamily="49" charset="0"/>
               </a:rPr>
-              <a:t>int</a:t>
-            </a:r>
-            <a:r>
-              <a:rPr lang="en-US" sz="1800">
-                <a:solidFill>
-                  <a:srgbClr val="000000"/>
-                </a:solidFill>
-                <a:highlight>
-                  <a:srgbClr val="FFFFFF"/>
-                </a:highlight>
-                <a:latin typeface="Cascadia Mono" panose="020B0609020000020004" pitchFamily="49" charset="0"/>
+              <a:t>MousePosition</a:t>
+            </a:r>
+            <a:r>
+              <a:rPr lang="en-US" dirty="0">
+                <a:latin typeface="Courier New" panose="02070309020205020404" pitchFamily="49" charset="0"/>
+                <a:cs typeface="Courier New" panose="02070309020205020404" pitchFamily="49" charset="0"/>
               </a:rPr>
-              <a:t> </a:t>
-            </a:r>
-            <a:r>
-              <a:rPr lang="en-US" sz="1800" dirty="0" err="1">
-                <a:solidFill>
-                  <a:srgbClr val="000000"/>
-                </a:solidFill>
-                <a:highlight>
-                  <a:srgbClr val="FFFFFF"/>
-                </a:highlight>
-                <a:latin typeface="Cascadia Mono" panose="020B0609020000020004" pitchFamily="49" charset="0"/>
+              <a:t> );</a:t>
+            </a:r>
+          </a:p>
+          <a:p>
+            <a:pPr lvl="1"/>
+            <a:endParaRPr lang="en-US" dirty="0"/>
+          </a:p>
+          <a:p>
+            <a:r>
+              <a:rPr lang="en-US" dirty="0"/>
+              <a:t>De </a:t>
+            </a:r>
+            <a:r>
+              <a:rPr lang="en-US" dirty="0" err="1"/>
+              <a:t>positie</a:t>
+            </a:r>
+            <a:r>
+              <a:rPr lang="en-US" dirty="0"/>
+              <a:t> van de Cell </a:t>
+            </a:r>
+            <a:r>
+              <a:rPr lang="en-US" dirty="0" err="1"/>
+              <a:t>waar</a:t>
+            </a:r>
+            <a:r>
+              <a:rPr lang="en-US" dirty="0"/>
+              <a:t> op is </a:t>
+            </a:r>
+            <a:r>
+              <a:rPr lang="en-US" dirty="0" err="1"/>
+              <a:t>geklikt</a:t>
+            </a:r>
+            <a:endParaRPr lang="en-US" dirty="0"/>
+          </a:p>
+          <a:p>
+            <a:pPr lvl="1"/>
+            <a:r>
+              <a:rPr lang="en-US" sz="1400" dirty="0">
+                <a:latin typeface="Courier New" panose="02070309020205020404" pitchFamily="49" charset="0"/>
+                <a:cs typeface="Courier New" panose="02070309020205020404" pitchFamily="49" charset="0"/>
               </a:rPr>
-              <a:t>sizeX</a:t>
-            </a:r>
-            <a:r>
-              <a:rPr lang="en-US" sz="1800" dirty="0">
-                <a:solidFill>
-                  <a:srgbClr val="000000"/>
-                </a:solidFill>
-                <a:highlight>
-                  <a:srgbClr val="FFFFFF"/>
-                </a:highlight>
-                <a:latin typeface="Cascadia Mono" panose="020B0609020000020004" pitchFamily="49" charset="0"/>
+              <a:t>Vector3Int </a:t>
+            </a:r>
+            <a:r>
+              <a:rPr lang="en-US" sz="1400" dirty="0" err="1">
+                <a:latin typeface="Courier New" panose="02070309020205020404" pitchFamily="49" charset="0"/>
+                <a:cs typeface="Courier New" panose="02070309020205020404" pitchFamily="49" charset="0"/>
+              </a:rPr>
+              <a:t>CellPosition</a:t>
+            </a:r>
+            <a:r>
+              <a:rPr lang="en-US" sz="1400" dirty="0">
+                <a:latin typeface="Courier New" panose="02070309020205020404" pitchFamily="49" charset="0"/>
+                <a:cs typeface="Courier New" panose="02070309020205020404" pitchFamily="49" charset="0"/>
               </a:rPr>
               <a:t> = </a:t>
             </a:r>
             <a:r>
-              <a:rPr lang="en-US" sz="1800" dirty="0" err="1">
-                <a:solidFill>
-                  <a:srgbClr val="000000"/>
-                </a:solidFill>
-                <a:highlight>
-                  <a:srgbClr val="FFFFFF"/>
-                </a:highlight>
-                <a:latin typeface="Cascadia Mono" panose="020B0609020000020004" pitchFamily="49" charset="0"/>
+              <a:rPr lang="en-US" sz="1400" dirty="0" err="1">
+                <a:latin typeface="Courier New" panose="02070309020205020404" pitchFamily="49" charset="0"/>
+                <a:cs typeface="Courier New" panose="02070309020205020404" pitchFamily="49" charset="0"/>
               </a:rPr>
-              <a:t>bounds.size.x</a:t>
-            </a:r>
-            <a:r>
-              <a:rPr lang="en-US" sz="1800" dirty="0">
-                <a:solidFill>
-                  <a:srgbClr val="000000"/>
-                </a:solidFill>
-                <a:highlight>
-                  <a:srgbClr val="FFFFFF"/>
-                </a:highlight>
-                <a:latin typeface="Cascadia Mono" panose="020B0609020000020004" pitchFamily="49" charset="0"/>
+              <a:t>myTilemap.WorldToCell</a:t>
+            </a:r>
+            <a:r>
+              <a:rPr lang="en-US" sz="1400" dirty="0">
+                <a:latin typeface="Courier New" panose="02070309020205020404" pitchFamily="49" charset="0"/>
+                <a:cs typeface="Courier New" panose="02070309020205020404" pitchFamily="49" charset="0"/>
               </a:rPr>
-              <a:t>;</a:t>
-            </a:r>
-            <a:endParaRPr lang="nl-NL" dirty="0"/>
-          </a:p>
-        </p:txBody>
-      </p:sp>
-      <p:cxnSp>
-        <p:nvCxnSpPr>
-          <p:cNvPr id="23" name="Rechte verbindingslijn met pijl 22">
-            <a:extLst>
-              <a:ext uri="{FF2B5EF4-FFF2-40B4-BE49-F238E27FC236}">
-                <a16:creationId xmlns:a16="http://schemas.microsoft.com/office/drawing/2014/main" id="{7149F981-2761-A7CC-C000-75014DDEA7C1}"/>
-              </a:ext>
-            </a:extLst>
-          </p:cNvPr>
-          <p:cNvCxnSpPr>
-            <a:cxnSpLocks/>
-          </p:cNvCxnSpPr>
-          <p:nvPr/>
-        </p:nvCxnSpPr>
-        <p:spPr>
-          <a:xfrm>
-            <a:off x="8540885" y="3180946"/>
-            <a:ext cx="0" cy="2258159"/>
-          </a:xfrm>
-          <a:prstGeom prst="straightConnector1">
-            <a:avLst/>
-          </a:prstGeom>
-          <a:ln w="38100">
-            <a:headEnd type="triangle"/>
-            <a:tailEnd type="triangle"/>
-          </a:ln>
-        </p:spPr>
-        <p:style>
-          <a:lnRef idx="2">
-            <a:schemeClr val="accent1"/>
-          </a:lnRef>
-          <a:fillRef idx="0">
-            <a:schemeClr val="accent1"/>
-          </a:fillRef>
-          <a:effectRef idx="1">
-            <a:schemeClr val="accent1"/>
-          </a:effectRef>
-          <a:fontRef idx="minor">
-            <a:schemeClr val="tx1"/>
-          </a:fontRef>
-        </p:style>
-      </p:cxnSp>
-      <p:cxnSp>
-        <p:nvCxnSpPr>
-          <p:cNvPr id="25" name="Rechte verbindingslijn met pijl 24">
-            <a:extLst>
-              <a:ext uri="{FF2B5EF4-FFF2-40B4-BE49-F238E27FC236}">
-                <a16:creationId xmlns:a16="http://schemas.microsoft.com/office/drawing/2014/main" id="{CA45215D-A4B8-2A6B-FB20-359C38EA9A8F}"/>
-              </a:ext>
-            </a:extLst>
-          </p:cNvPr>
-          <p:cNvCxnSpPr/>
-          <p:nvPr/>
-        </p:nvCxnSpPr>
-        <p:spPr>
-          <a:xfrm>
-            <a:off x="3426568" y="6310008"/>
-            <a:ext cx="4112368" cy="0"/>
-          </a:xfrm>
-          <a:prstGeom prst="straightConnector1">
-            <a:avLst/>
-          </a:prstGeom>
-          <a:ln w="38100">
-            <a:headEnd type="triangle"/>
-            <a:tailEnd type="triangle"/>
-          </a:ln>
-        </p:spPr>
-        <p:style>
-          <a:lnRef idx="2">
-            <a:schemeClr val="accent1"/>
-          </a:lnRef>
-          <a:fillRef idx="0">
-            <a:schemeClr val="accent1"/>
-          </a:fillRef>
-          <a:effectRef idx="1">
-            <a:schemeClr val="accent1"/>
-          </a:effectRef>
-          <a:fontRef idx="minor">
-            <a:schemeClr val="tx1"/>
-          </a:fontRef>
-        </p:style>
-      </p:cxnSp>
-      <p:cxnSp>
-        <p:nvCxnSpPr>
-          <p:cNvPr id="30" name="Rechte verbindingslijn 29">
-            <a:extLst>
-              <a:ext uri="{FF2B5EF4-FFF2-40B4-BE49-F238E27FC236}">
-                <a16:creationId xmlns:a16="http://schemas.microsoft.com/office/drawing/2014/main" id="{8C5D0D57-A38E-7580-5B0B-7D4CC5AF7586}"/>
-              </a:ext>
-            </a:extLst>
-          </p:cNvPr>
-          <p:cNvCxnSpPr/>
-          <p:nvPr/>
-        </p:nvCxnSpPr>
-        <p:spPr>
-          <a:xfrm>
-            <a:off x="3426568" y="5370932"/>
-            <a:ext cx="0" cy="1065536"/>
-          </a:xfrm>
-          <a:prstGeom prst="line">
-            <a:avLst/>
-          </a:prstGeom>
-          <a:ln>
-            <a:prstDash val="dash"/>
-          </a:ln>
-        </p:spPr>
-        <p:style>
-          <a:lnRef idx="2">
-            <a:schemeClr val="accent1"/>
-          </a:lnRef>
-          <a:fillRef idx="0">
-            <a:schemeClr val="accent1"/>
-          </a:fillRef>
-          <a:effectRef idx="1">
-            <a:schemeClr val="accent1"/>
-          </a:effectRef>
-          <a:fontRef idx="minor">
-            <a:schemeClr val="tx1"/>
-          </a:fontRef>
-        </p:style>
-      </p:cxnSp>
-      <p:cxnSp>
-        <p:nvCxnSpPr>
-          <p:cNvPr id="31" name="Rechte verbindingslijn 30">
-            <a:extLst>
-              <a:ext uri="{FF2B5EF4-FFF2-40B4-BE49-F238E27FC236}">
-                <a16:creationId xmlns:a16="http://schemas.microsoft.com/office/drawing/2014/main" id="{5B4CC3CF-3863-6766-C37D-4ACCB3464E5D}"/>
-              </a:ext>
-            </a:extLst>
-          </p:cNvPr>
-          <p:cNvCxnSpPr/>
-          <p:nvPr/>
-        </p:nvCxnSpPr>
-        <p:spPr>
-          <a:xfrm>
-            <a:off x="7557581" y="5341752"/>
-            <a:ext cx="0" cy="1065536"/>
-          </a:xfrm>
-          <a:prstGeom prst="line">
-            <a:avLst/>
-          </a:prstGeom>
-          <a:ln>
-            <a:prstDash val="dash"/>
-          </a:ln>
-        </p:spPr>
-        <p:style>
-          <a:lnRef idx="2">
-            <a:schemeClr val="accent1"/>
-          </a:lnRef>
-          <a:fillRef idx="0">
-            <a:schemeClr val="accent1"/>
-          </a:fillRef>
-          <a:effectRef idx="1">
-            <a:schemeClr val="accent1"/>
-          </a:effectRef>
-          <a:fontRef idx="minor">
-            <a:schemeClr val="tx1"/>
-          </a:fontRef>
-        </p:style>
-      </p:cxnSp>
-      <p:cxnSp>
-        <p:nvCxnSpPr>
-          <p:cNvPr id="32" name="Rechte verbindingslijn 31">
-            <a:extLst>
-              <a:ext uri="{FF2B5EF4-FFF2-40B4-BE49-F238E27FC236}">
-                <a16:creationId xmlns:a16="http://schemas.microsoft.com/office/drawing/2014/main" id="{C950FE51-B85F-78CF-F96B-60D25CDEA90A}"/>
-              </a:ext>
-            </a:extLst>
-          </p:cNvPr>
-          <p:cNvCxnSpPr>
-            <a:cxnSpLocks/>
-          </p:cNvCxnSpPr>
-          <p:nvPr/>
-        </p:nvCxnSpPr>
-        <p:spPr>
-          <a:xfrm>
-            <a:off x="7247106" y="3180946"/>
-            <a:ext cx="1526432" cy="0"/>
-          </a:xfrm>
-          <a:prstGeom prst="line">
-            <a:avLst/>
-          </a:prstGeom>
-          <a:ln>
-            <a:prstDash val="dash"/>
-          </a:ln>
-        </p:spPr>
-        <p:style>
-          <a:lnRef idx="2">
-            <a:schemeClr val="accent1"/>
-          </a:lnRef>
-          <a:fillRef idx="0">
-            <a:schemeClr val="accent1"/>
-          </a:fillRef>
-          <a:effectRef idx="1">
-            <a:schemeClr val="accent1"/>
-          </a:effectRef>
-          <a:fontRef idx="minor">
-            <a:schemeClr val="tx1"/>
-          </a:fontRef>
-        </p:style>
-      </p:cxnSp>
-      <p:cxnSp>
-        <p:nvCxnSpPr>
-          <p:cNvPr id="35" name="Rechte verbindingslijn 34">
-            <a:extLst>
-              <a:ext uri="{FF2B5EF4-FFF2-40B4-BE49-F238E27FC236}">
-                <a16:creationId xmlns:a16="http://schemas.microsoft.com/office/drawing/2014/main" id="{1A71F544-BA40-123F-03FD-ADE3B60EAAA4}"/>
-              </a:ext>
-            </a:extLst>
-          </p:cNvPr>
-          <p:cNvCxnSpPr>
-            <a:cxnSpLocks/>
-          </p:cNvCxnSpPr>
-          <p:nvPr/>
-        </p:nvCxnSpPr>
-        <p:spPr>
-          <a:xfrm>
-            <a:off x="7276289" y="5439105"/>
-            <a:ext cx="1489144" cy="0"/>
-          </a:xfrm>
-          <a:prstGeom prst="line">
-            <a:avLst/>
-          </a:prstGeom>
-          <a:ln>
-            <a:prstDash val="dash"/>
-          </a:ln>
-        </p:spPr>
-        <p:style>
-          <a:lnRef idx="2">
-            <a:schemeClr val="accent1"/>
-          </a:lnRef>
-          <a:fillRef idx="0">
-            <a:schemeClr val="accent1"/>
-          </a:fillRef>
-          <a:effectRef idx="1">
-            <a:schemeClr val="accent1"/>
-          </a:effectRef>
-          <a:fontRef idx="minor">
-            <a:schemeClr val="tx1"/>
-          </a:fontRef>
-        </p:style>
-      </p:cxnSp>
-      <p:sp>
-        <p:nvSpPr>
-          <p:cNvPr id="47" name="Tekstvak 46">
-            <a:extLst>
-              <a:ext uri="{FF2B5EF4-FFF2-40B4-BE49-F238E27FC236}">
-                <a16:creationId xmlns:a16="http://schemas.microsoft.com/office/drawing/2014/main" id="{38FDCBC1-3228-2858-E3DA-73DDED776747}"/>
-              </a:ext>
-            </a:extLst>
-          </p:cNvPr>
-          <p:cNvSpPr txBox="1"/>
-          <p:nvPr/>
-        </p:nvSpPr>
-        <p:spPr>
-          <a:xfrm rot="5400000">
-            <a:off x="6988948" y="3750669"/>
-            <a:ext cx="3975801" cy="369332"/>
-          </a:xfrm>
-          <a:prstGeom prst="rect">
-            <a:avLst/>
-          </a:prstGeom>
-          <a:noFill/>
-        </p:spPr>
-        <p:txBody>
-          <a:bodyPr wrap="square">
-            <a:spAutoFit/>
-          </a:bodyPr>
-          <a:lstStyle/>
-          <a:p>
-            <a:r>
-              <a:rPr lang="en-US" sz="1800">
-                <a:solidFill>
-                  <a:srgbClr val="000000"/>
-                </a:solidFill>
-                <a:highlight>
-                  <a:srgbClr val="FFFFFF"/>
-                </a:highlight>
-                <a:latin typeface="Cascadia Mono" panose="020B0609020000020004" pitchFamily="49" charset="0"/>
+              <a:t>( </a:t>
+            </a:r>
+            <a:r>
+              <a:rPr lang="en-US" sz="1400" dirty="0" err="1">
+                <a:latin typeface="Courier New" panose="02070309020205020404" pitchFamily="49" charset="0"/>
+                <a:cs typeface="Courier New" panose="02070309020205020404" pitchFamily="49" charset="0"/>
               </a:rPr>
-              <a:t> </a:t>
-            </a:r>
-            <a:r>
-              <a:rPr lang="en-US" sz="1800">
-                <a:solidFill>
-                  <a:srgbClr val="0000FF"/>
-                </a:solidFill>
-                <a:highlight>
-                  <a:srgbClr val="FFFFFF"/>
-                </a:highlight>
-                <a:latin typeface="Cascadia Mono" panose="020B0609020000020004" pitchFamily="49" charset="0"/>
+              <a:t>WorldPosition</a:t>
+            </a:r>
+            <a:r>
+              <a:rPr lang="en-US" sz="1400" dirty="0">
+                <a:latin typeface="Courier New" panose="02070309020205020404" pitchFamily="49" charset="0"/>
+                <a:cs typeface="Courier New" panose="02070309020205020404" pitchFamily="49" charset="0"/>
               </a:rPr>
-              <a:t>int</a:t>
-            </a:r>
-            <a:r>
-              <a:rPr lang="en-US" sz="1800">
-                <a:solidFill>
-                  <a:srgbClr val="000000"/>
-                </a:solidFill>
-                <a:highlight>
-                  <a:srgbClr val="FFFFFF"/>
-                </a:highlight>
-                <a:latin typeface="Cascadia Mono" panose="020B0609020000020004" pitchFamily="49" charset="0"/>
-              </a:rPr>
-              <a:t> </a:t>
-            </a:r>
-            <a:r>
-              <a:rPr lang="en-US" sz="1800" dirty="0" err="1">
-                <a:solidFill>
-                  <a:srgbClr val="000000"/>
-                </a:solidFill>
-                <a:highlight>
-                  <a:srgbClr val="FFFFFF"/>
-                </a:highlight>
-                <a:latin typeface="Cascadia Mono" panose="020B0609020000020004" pitchFamily="49" charset="0"/>
-              </a:rPr>
-              <a:t>sizeY</a:t>
-            </a:r>
-            <a:r>
-              <a:rPr lang="en-US" sz="1800" dirty="0">
-                <a:solidFill>
-                  <a:srgbClr val="000000"/>
-                </a:solidFill>
-                <a:highlight>
-                  <a:srgbClr val="FFFFFF"/>
-                </a:highlight>
-                <a:latin typeface="Cascadia Mono" panose="020B0609020000020004" pitchFamily="49" charset="0"/>
-              </a:rPr>
-              <a:t> = </a:t>
-            </a:r>
-            <a:r>
-              <a:rPr lang="en-US" sz="1800" dirty="0" err="1">
-                <a:solidFill>
-                  <a:srgbClr val="000000"/>
-                </a:solidFill>
-                <a:highlight>
-                  <a:srgbClr val="FFFFFF"/>
-                </a:highlight>
-                <a:latin typeface="Cascadia Mono" panose="020B0609020000020004" pitchFamily="49" charset="0"/>
-              </a:rPr>
-              <a:t>bounds.size.y</a:t>
-            </a:r>
-            <a:r>
-              <a:rPr lang="en-US" sz="1800" dirty="0">
-                <a:solidFill>
-                  <a:srgbClr val="000000"/>
-                </a:solidFill>
-                <a:highlight>
-                  <a:srgbClr val="FFFFFF"/>
-                </a:highlight>
-                <a:latin typeface="Cascadia Mono" panose="020B0609020000020004" pitchFamily="49" charset="0"/>
-              </a:rPr>
-              <a:t>;</a:t>
-            </a:r>
-            <a:endParaRPr lang="nl-NL" dirty="0"/>
+              <a:t> );</a:t>
+            </a:r>
+            <a:endParaRPr lang="nl-NL" sz="1400" dirty="0">
+              <a:latin typeface="Courier New" panose="02070309020205020404" pitchFamily="49" charset="0"/>
+              <a:cs typeface="Courier New" panose="02070309020205020404" pitchFamily="49" charset="0"/>
+            </a:endParaRPr>
           </a:p>
         </p:txBody>
       </p:sp>
     </p:spTree>
     <p:extLst>
       <p:ext uri="{BB962C8B-B14F-4D97-AF65-F5344CB8AC3E}">
-        <p14:creationId xmlns:p14="http://schemas.microsoft.com/office/powerpoint/2010/main" val="366099131"/>
+        <p14:creationId xmlns:p14="http://schemas.microsoft.com/office/powerpoint/2010/main" val="1142169997"/>
       </p:ext>
     </p:extLst>
   </p:cSld>
@@ -6834,7 +5066,7 @@
           <p:cNvPr id="2" name="Titel 1">
             <a:extLst>
               <a:ext uri="{FF2B5EF4-FFF2-40B4-BE49-F238E27FC236}">
-                <a16:creationId xmlns:a16="http://schemas.microsoft.com/office/drawing/2014/main" id="{D326045E-7B95-4E27-AFF7-F11546D72FBB}"/>
+                <a16:creationId xmlns:a16="http://schemas.microsoft.com/office/drawing/2014/main" id="{2D27ED14-CDC6-93A9-CE11-A43635FE703F}"/>
               </a:ext>
             </a:extLst>
           </p:cNvPr>
@@ -6850,7 +5082,15 @@
           <a:bodyPr/>
           <a:lstStyle/>
           <a:p>
-            <a:endParaRPr lang="nl-NL"/>
+            <a:r>
+              <a:rPr lang="en-US" dirty="0" err="1"/>
+              <a:t>Opdracht</a:t>
+            </a:r>
+            <a:r>
+              <a:rPr lang="en-US" dirty="0"/>
+              <a:t> 1</a:t>
+            </a:r>
+            <a:endParaRPr lang="nl-NL" dirty="0"/>
           </a:p>
         </p:txBody>
       </p:sp>
@@ -6859,7 +5099,7 @@
           <p:cNvPr id="3" name="Tijdelijke aanduiding voor inhoud 2">
             <a:extLst>
               <a:ext uri="{FF2B5EF4-FFF2-40B4-BE49-F238E27FC236}">
-                <a16:creationId xmlns:a16="http://schemas.microsoft.com/office/drawing/2014/main" id="{6579D0B4-4BF7-63AE-95A1-58B3276B1DDE}"/>
+                <a16:creationId xmlns:a16="http://schemas.microsoft.com/office/drawing/2014/main" id="{DBD3B470-FCAE-284D-5F76-F0ACFAE01287}"/>
               </a:ext>
             </a:extLst>
           </p:cNvPr>
@@ -6867,7 +5107,7 @@
             <a:spLocks noGrp="1"/>
           </p:cNvSpPr>
           <p:nvPr>
-            <p:ph idx="1"/>
+            <p:ph type="body" idx="1"/>
           </p:nvPr>
         </p:nvSpPr>
         <p:spPr/>
@@ -6875,14 +5115,2820 @@
           <a:bodyPr/>
           <a:lstStyle/>
           <a:p>
-            <a:endParaRPr lang="nl-NL"/>
+            <a:r>
+              <a:rPr lang="en-US" dirty="0" err="1"/>
+              <a:t>Selecteer</a:t>
+            </a:r>
+            <a:r>
+              <a:rPr lang="en-US" dirty="0"/>
+              <a:t> </a:t>
+            </a:r>
+            <a:r>
+              <a:rPr lang="en-US" dirty="0" err="1"/>
+              <a:t>een</a:t>
+            </a:r>
+            <a:r>
+              <a:rPr lang="en-US" dirty="0"/>
+              <a:t> Tile </a:t>
+            </a:r>
+            <a:r>
+              <a:rPr lang="en-US" dirty="0" err="1"/>
+              <a:t>en</a:t>
+            </a:r>
+            <a:r>
+              <a:rPr lang="en-US" dirty="0"/>
+              <a:t> </a:t>
+            </a:r>
+            <a:r>
+              <a:rPr lang="en-US" dirty="0" err="1"/>
+              <a:t>verander</a:t>
+            </a:r>
+            <a:r>
+              <a:rPr lang="en-US" dirty="0"/>
+              <a:t> de </a:t>
+            </a:r>
+            <a:r>
+              <a:rPr lang="en-US" dirty="0" err="1"/>
+              <a:t>kleur</a:t>
+            </a:r>
+            <a:r>
+              <a:rPr lang="en-US" dirty="0"/>
+              <a:t> van de Tile</a:t>
+            </a:r>
+            <a:endParaRPr lang="nl-NL" dirty="0"/>
           </a:p>
         </p:txBody>
       </p:sp>
     </p:spTree>
     <p:extLst>
       <p:ext uri="{BB962C8B-B14F-4D97-AF65-F5344CB8AC3E}">
-        <p14:creationId xmlns:p14="http://schemas.microsoft.com/office/powerpoint/2010/main" val="1003066990"/>
+        <p14:creationId xmlns:p14="http://schemas.microsoft.com/office/powerpoint/2010/main" val="13667862"/>
+      </p:ext>
+    </p:extLst>
+  </p:cSld>
+  <p:clrMapOvr>
+    <a:masterClrMapping/>
+  </p:clrMapOvr>
+</p:sld>
+</file>
+
+<file path=ppt/slides/slide6.xml><?xml version="1.0" encoding="utf-8"?>
+<p:sld xmlns:a="http://schemas.openxmlformats.org/drawingml/2006/main" xmlns:r="http://schemas.openxmlformats.org/officeDocument/2006/relationships" xmlns:p="http://schemas.openxmlformats.org/presentationml/2006/main">
+  <p:cSld>
+    <p:spTree>
+      <p:nvGrpSpPr>
+        <p:cNvPr id="1" name=""/>
+        <p:cNvGrpSpPr/>
+        <p:nvPr/>
+      </p:nvGrpSpPr>
+      <p:grpSpPr>
+        <a:xfrm>
+          <a:off x="0" y="0"/>
+          <a:ext cx="0" cy="0"/>
+          <a:chOff x="0" y="0"/>
+          <a:chExt cx="0" cy="0"/>
+        </a:xfrm>
+      </p:grpSpPr>
+      <p:sp>
+        <p:nvSpPr>
+          <p:cNvPr id="2" name="Titel 1">
+            <a:extLst>
+              <a:ext uri="{FF2B5EF4-FFF2-40B4-BE49-F238E27FC236}">
+                <a16:creationId xmlns:a16="http://schemas.microsoft.com/office/drawing/2014/main" id="{FE45CA3E-C9D6-04E4-C92D-157A40F1CBB5}"/>
+              </a:ext>
+            </a:extLst>
+          </p:cNvPr>
+          <p:cNvSpPr>
+            <a:spLocks noGrp="1"/>
+          </p:cNvSpPr>
+          <p:nvPr>
+            <p:ph type="title"/>
+          </p:nvPr>
+        </p:nvSpPr>
+        <p:spPr/>
+        <p:txBody>
+          <a:bodyPr/>
+          <a:lstStyle/>
+          <a:p>
+            <a:r>
+              <a:rPr lang="en-US" dirty="0"/>
+              <a:t>De </a:t>
+            </a:r>
+            <a:r>
+              <a:rPr lang="en-US" dirty="0" err="1"/>
+              <a:t>Cellposities</a:t>
+            </a:r>
+            <a:r>
+              <a:rPr lang="en-US" dirty="0"/>
+              <a:t> in </a:t>
+            </a:r>
+            <a:r>
+              <a:rPr lang="en-US" dirty="0" err="1"/>
+              <a:t>een</a:t>
+            </a:r>
+            <a:r>
+              <a:rPr lang="en-US" dirty="0"/>
+              <a:t> </a:t>
+            </a:r>
+            <a:r>
+              <a:rPr lang="en-US" dirty="0" err="1"/>
+              <a:t>tilemap</a:t>
+            </a:r>
+            <a:endParaRPr lang="nl-NL" dirty="0"/>
+          </a:p>
+        </p:txBody>
+      </p:sp>
+      <p:graphicFrame>
+        <p:nvGraphicFramePr>
+          <p:cNvPr id="4" name="Tijdelijke aanduiding voor inhoud 3">
+            <a:extLst>
+              <a:ext uri="{FF2B5EF4-FFF2-40B4-BE49-F238E27FC236}">
+                <a16:creationId xmlns:a16="http://schemas.microsoft.com/office/drawing/2014/main" id="{46F070CE-EADB-2F3A-2375-D04EE4C4A0F4}"/>
+              </a:ext>
+            </a:extLst>
+          </p:cNvPr>
+          <p:cNvGraphicFramePr>
+            <a:graphicFrameLocks noGrp="1"/>
+          </p:cNvGraphicFramePr>
+          <p:nvPr>
+            <p:ph idx="1"/>
+            <p:extLst>
+              <p:ext uri="{D42A27DB-BD31-4B8C-83A1-F6EECF244321}">
+                <p14:modId xmlns:p14="http://schemas.microsoft.com/office/powerpoint/2010/main" val="3460058198"/>
+              </p:ext>
+            </p:extLst>
+          </p:nvPr>
+        </p:nvGraphicFramePr>
+        <p:xfrm>
+          <a:off x="838200" y="1825625"/>
+          <a:ext cx="9696855" cy="3524589"/>
+        </p:xfrm>
+        <a:graphic>
+          <a:graphicData uri="http://schemas.openxmlformats.org/drawingml/2006/table">
+            <a:tbl>
+              <a:tblPr>
+                <a:tableStyleId>{5C22544A-7EE6-4342-B048-85BDC9FD1C3A}</a:tableStyleId>
+              </a:tblPr>
+              <a:tblGrid>
+                <a:gridCol w="1939371">
+                  <a:extLst>
+                    <a:ext uri="{9D8B030D-6E8A-4147-A177-3AD203B41FA5}">
+                      <a16:colId xmlns:a16="http://schemas.microsoft.com/office/drawing/2014/main" val="2107307277"/>
+                    </a:ext>
+                  </a:extLst>
+                </a:gridCol>
+                <a:gridCol w="1939371">
+                  <a:extLst>
+                    <a:ext uri="{9D8B030D-6E8A-4147-A177-3AD203B41FA5}">
+                      <a16:colId xmlns:a16="http://schemas.microsoft.com/office/drawing/2014/main" val="2383791748"/>
+                    </a:ext>
+                  </a:extLst>
+                </a:gridCol>
+                <a:gridCol w="1939371">
+                  <a:extLst>
+                    <a:ext uri="{9D8B030D-6E8A-4147-A177-3AD203B41FA5}">
+                      <a16:colId xmlns:a16="http://schemas.microsoft.com/office/drawing/2014/main" val="1693957628"/>
+                    </a:ext>
+                  </a:extLst>
+                </a:gridCol>
+                <a:gridCol w="1939371">
+                  <a:extLst>
+                    <a:ext uri="{9D8B030D-6E8A-4147-A177-3AD203B41FA5}">
+                      <a16:colId xmlns:a16="http://schemas.microsoft.com/office/drawing/2014/main" val="887910622"/>
+                    </a:ext>
+                  </a:extLst>
+                </a:gridCol>
+                <a:gridCol w="1939371">
+                  <a:extLst>
+                    <a:ext uri="{9D8B030D-6E8A-4147-A177-3AD203B41FA5}">
+                      <a16:colId xmlns:a16="http://schemas.microsoft.com/office/drawing/2014/main" val="477929398"/>
+                    </a:ext>
+                  </a:extLst>
+                </a:gridCol>
+              </a:tblGrid>
+              <a:tr h="705067">
+                <a:tc>
+                  <a:txBody>
+                    <a:bodyPr/>
+                    <a:lstStyle/>
+                    <a:p>
+                      <a:pPr marL="0" marR="0" lvl="0" indent="0" algn="ctr" defTabSz="914400" rtl="0" eaLnBrk="1" fontAlgn="auto" latinLnBrk="0" hangingPunct="1">
+                        <a:lnSpc>
+                          <a:spcPct val="100000"/>
+                        </a:lnSpc>
+                        <a:spcBef>
+                          <a:spcPts val="0"/>
+                        </a:spcBef>
+                        <a:spcAft>
+                          <a:spcPts val="0"/>
+                        </a:spcAft>
+                        <a:buClrTx/>
+                        <a:buSzTx/>
+                        <a:buFontTx/>
+                        <a:buNone/>
+                        <a:tabLst/>
+                        <a:defRPr/>
+                      </a:pPr>
+                      <a:r>
+                        <a:rPr lang="en-US" b="1" dirty="0">
+                          <a:latin typeface="Courier New" panose="02070309020205020404" pitchFamily="49" charset="0"/>
+                          <a:cs typeface="Courier New" panose="02070309020205020404" pitchFamily="49" charset="0"/>
+                        </a:rPr>
+                        <a:t>(-2,-2)</a:t>
+                      </a:r>
+                      <a:endParaRPr lang="nl-NL" b="1" dirty="0">
+                        <a:latin typeface="Courier New" panose="02070309020205020404" pitchFamily="49" charset="0"/>
+                        <a:cs typeface="Courier New" panose="02070309020205020404" pitchFamily="49" charset="0"/>
+                      </a:endParaRPr>
+                    </a:p>
+                  </a:txBody>
+                  <a:tcPr anchor="ctr">
+                    <a:lnL w="12700" cap="flat" cmpd="sng" algn="ctr">
+                      <a:solidFill>
+                        <a:schemeClr val="tx1"/>
+                      </a:solidFill>
+                      <a:prstDash val="solid"/>
+                      <a:round/>
+                      <a:headEnd type="none" w="med" len="med"/>
+                      <a:tailEnd type="none" w="med" len="med"/>
+                    </a:lnL>
+                    <a:lnR w="12700" cap="flat" cmpd="sng" algn="ctr">
+                      <a:solidFill>
+                        <a:schemeClr val="tx1"/>
+                      </a:solidFill>
+                      <a:prstDash val="solid"/>
+                      <a:round/>
+                      <a:headEnd type="none" w="med" len="med"/>
+                      <a:tailEnd type="none" w="med" len="med"/>
+                    </a:lnR>
+                    <a:lnT w="12700" cap="flat" cmpd="sng" algn="ctr">
+                      <a:solidFill>
+                        <a:schemeClr val="tx1"/>
+                      </a:solidFill>
+                      <a:prstDash val="solid"/>
+                      <a:round/>
+                      <a:headEnd type="none" w="med" len="med"/>
+                      <a:tailEnd type="none" w="med" len="med"/>
+                    </a:lnT>
+                    <a:lnB w="12700" cap="flat" cmpd="sng" algn="ctr">
+                      <a:solidFill>
+                        <a:schemeClr val="tx1"/>
+                      </a:solidFill>
+                      <a:prstDash val="solid"/>
+                      <a:round/>
+                      <a:headEnd type="none" w="med" len="med"/>
+                      <a:tailEnd type="none" w="med" len="med"/>
+                    </a:lnB>
+                    <a:solidFill>
+                      <a:schemeClr val="bg1"/>
+                    </a:solidFill>
+                  </a:tcPr>
+                </a:tc>
+                <a:tc>
+                  <a:txBody>
+                    <a:bodyPr/>
+                    <a:lstStyle/>
+                    <a:p>
+                      <a:pPr marL="0" marR="0" lvl="0" indent="0" algn="ctr" defTabSz="914400" rtl="0" eaLnBrk="1" fontAlgn="auto" latinLnBrk="0" hangingPunct="1">
+                        <a:lnSpc>
+                          <a:spcPct val="100000"/>
+                        </a:lnSpc>
+                        <a:spcBef>
+                          <a:spcPts val="0"/>
+                        </a:spcBef>
+                        <a:spcAft>
+                          <a:spcPts val="0"/>
+                        </a:spcAft>
+                        <a:buClrTx/>
+                        <a:buSzTx/>
+                        <a:buFontTx/>
+                        <a:buNone/>
+                        <a:tabLst/>
+                        <a:defRPr/>
+                      </a:pPr>
+                      <a:r>
+                        <a:rPr lang="en-US" b="1" dirty="0">
+                          <a:latin typeface="Courier New" panose="02070309020205020404" pitchFamily="49" charset="0"/>
+                          <a:cs typeface="Courier New" panose="02070309020205020404" pitchFamily="49" charset="0"/>
+                        </a:rPr>
+                        <a:t>(-1,-2)</a:t>
+                      </a:r>
+                      <a:endParaRPr lang="nl-NL" b="1" dirty="0">
+                        <a:latin typeface="Courier New" panose="02070309020205020404" pitchFamily="49" charset="0"/>
+                        <a:cs typeface="Courier New" panose="02070309020205020404" pitchFamily="49" charset="0"/>
+                      </a:endParaRPr>
+                    </a:p>
+                  </a:txBody>
+                  <a:tcPr anchor="ctr">
+                    <a:lnL w="12700" cap="flat" cmpd="sng" algn="ctr">
+                      <a:solidFill>
+                        <a:schemeClr val="tx1"/>
+                      </a:solidFill>
+                      <a:prstDash val="solid"/>
+                      <a:round/>
+                      <a:headEnd type="none" w="med" len="med"/>
+                      <a:tailEnd type="none" w="med" len="med"/>
+                    </a:lnL>
+                    <a:lnR w="12700" cap="flat" cmpd="sng" algn="ctr">
+                      <a:solidFill>
+                        <a:schemeClr val="tx1"/>
+                      </a:solidFill>
+                      <a:prstDash val="solid"/>
+                      <a:round/>
+                      <a:headEnd type="none" w="med" len="med"/>
+                      <a:tailEnd type="none" w="med" len="med"/>
+                    </a:lnR>
+                    <a:lnT w="12700" cap="flat" cmpd="sng" algn="ctr">
+                      <a:solidFill>
+                        <a:schemeClr val="tx1"/>
+                      </a:solidFill>
+                      <a:prstDash val="solid"/>
+                      <a:round/>
+                      <a:headEnd type="none" w="med" len="med"/>
+                      <a:tailEnd type="none" w="med" len="med"/>
+                    </a:lnT>
+                    <a:lnB w="12700" cap="flat" cmpd="sng" algn="ctr">
+                      <a:solidFill>
+                        <a:schemeClr val="tx1"/>
+                      </a:solidFill>
+                      <a:prstDash val="solid"/>
+                      <a:round/>
+                      <a:headEnd type="none" w="med" len="med"/>
+                      <a:tailEnd type="none" w="med" len="med"/>
+                    </a:lnB>
+                    <a:solidFill>
+                      <a:schemeClr val="bg1"/>
+                    </a:solidFill>
+                  </a:tcPr>
+                </a:tc>
+                <a:tc>
+                  <a:txBody>
+                    <a:bodyPr/>
+                    <a:lstStyle/>
+                    <a:p>
+                      <a:pPr marL="0" marR="0" lvl="0" indent="0" algn="ctr" defTabSz="914400" rtl="0" eaLnBrk="1" fontAlgn="auto" latinLnBrk="0" hangingPunct="1">
+                        <a:lnSpc>
+                          <a:spcPct val="100000"/>
+                        </a:lnSpc>
+                        <a:spcBef>
+                          <a:spcPts val="0"/>
+                        </a:spcBef>
+                        <a:spcAft>
+                          <a:spcPts val="0"/>
+                        </a:spcAft>
+                        <a:buClrTx/>
+                        <a:buSzTx/>
+                        <a:buFontTx/>
+                        <a:buNone/>
+                        <a:tabLst/>
+                        <a:defRPr/>
+                      </a:pPr>
+                      <a:r>
+                        <a:rPr lang="en-US" b="1" dirty="0">
+                          <a:latin typeface="Courier New" panose="02070309020205020404" pitchFamily="49" charset="0"/>
+                          <a:cs typeface="Courier New" panose="02070309020205020404" pitchFamily="49" charset="0"/>
+                        </a:rPr>
+                        <a:t>(0,-2)</a:t>
+                      </a:r>
+                      <a:endParaRPr lang="nl-NL" b="1" dirty="0">
+                        <a:latin typeface="Courier New" panose="02070309020205020404" pitchFamily="49" charset="0"/>
+                        <a:cs typeface="Courier New" panose="02070309020205020404" pitchFamily="49" charset="0"/>
+                      </a:endParaRPr>
+                    </a:p>
+                  </a:txBody>
+                  <a:tcPr anchor="ctr">
+                    <a:lnL w="12700" cap="flat" cmpd="sng" algn="ctr">
+                      <a:solidFill>
+                        <a:schemeClr val="tx1"/>
+                      </a:solidFill>
+                      <a:prstDash val="solid"/>
+                      <a:round/>
+                      <a:headEnd type="none" w="med" len="med"/>
+                      <a:tailEnd type="none" w="med" len="med"/>
+                    </a:lnL>
+                    <a:lnR w="12700" cap="flat" cmpd="sng" algn="ctr">
+                      <a:solidFill>
+                        <a:schemeClr val="tx1"/>
+                      </a:solidFill>
+                      <a:prstDash val="solid"/>
+                      <a:round/>
+                      <a:headEnd type="none" w="med" len="med"/>
+                      <a:tailEnd type="none" w="med" len="med"/>
+                    </a:lnR>
+                    <a:lnT w="12700" cap="flat" cmpd="sng" algn="ctr">
+                      <a:solidFill>
+                        <a:schemeClr val="tx1"/>
+                      </a:solidFill>
+                      <a:prstDash val="solid"/>
+                      <a:round/>
+                      <a:headEnd type="none" w="med" len="med"/>
+                      <a:tailEnd type="none" w="med" len="med"/>
+                    </a:lnT>
+                    <a:lnB w="12700" cap="flat" cmpd="sng" algn="ctr">
+                      <a:solidFill>
+                        <a:schemeClr val="tx1"/>
+                      </a:solidFill>
+                      <a:prstDash val="solid"/>
+                      <a:round/>
+                      <a:headEnd type="none" w="med" len="med"/>
+                      <a:tailEnd type="none" w="med" len="med"/>
+                    </a:lnB>
+                    <a:solidFill>
+                      <a:schemeClr val="bg1"/>
+                    </a:solidFill>
+                  </a:tcPr>
+                </a:tc>
+                <a:tc>
+                  <a:txBody>
+                    <a:bodyPr/>
+                    <a:lstStyle/>
+                    <a:p>
+                      <a:pPr marL="0" marR="0" lvl="0" indent="0" algn="ctr" defTabSz="914400" rtl="0" eaLnBrk="1" fontAlgn="auto" latinLnBrk="0" hangingPunct="1">
+                        <a:lnSpc>
+                          <a:spcPct val="100000"/>
+                        </a:lnSpc>
+                        <a:spcBef>
+                          <a:spcPts val="0"/>
+                        </a:spcBef>
+                        <a:spcAft>
+                          <a:spcPts val="0"/>
+                        </a:spcAft>
+                        <a:buClrTx/>
+                        <a:buSzTx/>
+                        <a:buFontTx/>
+                        <a:buNone/>
+                        <a:tabLst/>
+                        <a:defRPr/>
+                      </a:pPr>
+                      <a:r>
+                        <a:rPr lang="en-US" b="1" dirty="0">
+                          <a:latin typeface="Courier New" panose="02070309020205020404" pitchFamily="49" charset="0"/>
+                          <a:cs typeface="Courier New" panose="02070309020205020404" pitchFamily="49" charset="0"/>
+                        </a:rPr>
+                        <a:t>(1,-2)</a:t>
+                      </a:r>
+                      <a:endParaRPr lang="nl-NL" b="1" dirty="0">
+                        <a:latin typeface="Courier New" panose="02070309020205020404" pitchFamily="49" charset="0"/>
+                        <a:cs typeface="Courier New" panose="02070309020205020404" pitchFamily="49" charset="0"/>
+                      </a:endParaRPr>
+                    </a:p>
+                  </a:txBody>
+                  <a:tcPr anchor="ctr">
+                    <a:lnL w="12700" cap="flat" cmpd="sng" algn="ctr">
+                      <a:solidFill>
+                        <a:schemeClr val="tx1"/>
+                      </a:solidFill>
+                      <a:prstDash val="solid"/>
+                      <a:round/>
+                      <a:headEnd type="none" w="med" len="med"/>
+                      <a:tailEnd type="none" w="med" len="med"/>
+                    </a:lnL>
+                    <a:lnR w="12700" cap="flat" cmpd="sng" algn="ctr">
+                      <a:solidFill>
+                        <a:schemeClr val="tx1"/>
+                      </a:solidFill>
+                      <a:prstDash val="solid"/>
+                      <a:round/>
+                      <a:headEnd type="none" w="med" len="med"/>
+                      <a:tailEnd type="none" w="med" len="med"/>
+                    </a:lnR>
+                    <a:lnT w="12700" cap="flat" cmpd="sng" algn="ctr">
+                      <a:solidFill>
+                        <a:schemeClr val="tx1"/>
+                      </a:solidFill>
+                      <a:prstDash val="solid"/>
+                      <a:round/>
+                      <a:headEnd type="none" w="med" len="med"/>
+                      <a:tailEnd type="none" w="med" len="med"/>
+                    </a:lnT>
+                    <a:lnB w="12700" cap="flat" cmpd="sng" algn="ctr">
+                      <a:solidFill>
+                        <a:schemeClr val="tx1"/>
+                      </a:solidFill>
+                      <a:prstDash val="solid"/>
+                      <a:round/>
+                      <a:headEnd type="none" w="med" len="med"/>
+                      <a:tailEnd type="none" w="med" len="med"/>
+                    </a:lnB>
+                    <a:solidFill>
+                      <a:schemeClr val="bg1"/>
+                    </a:solidFill>
+                  </a:tcPr>
+                </a:tc>
+                <a:tc>
+                  <a:txBody>
+                    <a:bodyPr/>
+                    <a:lstStyle/>
+                    <a:p>
+                      <a:pPr marL="0" marR="0" lvl="0" indent="0" algn="ctr" defTabSz="914400" rtl="0" eaLnBrk="1" fontAlgn="auto" latinLnBrk="0" hangingPunct="1">
+                        <a:lnSpc>
+                          <a:spcPct val="100000"/>
+                        </a:lnSpc>
+                        <a:spcBef>
+                          <a:spcPts val="0"/>
+                        </a:spcBef>
+                        <a:spcAft>
+                          <a:spcPts val="0"/>
+                        </a:spcAft>
+                        <a:buClrTx/>
+                        <a:buSzTx/>
+                        <a:buFontTx/>
+                        <a:buNone/>
+                        <a:tabLst/>
+                        <a:defRPr/>
+                      </a:pPr>
+                      <a:r>
+                        <a:rPr lang="en-US" b="1" dirty="0">
+                          <a:latin typeface="Courier New" panose="02070309020205020404" pitchFamily="49" charset="0"/>
+                          <a:cs typeface="Courier New" panose="02070309020205020404" pitchFamily="49" charset="0"/>
+                        </a:rPr>
+                        <a:t>(2,-2)</a:t>
+                      </a:r>
+                      <a:endParaRPr lang="nl-NL" b="1" dirty="0">
+                        <a:latin typeface="Courier New" panose="02070309020205020404" pitchFamily="49" charset="0"/>
+                        <a:cs typeface="Courier New" panose="02070309020205020404" pitchFamily="49" charset="0"/>
+                      </a:endParaRPr>
+                    </a:p>
+                  </a:txBody>
+                  <a:tcPr anchor="ctr">
+                    <a:lnL w="12700" cap="flat" cmpd="sng" algn="ctr">
+                      <a:solidFill>
+                        <a:schemeClr val="tx1"/>
+                      </a:solidFill>
+                      <a:prstDash val="solid"/>
+                      <a:round/>
+                      <a:headEnd type="none" w="med" len="med"/>
+                      <a:tailEnd type="none" w="med" len="med"/>
+                    </a:lnL>
+                    <a:lnR w="12700" cap="flat" cmpd="sng" algn="ctr">
+                      <a:solidFill>
+                        <a:schemeClr val="tx1"/>
+                      </a:solidFill>
+                      <a:prstDash val="solid"/>
+                      <a:round/>
+                      <a:headEnd type="none" w="med" len="med"/>
+                      <a:tailEnd type="none" w="med" len="med"/>
+                    </a:lnR>
+                    <a:lnT w="12700" cap="flat" cmpd="sng" algn="ctr">
+                      <a:solidFill>
+                        <a:schemeClr val="tx1"/>
+                      </a:solidFill>
+                      <a:prstDash val="solid"/>
+                      <a:round/>
+                      <a:headEnd type="none" w="med" len="med"/>
+                      <a:tailEnd type="none" w="med" len="med"/>
+                    </a:lnT>
+                    <a:lnB w="12700" cap="flat" cmpd="sng" algn="ctr">
+                      <a:solidFill>
+                        <a:schemeClr val="tx1"/>
+                      </a:solidFill>
+                      <a:prstDash val="solid"/>
+                      <a:round/>
+                      <a:headEnd type="none" w="med" len="med"/>
+                      <a:tailEnd type="none" w="med" len="med"/>
+                    </a:lnB>
+                    <a:solidFill>
+                      <a:schemeClr val="bg1"/>
+                    </a:solidFill>
+                  </a:tcPr>
+                </a:tc>
+                <a:extLst>
+                  <a:ext uri="{0D108BD9-81ED-4DB2-BD59-A6C34878D82A}">
+                    <a16:rowId xmlns:a16="http://schemas.microsoft.com/office/drawing/2014/main" val="2228055267"/>
+                  </a:ext>
+                </a:extLst>
+              </a:tr>
+              <a:tr h="705067">
+                <a:tc>
+                  <a:txBody>
+                    <a:bodyPr/>
+                    <a:lstStyle/>
+                    <a:p>
+                      <a:pPr marL="0" marR="0" lvl="0" indent="0" algn="ctr" defTabSz="914400" rtl="0" eaLnBrk="1" fontAlgn="auto" latinLnBrk="0" hangingPunct="1">
+                        <a:lnSpc>
+                          <a:spcPct val="100000"/>
+                        </a:lnSpc>
+                        <a:spcBef>
+                          <a:spcPts val="0"/>
+                        </a:spcBef>
+                        <a:spcAft>
+                          <a:spcPts val="0"/>
+                        </a:spcAft>
+                        <a:buClrTx/>
+                        <a:buSzTx/>
+                        <a:buFontTx/>
+                        <a:buNone/>
+                        <a:tabLst/>
+                        <a:defRPr/>
+                      </a:pPr>
+                      <a:r>
+                        <a:rPr lang="en-US" b="1" dirty="0">
+                          <a:latin typeface="Courier New" panose="02070309020205020404" pitchFamily="49" charset="0"/>
+                          <a:cs typeface="Courier New" panose="02070309020205020404" pitchFamily="49" charset="0"/>
+                        </a:rPr>
+                        <a:t>(-2,-1)</a:t>
+                      </a:r>
+                      <a:endParaRPr lang="nl-NL" b="1" dirty="0">
+                        <a:latin typeface="Courier New" panose="02070309020205020404" pitchFamily="49" charset="0"/>
+                        <a:cs typeface="Courier New" panose="02070309020205020404" pitchFamily="49" charset="0"/>
+                      </a:endParaRPr>
+                    </a:p>
+                  </a:txBody>
+                  <a:tcPr anchor="ctr">
+                    <a:lnL w="12700" cap="flat" cmpd="sng" algn="ctr">
+                      <a:solidFill>
+                        <a:schemeClr val="tx1"/>
+                      </a:solidFill>
+                      <a:prstDash val="solid"/>
+                      <a:round/>
+                      <a:headEnd type="none" w="med" len="med"/>
+                      <a:tailEnd type="none" w="med" len="med"/>
+                    </a:lnL>
+                    <a:lnR w="12700" cap="flat" cmpd="sng" algn="ctr">
+                      <a:solidFill>
+                        <a:schemeClr val="tx1"/>
+                      </a:solidFill>
+                      <a:prstDash val="solid"/>
+                      <a:round/>
+                      <a:headEnd type="none" w="med" len="med"/>
+                      <a:tailEnd type="none" w="med" len="med"/>
+                    </a:lnR>
+                    <a:lnT w="12700" cap="flat" cmpd="sng" algn="ctr">
+                      <a:solidFill>
+                        <a:schemeClr val="tx1"/>
+                      </a:solidFill>
+                      <a:prstDash val="solid"/>
+                      <a:round/>
+                      <a:headEnd type="none" w="med" len="med"/>
+                      <a:tailEnd type="none" w="med" len="med"/>
+                    </a:lnT>
+                    <a:lnB w="12700" cap="flat" cmpd="sng" algn="ctr">
+                      <a:solidFill>
+                        <a:schemeClr val="tx1"/>
+                      </a:solidFill>
+                      <a:prstDash val="solid"/>
+                      <a:round/>
+                      <a:headEnd type="none" w="med" len="med"/>
+                      <a:tailEnd type="none" w="med" len="med"/>
+                    </a:lnB>
+                    <a:solidFill>
+                      <a:schemeClr val="bg1"/>
+                    </a:solidFill>
+                  </a:tcPr>
+                </a:tc>
+                <a:tc>
+                  <a:txBody>
+                    <a:bodyPr/>
+                    <a:lstStyle/>
+                    <a:p>
+                      <a:pPr marL="0" marR="0" lvl="0" indent="0" algn="ctr" defTabSz="914400" rtl="0" eaLnBrk="1" fontAlgn="auto" latinLnBrk="0" hangingPunct="1">
+                        <a:lnSpc>
+                          <a:spcPct val="100000"/>
+                        </a:lnSpc>
+                        <a:spcBef>
+                          <a:spcPts val="0"/>
+                        </a:spcBef>
+                        <a:spcAft>
+                          <a:spcPts val="0"/>
+                        </a:spcAft>
+                        <a:buClrTx/>
+                        <a:buSzTx/>
+                        <a:buFontTx/>
+                        <a:buNone/>
+                        <a:tabLst/>
+                        <a:defRPr/>
+                      </a:pPr>
+                      <a:r>
+                        <a:rPr lang="en-US" b="1" dirty="0">
+                          <a:latin typeface="Courier New" panose="02070309020205020404" pitchFamily="49" charset="0"/>
+                          <a:cs typeface="Courier New" panose="02070309020205020404" pitchFamily="49" charset="0"/>
+                        </a:rPr>
+                        <a:t>(-1,-1)</a:t>
+                      </a:r>
+                      <a:endParaRPr lang="nl-NL" b="1" dirty="0">
+                        <a:latin typeface="Courier New" panose="02070309020205020404" pitchFamily="49" charset="0"/>
+                        <a:cs typeface="Courier New" panose="02070309020205020404" pitchFamily="49" charset="0"/>
+                      </a:endParaRPr>
+                    </a:p>
+                  </a:txBody>
+                  <a:tcPr anchor="ctr">
+                    <a:lnL w="12700" cap="flat" cmpd="sng" algn="ctr">
+                      <a:solidFill>
+                        <a:schemeClr val="tx1"/>
+                      </a:solidFill>
+                      <a:prstDash val="solid"/>
+                      <a:round/>
+                      <a:headEnd type="none" w="med" len="med"/>
+                      <a:tailEnd type="none" w="med" len="med"/>
+                    </a:lnL>
+                    <a:lnR w="12700" cap="flat" cmpd="sng" algn="ctr">
+                      <a:solidFill>
+                        <a:schemeClr val="tx1"/>
+                      </a:solidFill>
+                      <a:prstDash val="solid"/>
+                      <a:round/>
+                      <a:headEnd type="none" w="med" len="med"/>
+                      <a:tailEnd type="none" w="med" len="med"/>
+                    </a:lnR>
+                    <a:lnT w="12700" cap="flat" cmpd="sng" algn="ctr">
+                      <a:solidFill>
+                        <a:schemeClr val="tx1"/>
+                      </a:solidFill>
+                      <a:prstDash val="solid"/>
+                      <a:round/>
+                      <a:headEnd type="none" w="med" len="med"/>
+                      <a:tailEnd type="none" w="med" len="med"/>
+                    </a:lnT>
+                    <a:lnB w="12700" cap="flat" cmpd="sng" algn="ctr">
+                      <a:solidFill>
+                        <a:schemeClr val="tx1"/>
+                      </a:solidFill>
+                      <a:prstDash val="solid"/>
+                      <a:round/>
+                      <a:headEnd type="none" w="med" len="med"/>
+                      <a:tailEnd type="none" w="med" len="med"/>
+                    </a:lnB>
+                    <a:solidFill>
+                      <a:schemeClr val="bg1"/>
+                    </a:solidFill>
+                  </a:tcPr>
+                </a:tc>
+                <a:tc>
+                  <a:txBody>
+                    <a:bodyPr/>
+                    <a:lstStyle/>
+                    <a:p>
+                      <a:pPr marL="0" marR="0" lvl="0" indent="0" algn="ctr" defTabSz="914400" rtl="0" eaLnBrk="1" fontAlgn="auto" latinLnBrk="0" hangingPunct="1">
+                        <a:lnSpc>
+                          <a:spcPct val="100000"/>
+                        </a:lnSpc>
+                        <a:spcBef>
+                          <a:spcPts val="0"/>
+                        </a:spcBef>
+                        <a:spcAft>
+                          <a:spcPts val="0"/>
+                        </a:spcAft>
+                        <a:buClrTx/>
+                        <a:buSzTx/>
+                        <a:buFontTx/>
+                        <a:buNone/>
+                        <a:tabLst/>
+                        <a:defRPr/>
+                      </a:pPr>
+                      <a:r>
+                        <a:rPr lang="en-US" b="1" dirty="0">
+                          <a:latin typeface="Courier New" panose="02070309020205020404" pitchFamily="49" charset="0"/>
+                          <a:cs typeface="Courier New" panose="02070309020205020404" pitchFamily="49" charset="0"/>
+                        </a:rPr>
+                        <a:t>(0,-1)</a:t>
+                      </a:r>
+                      <a:endParaRPr lang="nl-NL" b="1" dirty="0">
+                        <a:latin typeface="Courier New" panose="02070309020205020404" pitchFamily="49" charset="0"/>
+                        <a:cs typeface="Courier New" panose="02070309020205020404" pitchFamily="49" charset="0"/>
+                      </a:endParaRPr>
+                    </a:p>
+                  </a:txBody>
+                  <a:tcPr anchor="ctr">
+                    <a:lnL w="12700" cap="flat" cmpd="sng" algn="ctr">
+                      <a:solidFill>
+                        <a:schemeClr val="tx1"/>
+                      </a:solidFill>
+                      <a:prstDash val="solid"/>
+                      <a:round/>
+                      <a:headEnd type="none" w="med" len="med"/>
+                      <a:tailEnd type="none" w="med" len="med"/>
+                    </a:lnL>
+                    <a:lnR w="12700" cap="flat" cmpd="sng" algn="ctr">
+                      <a:solidFill>
+                        <a:schemeClr val="tx1"/>
+                      </a:solidFill>
+                      <a:prstDash val="solid"/>
+                      <a:round/>
+                      <a:headEnd type="none" w="med" len="med"/>
+                      <a:tailEnd type="none" w="med" len="med"/>
+                    </a:lnR>
+                    <a:lnT w="12700" cap="flat" cmpd="sng" algn="ctr">
+                      <a:solidFill>
+                        <a:schemeClr val="tx1"/>
+                      </a:solidFill>
+                      <a:prstDash val="solid"/>
+                      <a:round/>
+                      <a:headEnd type="none" w="med" len="med"/>
+                      <a:tailEnd type="none" w="med" len="med"/>
+                    </a:lnT>
+                    <a:lnB w="12700" cap="flat" cmpd="sng" algn="ctr">
+                      <a:solidFill>
+                        <a:schemeClr val="tx1"/>
+                      </a:solidFill>
+                      <a:prstDash val="solid"/>
+                      <a:round/>
+                      <a:headEnd type="none" w="med" len="med"/>
+                      <a:tailEnd type="none" w="med" len="med"/>
+                    </a:lnB>
+                    <a:solidFill>
+                      <a:schemeClr val="bg1"/>
+                    </a:solidFill>
+                  </a:tcPr>
+                </a:tc>
+                <a:tc>
+                  <a:txBody>
+                    <a:bodyPr/>
+                    <a:lstStyle/>
+                    <a:p>
+                      <a:pPr marL="0" marR="0" lvl="0" indent="0" algn="ctr" defTabSz="914400" rtl="0" eaLnBrk="1" fontAlgn="auto" latinLnBrk="0" hangingPunct="1">
+                        <a:lnSpc>
+                          <a:spcPct val="100000"/>
+                        </a:lnSpc>
+                        <a:spcBef>
+                          <a:spcPts val="0"/>
+                        </a:spcBef>
+                        <a:spcAft>
+                          <a:spcPts val="0"/>
+                        </a:spcAft>
+                        <a:buClrTx/>
+                        <a:buSzTx/>
+                        <a:buFontTx/>
+                        <a:buNone/>
+                        <a:tabLst/>
+                        <a:defRPr/>
+                      </a:pPr>
+                      <a:r>
+                        <a:rPr lang="en-US" b="1" dirty="0">
+                          <a:latin typeface="Courier New" panose="02070309020205020404" pitchFamily="49" charset="0"/>
+                          <a:cs typeface="Courier New" panose="02070309020205020404" pitchFamily="49" charset="0"/>
+                        </a:rPr>
+                        <a:t>(1,-1)</a:t>
+                      </a:r>
+                      <a:endParaRPr lang="nl-NL" b="1" dirty="0">
+                        <a:latin typeface="Courier New" panose="02070309020205020404" pitchFamily="49" charset="0"/>
+                        <a:cs typeface="Courier New" panose="02070309020205020404" pitchFamily="49" charset="0"/>
+                      </a:endParaRPr>
+                    </a:p>
+                  </a:txBody>
+                  <a:tcPr anchor="ctr">
+                    <a:lnL w="12700" cap="flat" cmpd="sng" algn="ctr">
+                      <a:solidFill>
+                        <a:schemeClr val="tx1"/>
+                      </a:solidFill>
+                      <a:prstDash val="solid"/>
+                      <a:round/>
+                      <a:headEnd type="none" w="med" len="med"/>
+                      <a:tailEnd type="none" w="med" len="med"/>
+                    </a:lnL>
+                    <a:lnR w="12700" cap="flat" cmpd="sng" algn="ctr">
+                      <a:solidFill>
+                        <a:schemeClr val="tx1"/>
+                      </a:solidFill>
+                      <a:prstDash val="solid"/>
+                      <a:round/>
+                      <a:headEnd type="none" w="med" len="med"/>
+                      <a:tailEnd type="none" w="med" len="med"/>
+                    </a:lnR>
+                    <a:lnT w="12700" cap="flat" cmpd="sng" algn="ctr">
+                      <a:solidFill>
+                        <a:schemeClr val="tx1"/>
+                      </a:solidFill>
+                      <a:prstDash val="solid"/>
+                      <a:round/>
+                      <a:headEnd type="none" w="med" len="med"/>
+                      <a:tailEnd type="none" w="med" len="med"/>
+                    </a:lnT>
+                    <a:lnB w="12700" cap="flat" cmpd="sng" algn="ctr">
+                      <a:solidFill>
+                        <a:schemeClr val="tx1"/>
+                      </a:solidFill>
+                      <a:prstDash val="solid"/>
+                      <a:round/>
+                      <a:headEnd type="none" w="med" len="med"/>
+                      <a:tailEnd type="none" w="med" len="med"/>
+                    </a:lnB>
+                    <a:solidFill>
+                      <a:schemeClr val="bg1"/>
+                    </a:solidFill>
+                  </a:tcPr>
+                </a:tc>
+                <a:tc>
+                  <a:txBody>
+                    <a:bodyPr/>
+                    <a:lstStyle/>
+                    <a:p>
+                      <a:pPr marL="0" marR="0" lvl="0" indent="0" algn="ctr" defTabSz="914400" rtl="0" eaLnBrk="1" fontAlgn="auto" latinLnBrk="0" hangingPunct="1">
+                        <a:lnSpc>
+                          <a:spcPct val="100000"/>
+                        </a:lnSpc>
+                        <a:spcBef>
+                          <a:spcPts val="0"/>
+                        </a:spcBef>
+                        <a:spcAft>
+                          <a:spcPts val="0"/>
+                        </a:spcAft>
+                        <a:buClrTx/>
+                        <a:buSzTx/>
+                        <a:buFontTx/>
+                        <a:buNone/>
+                        <a:tabLst/>
+                        <a:defRPr/>
+                      </a:pPr>
+                      <a:r>
+                        <a:rPr lang="en-US" b="1" dirty="0">
+                          <a:latin typeface="Courier New" panose="02070309020205020404" pitchFamily="49" charset="0"/>
+                          <a:cs typeface="Courier New" panose="02070309020205020404" pitchFamily="49" charset="0"/>
+                        </a:rPr>
+                        <a:t>(2,-1)</a:t>
+                      </a:r>
+                      <a:endParaRPr lang="nl-NL" b="1" dirty="0">
+                        <a:latin typeface="Courier New" panose="02070309020205020404" pitchFamily="49" charset="0"/>
+                        <a:cs typeface="Courier New" panose="02070309020205020404" pitchFamily="49" charset="0"/>
+                      </a:endParaRPr>
+                    </a:p>
+                  </a:txBody>
+                  <a:tcPr anchor="ctr">
+                    <a:lnL w="12700" cap="flat" cmpd="sng" algn="ctr">
+                      <a:solidFill>
+                        <a:schemeClr val="tx1"/>
+                      </a:solidFill>
+                      <a:prstDash val="solid"/>
+                      <a:round/>
+                      <a:headEnd type="none" w="med" len="med"/>
+                      <a:tailEnd type="none" w="med" len="med"/>
+                    </a:lnL>
+                    <a:lnR w="12700" cap="flat" cmpd="sng" algn="ctr">
+                      <a:solidFill>
+                        <a:schemeClr val="tx1"/>
+                      </a:solidFill>
+                      <a:prstDash val="solid"/>
+                      <a:round/>
+                      <a:headEnd type="none" w="med" len="med"/>
+                      <a:tailEnd type="none" w="med" len="med"/>
+                    </a:lnR>
+                    <a:lnT w="12700" cap="flat" cmpd="sng" algn="ctr">
+                      <a:solidFill>
+                        <a:schemeClr val="tx1"/>
+                      </a:solidFill>
+                      <a:prstDash val="solid"/>
+                      <a:round/>
+                      <a:headEnd type="none" w="med" len="med"/>
+                      <a:tailEnd type="none" w="med" len="med"/>
+                    </a:lnT>
+                    <a:lnB w="12700" cap="flat" cmpd="sng" algn="ctr">
+                      <a:solidFill>
+                        <a:schemeClr val="tx1"/>
+                      </a:solidFill>
+                      <a:prstDash val="solid"/>
+                      <a:round/>
+                      <a:headEnd type="none" w="med" len="med"/>
+                      <a:tailEnd type="none" w="med" len="med"/>
+                    </a:lnB>
+                    <a:solidFill>
+                      <a:schemeClr val="bg1"/>
+                    </a:solidFill>
+                  </a:tcPr>
+                </a:tc>
+                <a:extLst>
+                  <a:ext uri="{0D108BD9-81ED-4DB2-BD59-A6C34878D82A}">
+                    <a16:rowId xmlns:a16="http://schemas.microsoft.com/office/drawing/2014/main" val="3403107219"/>
+                  </a:ext>
+                </a:extLst>
+              </a:tr>
+              <a:tr h="704321">
+                <a:tc>
+                  <a:txBody>
+                    <a:bodyPr/>
+                    <a:lstStyle/>
+                    <a:p>
+                      <a:pPr marL="0" marR="0" lvl="0" indent="0" algn="ctr" defTabSz="914400" rtl="0" eaLnBrk="1" fontAlgn="auto" latinLnBrk="0" hangingPunct="1">
+                        <a:lnSpc>
+                          <a:spcPct val="100000"/>
+                        </a:lnSpc>
+                        <a:spcBef>
+                          <a:spcPts val="0"/>
+                        </a:spcBef>
+                        <a:spcAft>
+                          <a:spcPts val="0"/>
+                        </a:spcAft>
+                        <a:buClrTx/>
+                        <a:buSzTx/>
+                        <a:buFontTx/>
+                        <a:buNone/>
+                        <a:tabLst/>
+                        <a:defRPr/>
+                      </a:pPr>
+                      <a:r>
+                        <a:rPr lang="en-US" b="1" dirty="0">
+                          <a:latin typeface="Courier New" panose="02070309020205020404" pitchFamily="49" charset="0"/>
+                          <a:cs typeface="Courier New" panose="02070309020205020404" pitchFamily="49" charset="0"/>
+                        </a:rPr>
+                        <a:t>(-2,0)</a:t>
+                      </a:r>
+                      <a:endParaRPr lang="nl-NL" b="1" dirty="0">
+                        <a:latin typeface="Courier New" panose="02070309020205020404" pitchFamily="49" charset="0"/>
+                        <a:cs typeface="Courier New" panose="02070309020205020404" pitchFamily="49" charset="0"/>
+                      </a:endParaRPr>
+                    </a:p>
+                  </a:txBody>
+                  <a:tcPr anchor="ctr">
+                    <a:lnL w="12700" cap="flat" cmpd="sng" algn="ctr">
+                      <a:solidFill>
+                        <a:schemeClr val="tx1"/>
+                      </a:solidFill>
+                      <a:prstDash val="solid"/>
+                      <a:round/>
+                      <a:headEnd type="none" w="med" len="med"/>
+                      <a:tailEnd type="none" w="med" len="med"/>
+                    </a:lnL>
+                    <a:lnR w="12700" cap="flat" cmpd="sng" algn="ctr">
+                      <a:solidFill>
+                        <a:schemeClr val="tx1"/>
+                      </a:solidFill>
+                      <a:prstDash val="solid"/>
+                      <a:round/>
+                      <a:headEnd type="none" w="med" len="med"/>
+                      <a:tailEnd type="none" w="med" len="med"/>
+                    </a:lnR>
+                    <a:lnT w="12700" cap="flat" cmpd="sng" algn="ctr">
+                      <a:solidFill>
+                        <a:schemeClr val="tx1"/>
+                      </a:solidFill>
+                      <a:prstDash val="solid"/>
+                      <a:round/>
+                      <a:headEnd type="none" w="med" len="med"/>
+                      <a:tailEnd type="none" w="med" len="med"/>
+                    </a:lnT>
+                    <a:lnB w="12700" cap="flat" cmpd="sng" algn="ctr">
+                      <a:solidFill>
+                        <a:schemeClr val="tx1"/>
+                      </a:solidFill>
+                      <a:prstDash val="solid"/>
+                      <a:round/>
+                      <a:headEnd type="none" w="med" len="med"/>
+                      <a:tailEnd type="none" w="med" len="med"/>
+                    </a:lnB>
+                    <a:solidFill>
+                      <a:schemeClr val="bg1"/>
+                    </a:solidFill>
+                  </a:tcPr>
+                </a:tc>
+                <a:tc>
+                  <a:txBody>
+                    <a:bodyPr/>
+                    <a:lstStyle/>
+                    <a:p>
+                      <a:pPr marL="0" marR="0" lvl="0" indent="0" algn="ctr" defTabSz="914400" rtl="0" eaLnBrk="1" fontAlgn="auto" latinLnBrk="0" hangingPunct="1">
+                        <a:lnSpc>
+                          <a:spcPct val="100000"/>
+                        </a:lnSpc>
+                        <a:spcBef>
+                          <a:spcPts val="0"/>
+                        </a:spcBef>
+                        <a:spcAft>
+                          <a:spcPts val="0"/>
+                        </a:spcAft>
+                        <a:buClrTx/>
+                        <a:buSzTx/>
+                        <a:buFontTx/>
+                        <a:buNone/>
+                        <a:tabLst/>
+                        <a:defRPr/>
+                      </a:pPr>
+                      <a:r>
+                        <a:rPr lang="en-US" b="1" dirty="0">
+                          <a:latin typeface="Courier New" panose="02070309020205020404" pitchFamily="49" charset="0"/>
+                          <a:cs typeface="Courier New" panose="02070309020205020404" pitchFamily="49" charset="0"/>
+                        </a:rPr>
+                        <a:t>(-1,0)</a:t>
+                      </a:r>
+                      <a:endParaRPr lang="nl-NL" b="1" dirty="0">
+                        <a:latin typeface="Courier New" panose="02070309020205020404" pitchFamily="49" charset="0"/>
+                        <a:cs typeface="Courier New" panose="02070309020205020404" pitchFamily="49" charset="0"/>
+                      </a:endParaRPr>
+                    </a:p>
+                  </a:txBody>
+                  <a:tcPr anchor="ctr">
+                    <a:lnL w="12700" cap="flat" cmpd="sng" algn="ctr">
+                      <a:solidFill>
+                        <a:schemeClr val="tx1"/>
+                      </a:solidFill>
+                      <a:prstDash val="solid"/>
+                      <a:round/>
+                      <a:headEnd type="none" w="med" len="med"/>
+                      <a:tailEnd type="none" w="med" len="med"/>
+                    </a:lnL>
+                    <a:lnR w="12700" cap="flat" cmpd="sng" algn="ctr">
+                      <a:solidFill>
+                        <a:schemeClr val="tx1"/>
+                      </a:solidFill>
+                      <a:prstDash val="solid"/>
+                      <a:round/>
+                      <a:headEnd type="none" w="med" len="med"/>
+                      <a:tailEnd type="none" w="med" len="med"/>
+                    </a:lnR>
+                    <a:lnT w="12700" cap="flat" cmpd="sng" algn="ctr">
+                      <a:solidFill>
+                        <a:schemeClr val="tx1"/>
+                      </a:solidFill>
+                      <a:prstDash val="solid"/>
+                      <a:round/>
+                      <a:headEnd type="none" w="med" len="med"/>
+                      <a:tailEnd type="none" w="med" len="med"/>
+                    </a:lnT>
+                    <a:lnB w="12700" cap="flat" cmpd="sng" algn="ctr">
+                      <a:solidFill>
+                        <a:schemeClr val="tx1"/>
+                      </a:solidFill>
+                      <a:prstDash val="solid"/>
+                      <a:round/>
+                      <a:headEnd type="none" w="med" len="med"/>
+                      <a:tailEnd type="none" w="med" len="med"/>
+                    </a:lnB>
+                    <a:solidFill>
+                      <a:schemeClr val="bg1"/>
+                    </a:solidFill>
+                  </a:tcPr>
+                </a:tc>
+                <a:tc>
+                  <a:txBody>
+                    <a:bodyPr/>
+                    <a:lstStyle/>
+                    <a:p>
+                      <a:pPr algn="ctr"/>
+                      <a:r>
+                        <a:rPr lang="en-US" b="1" dirty="0">
+                          <a:latin typeface="Courier New" panose="02070309020205020404" pitchFamily="49" charset="0"/>
+                          <a:cs typeface="Courier New" panose="02070309020205020404" pitchFamily="49" charset="0"/>
+                        </a:rPr>
+                        <a:t>(0,0)</a:t>
+                      </a:r>
+                      <a:endParaRPr lang="nl-NL" b="1" dirty="0">
+                        <a:latin typeface="Courier New" panose="02070309020205020404" pitchFamily="49" charset="0"/>
+                        <a:cs typeface="Courier New" panose="02070309020205020404" pitchFamily="49" charset="0"/>
+                      </a:endParaRPr>
+                    </a:p>
+                  </a:txBody>
+                  <a:tcPr anchor="ctr">
+                    <a:lnL w="12700" cap="flat" cmpd="sng" algn="ctr">
+                      <a:solidFill>
+                        <a:schemeClr val="tx1"/>
+                      </a:solidFill>
+                      <a:prstDash val="solid"/>
+                      <a:round/>
+                      <a:headEnd type="none" w="med" len="med"/>
+                      <a:tailEnd type="none" w="med" len="med"/>
+                    </a:lnL>
+                    <a:lnR w="12700" cap="flat" cmpd="sng" algn="ctr">
+                      <a:solidFill>
+                        <a:schemeClr val="tx1"/>
+                      </a:solidFill>
+                      <a:prstDash val="solid"/>
+                      <a:round/>
+                      <a:headEnd type="none" w="med" len="med"/>
+                      <a:tailEnd type="none" w="med" len="med"/>
+                    </a:lnR>
+                    <a:lnT w="12700" cap="flat" cmpd="sng" algn="ctr">
+                      <a:solidFill>
+                        <a:schemeClr val="tx1"/>
+                      </a:solidFill>
+                      <a:prstDash val="solid"/>
+                      <a:round/>
+                      <a:headEnd type="none" w="med" len="med"/>
+                      <a:tailEnd type="none" w="med" len="med"/>
+                    </a:lnT>
+                    <a:lnB w="12700" cap="flat" cmpd="sng" algn="ctr">
+                      <a:solidFill>
+                        <a:schemeClr val="tx1"/>
+                      </a:solidFill>
+                      <a:prstDash val="solid"/>
+                      <a:round/>
+                      <a:headEnd type="none" w="med" len="med"/>
+                      <a:tailEnd type="none" w="med" len="med"/>
+                    </a:lnB>
+                    <a:solidFill>
+                      <a:schemeClr val="bg1">
+                        <a:lumMod val="75000"/>
+                      </a:schemeClr>
+                    </a:solidFill>
+                  </a:tcPr>
+                </a:tc>
+                <a:tc>
+                  <a:txBody>
+                    <a:bodyPr/>
+                    <a:lstStyle/>
+                    <a:p>
+                      <a:pPr marL="0" marR="0" lvl="0" indent="0" algn="ctr" defTabSz="914400" rtl="0" eaLnBrk="1" fontAlgn="auto" latinLnBrk="0" hangingPunct="1">
+                        <a:lnSpc>
+                          <a:spcPct val="100000"/>
+                        </a:lnSpc>
+                        <a:spcBef>
+                          <a:spcPts val="0"/>
+                        </a:spcBef>
+                        <a:spcAft>
+                          <a:spcPts val="0"/>
+                        </a:spcAft>
+                        <a:buClrTx/>
+                        <a:buSzTx/>
+                        <a:buFontTx/>
+                        <a:buNone/>
+                        <a:tabLst/>
+                        <a:defRPr/>
+                      </a:pPr>
+                      <a:r>
+                        <a:rPr lang="en-US" b="1" dirty="0">
+                          <a:latin typeface="Courier New" panose="02070309020205020404" pitchFamily="49" charset="0"/>
+                          <a:cs typeface="Courier New" panose="02070309020205020404" pitchFamily="49" charset="0"/>
+                        </a:rPr>
+                        <a:t>(1,0)</a:t>
+                      </a:r>
+                      <a:endParaRPr lang="nl-NL" b="1" dirty="0">
+                        <a:latin typeface="Courier New" panose="02070309020205020404" pitchFamily="49" charset="0"/>
+                        <a:cs typeface="Courier New" panose="02070309020205020404" pitchFamily="49" charset="0"/>
+                      </a:endParaRPr>
+                    </a:p>
+                  </a:txBody>
+                  <a:tcPr anchor="ctr">
+                    <a:lnL w="12700" cap="flat" cmpd="sng" algn="ctr">
+                      <a:solidFill>
+                        <a:schemeClr val="tx1"/>
+                      </a:solidFill>
+                      <a:prstDash val="solid"/>
+                      <a:round/>
+                      <a:headEnd type="none" w="med" len="med"/>
+                      <a:tailEnd type="none" w="med" len="med"/>
+                    </a:lnL>
+                    <a:lnR w="12700" cap="flat" cmpd="sng" algn="ctr">
+                      <a:solidFill>
+                        <a:schemeClr val="tx1"/>
+                      </a:solidFill>
+                      <a:prstDash val="solid"/>
+                      <a:round/>
+                      <a:headEnd type="none" w="med" len="med"/>
+                      <a:tailEnd type="none" w="med" len="med"/>
+                    </a:lnR>
+                    <a:lnT w="12700" cap="flat" cmpd="sng" algn="ctr">
+                      <a:solidFill>
+                        <a:schemeClr val="tx1"/>
+                      </a:solidFill>
+                      <a:prstDash val="solid"/>
+                      <a:round/>
+                      <a:headEnd type="none" w="med" len="med"/>
+                      <a:tailEnd type="none" w="med" len="med"/>
+                    </a:lnT>
+                    <a:lnB w="12700" cap="flat" cmpd="sng" algn="ctr">
+                      <a:solidFill>
+                        <a:schemeClr val="tx1"/>
+                      </a:solidFill>
+                      <a:prstDash val="solid"/>
+                      <a:round/>
+                      <a:headEnd type="none" w="med" len="med"/>
+                      <a:tailEnd type="none" w="med" len="med"/>
+                    </a:lnB>
+                    <a:solidFill>
+                      <a:schemeClr val="bg1"/>
+                    </a:solidFill>
+                  </a:tcPr>
+                </a:tc>
+                <a:tc>
+                  <a:txBody>
+                    <a:bodyPr/>
+                    <a:lstStyle/>
+                    <a:p>
+                      <a:pPr marL="0" marR="0" lvl="0" indent="0" algn="ctr" defTabSz="914400" rtl="0" eaLnBrk="1" fontAlgn="auto" latinLnBrk="0" hangingPunct="1">
+                        <a:lnSpc>
+                          <a:spcPct val="100000"/>
+                        </a:lnSpc>
+                        <a:spcBef>
+                          <a:spcPts val="0"/>
+                        </a:spcBef>
+                        <a:spcAft>
+                          <a:spcPts val="0"/>
+                        </a:spcAft>
+                        <a:buClrTx/>
+                        <a:buSzTx/>
+                        <a:buFontTx/>
+                        <a:buNone/>
+                        <a:tabLst/>
+                        <a:defRPr/>
+                      </a:pPr>
+                      <a:r>
+                        <a:rPr lang="en-US" b="1" dirty="0">
+                          <a:latin typeface="Courier New" panose="02070309020205020404" pitchFamily="49" charset="0"/>
+                          <a:cs typeface="Courier New" panose="02070309020205020404" pitchFamily="49" charset="0"/>
+                        </a:rPr>
+                        <a:t>(2,0)</a:t>
+                      </a:r>
+                      <a:endParaRPr lang="nl-NL" b="1" dirty="0">
+                        <a:latin typeface="Courier New" panose="02070309020205020404" pitchFamily="49" charset="0"/>
+                        <a:cs typeface="Courier New" panose="02070309020205020404" pitchFamily="49" charset="0"/>
+                      </a:endParaRPr>
+                    </a:p>
+                  </a:txBody>
+                  <a:tcPr anchor="ctr">
+                    <a:lnL w="12700" cap="flat" cmpd="sng" algn="ctr">
+                      <a:solidFill>
+                        <a:schemeClr val="tx1"/>
+                      </a:solidFill>
+                      <a:prstDash val="solid"/>
+                      <a:round/>
+                      <a:headEnd type="none" w="med" len="med"/>
+                      <a:tailEnd type="none" w="med" len="med"/>
+                    </a:lnL>
+                    <a:lnR w="12700" cap="flat" cmpd="sng" algn="ctr">
+                      <a:solidFill>
+                        <a:schemeClr val="tx1"/>
+                      </a:solidFill>
+                      <a:prstDash val="solid"/>
+                      <a:round/>
+                      <a:headEnd type="none" w="med" len="med"/>
+                      <a:tailEnd type="none" w="med" len="med"/>
+                    </a:lnR>
+                    <a:lnT w="12700" cap="flat" cmpd="sng" algn="ctr">
+                      <a:solidFill>
+                        <a:schemeClr val="tx1"/>
+                      </a:solidFill>
+                      <a:prstDash val="solid"/>
+                      <a:round/>
+                      <a:headEnd type="none" w="med" len="med"/>
+                      <a:tailEnd type="none" w="med" len="med"/>
+                    </a:lnT>
+                    <a:lnB w="12700" cap="flat" cmpd="sng" algn="ctr">
+                      <a:solidFill>
+                        <a:schemeClr val="tx1"/>
+                      </a:solidFill>
+                      <a:prstDash val="solid"/>
+                      <a:round/>
+                      <a:headEnd type="none" w="med" len="med"/>
+                      <a:tailEnd type="none" w="med" len="med"/>
+                    </a:lnB>
+                    <a:solidFill>
+                      <a:schemeClr val="bg1"/>
+                    </a:solidFill>
+                  </a:tcPr>
+                </a:tc>
+                <a:extLst>
+                  <a:ext uri="{0D108BD9-81ED-4DB2-BD59-A6C34878D82A}">
+                    <a16:rowId xmlns:a16="http://schemas.microsoft.com/office/drawing/2014/main" val="2261145444"/>
+                  </a:ext>
+                </a:extLst>
+              </a:tr>
+              <a:tr h="705067">
+                <a:tc>
+                  <a:txBody>
+                    <a:bodyPr/>
+                    <a:lstStyle/>
+                    <a:p>
+                      <a:pPr marL="0" marR="0" lvl="0" indent="0" algn="ctr" defTabSz="914400" rtl="0" eaLnBrk="1" fontAlgn="auto" latinLnBrk="0" hangingPunct="1">
+                        <a:lnSpc>
+                          <a:spcPct val="100000"/>
+                        </a:lnSpc>
+                        <a:spcBef>
+                          <a:spcPts val="0"/>
+                        </a:spcBef>
+                        <a:spcAft>
+                          <a:spcPts val="0"/>
+                        </a:spcAft>
+                        <a:buClrTx/>
+                        <a:buSzTx/>
+                        <a:buFontTx/>
+                        <a:buNone/>
+                        <a:tabLst/>
+                        <a:defRPr/>
+                      </a:pPr>
+                      <a:r>
+                        <a:rPr lang="en-US" b="1" dirty="0">
+                          <a:latin typeface="Courier New" panose="02070309020205020404" pitchFamily="49" charset="0"/>
+                          <a:cs typeface="Courier New" panose="02070309020205020404" pitchFamily="49" charset="0"/>
+                        </a:rPr>
+                        <a:t>(-2,1)</a:t>
+                      </a:r>
+                      <a:endParaRPr lang="nl-NL" b="1" dirty="0">
+                        <a:latin typeface="Courier New" panose="02070309020205020404" pitchFamily="49" charset="0"/>
+                        <a:cs typeface="Courier New" panose="02070309020205020404" pitchFamily="49" charset="0"/>
+                      </a:endParaRPr>
+                    </a:p>
+                  </a:txBody>
+                  <a:tcPr anchor="ctr">
+                    <a:lnL w="12700" cap="flat" cmpd="sng" algn="ctr">
+                      <a:solidFill>
+                        <a:schemeClr val="tx1"/>
+                      </a:solidFill>
+                      <a:prstDash val="solid"/>
+                      <a:round/>
+                      <a:headEnd type="none" w="med" len="med"/>
+                      <a:tailEnd type="none" w="med" len="med"/>
+                    </a:lnL>
+                    <a:lnR w="12700" cap="flat" cmpd="sng" algn="ctr">
+                      <a:solidFill>
+                        <a:schemeClr val="tx1"/>
+                      </a:solidFill>
+                      <a:prstDash val="solid"/>
+                      <a:round/>
+                      <a:headEnd type="none" w="med" len="med"/>
+                      <a:tailEnd type="none" w="med" len="med"/>
+                    </a:lnR>
+                    <a:lnT w="12700" cap="flat" cmpd="sng" algn="ctr">
+                      <a:solidFill>
+                        <a:schemeClr val="tx1"/>
+                      </a:solidFill>
+                      <a:prstDash val="solid"/>
+                      <a:round/>
+                      <a:headEnd type="none" w="med" len="med"/>
+                      <a:tailEnd type="none" w="med" len="med"/>
+                    </a:lnT>
+                    <a:lnB w="12700" cap="flat" cmpd="sng" algn="ctr">
+                      <a:solidFill>
+                        <a:schemeClr val="tx1"/>
+                      </a:solidFill>
+                      <a:prstDash val="solid"/>
+                      <a:round/>
+                      <a:headEnd type="none" w="med" len="med"/>
+                      <a:tailEnd type="none" w="med" len="med"/>
+                    </a:lnB>
+                    <a:solidFill>
+                      <a:schemeClr val="bg1"/>
+                    </a:solidFill>
+                  </a:tcPr>
+                </a:tc>
+                <a:tc>
+                  <a:txBody>
+                    <a:bodyPr/>
+                    <a:lstStyle/>
+                    <a:p>
+                      <a:pPr marL="0" marR="0" lvl="0" indent="0" algn="ctr" defTabSz="914400" rtl="0" eaLnBrk="1" fontAlgn="auto" latinLnBrk="0" hangingPunct="1">
+                        <a:lnSpc>
+                          <a:spcPct val="100000"/>
+                        </a:lnSpc>
+                        <a:spcBef>
+                          <a:spcPts val="0"/>
+                        </a:spcBef>
+                        <a:spcAft>
+                          <a:spcPts val="0"/>
+                        </a:spcAft>
+                        <a:buClrTx/>
+                        <a:buSzTx/>
+                        <a:buFontTx/>
+                        <a:buNone/>
+                        <a:tabLst/>
+                        <a:defRPr/>
+                      </a:pPr>
+                      <a:r>
+                        <a:rPr lang="en-US" b="1" dirty="0">
+                          <a:latin typeface="Courier New" panose="02070309020205020404" pitchFamily="49" charset="0"/>
+                          <a:cs typeface="Courier New" panose="02070309020205020404" pitchFamily="49" charset="0"/>
+                        </a:rPr>
+                        <a:t>(-1,1)</a:t>
+                      </a:r>
+                      <a:endParaRPr lang="nl-NL" b="1" dirty="0">
+                        <a:latin typeface="Courier New" panose="02070309020205020404" pitchFamily="49" charset="0"/>
+                        <a:cs typeface="Courier New" panose="02070309020205020404" pitchFamily="49" charset="0"/>
+                      </a:endParaRPr>
+                    </a:p>
+                  </a:txBody>
+                  <a:tcPr anchor="ctr">
+                    <a:lnL w="12700" cap="flat" cmpd="sng" algn="ctr">
+                      <a:solidFill>
+                        <a:schemeClr val="tx1"/>
+                      </a:solidFill>
+                      <a:prstDash val="solid"/>
+                      <a:round/>
+                      <a:headEnd type="none" w="med" len="med"/>
+                      <a:tailEnd type="none" w="med" len="med"/>
+                    </a:lnL>
+                    <a:lnR w="12700" cap="flat" cmpd="sng" algn="ctr">
+                      <a:solidFill>
+                        <a:schemeClr val="tx1"/>
+                      </a:solidFill>
+                      <a:prstDash val="solid"/>
+                      <a:round/>
+                      <a:headEnd type="none" w="med" len="med"/>
+                      <a:tailEnd type="none" w="med" len="med"/>
+                    </a:lnR>
+                    <a:lnT w="12700" cap="flat" cmpd="sng" algn="ctr">
+                      <a:solidFill>
+                        <a:schemeClr val="tx1"/>
+                      </a:solidFill>
+                      <a:prstDash val="solid"/>
+                      <a:round/>
+                      <a:headEnd type="none" w="med" len="med"/>
+                      <a:tailEnd type="none" w="med" len="med"/>
+                    </a:lnT>
+                    <a:lnB w="12700" cap="flat" cmpd="sng" algn="ctr">
+                      <a:solidFill>
+                        <a:schemeClr val="tx1"/>
+                      </a:solidFill>
+                      <a:prstDash val="solid"/>
+                      <a:round/>
+                      <a:headEnd type="none" w="med" len="med"/>
+                      <a:tailEnd type="none" w="med" len="med"/>
+                    </a:lnB>
+                    <a:solidFill>
+                      <a:schemeClr val="bg1"/>
+                    </a:solidFill>
+                  </a:tcPr>
+                </a:tc>
+                <a:tc>
+                  <a:txBody>
+                    <a:bodyPr/>
+                    <a:lstStyle/>
+                    <a:p>
+                      <a:pPr marL="0" marR="0" lvl="0" indent="0" algn="ctr" defTabSz="914400" rtl="0" eaLnBrk="1" fontAlgn="auto" latinLnBrk="0" hangingPunct="1">
+                        <a:lnSpc>
+                          <a:spcPct val="100000"/>
+                        </a:lnSpc>
+                        <a:spcBef>
+                          <a:spcPts val="0"/>
+                        </a:spcBef>
+                        <a:spcAft>
+                          <a:spcPts val="0"/>
+                        </a:spcAft>
+                        <a:buClrTx/>
+                        <a:buSzTx/>
+                        <a:buFontTx/>
+                        <a:buNone/>
+                        <a:tabLst/>
+                        <a:defRPr/>
+                      </a:pPr>
+                      <a:r>
+                        <a:rPr lang="en-US" b="1" dirty="0">
+                          <a:latin typeface="Courier New" panose="02070309020205020404" pitchFamily="49" charset="0"/>
+                          <a:cs typeface="Courier New" panose="02070309020205020404" pitchFamily="49" charset="0"/>
+                        </a:rPr>
+                        <a:t>(0,1)</a:t>
+                      </a:r>
+                      <a:endParaRPr lang="nl-NL" b="1" dirty="0">
+                        <a:latin typeface="Courier New" panose="02070309020205020404" pitchFamily="49" charset="0"/>
+                        <a:cs typeface="Courier New" panose="02070309020205020404" pitchFamily="49" charset="0"/>
+                      </a:endParaRPr>
+                    </a:p>
+                  </a:txBody>
+                  <a:tcPr anchor="ctr">
+                    <a:lnL w="12700" cap="flat" cmpd="sng" algn="ctr">
+                      <a:solidFill>
+                        <a:schemeClr val="tx1"/>
+                      </a:solidFill>
+                      <a:prstDash val="solid"/>
+                      <a:round/>
+                      <a:headEnd type="none" w="med" len="med"/>
+                      <a:tailEnd type="none" w="med" len="med"/>
+                    </a:lnL>
+                    <a:lnR w="12700" cap="flat" cmpd="sng" algn="ctr">
+                      <a:solidFill>
+                        <a:schemeClr val="tx1"/>
+                      </a:solidFill>
+                      <a:prstDash val="solid"/>
+                      <a:round/>
+                      <a:headEnd type="none" w="med" len="med"/>
+                      <a:tailEnd type="none" w="med" len="med"/>
+                    </a:lnR>
+                    <a:lnT w="12700" cap="flat" cmpd="sng" algn="ctr">
+                      <a:solidFill>
+                        <a:schemeClr val="tx1"/>
+                      </a:solidFill>
+                      <a:prstDash val="solid"/>
+                      <a:round/>
+                      <a:headEnd type="none" w="med" len="med"/>
+                      <a:tailEnd type="none" w="med" len="med"/>
+                    </a:lnT>
+                    <a:lnB w="12700" cap="flat" cmpd="sng" algn="ctr">
+                      <a:solidFill>
+                        <a:schemeClr val="tx1"/>
+                      </a:solidFill>
+                      <a:prstDash val="solid"/>
+                      <a:round/>
+                      <a:headEnd type="none" w="med" len="med"/>
+                      <a:tailEnd type="none" w="med" len="med"/>
+                    </a:lnB>
+                    <a:solidFill>
+                      <a:schemeClr val="bg1"/>
+                    </a:solidFill>
+                  </a:tcPr>
+                </a:tc>
+                <a:tc>
+                  <a:txBody>
+                    <a:bodyPr/>
+                    <a:lstStyle/>
+                    <a:p>
+                      <a:pPr marL="0" marR="0" lvl="0" indent="0" algn="ctr" defTabSz="914400" rtl="0" eaLnBrk="1" fontAlgn="auto" latinLnBrk="0" hangingPunct="1">
+                        <a:lnSpc>
+                          <a:spcPct val="100000"/>
+                        </a:lnSpc>
+                        <a:spcBef>
+                          <a:spcPts val="0"/>
+                        </a:spcBef>
+                        <a:spcAft>
+                          <a:spcPts val="0"/>
+                        </a:spcAft>
+                        <a:buClrTx/>
+                        <a:buSzTx/>
+                        <a:buFontTx/>
+                        <a:buNone/>
+                        <a:tabLst/>
+                        <a:defRPr/>
+                      </a:pPr>
+                      <a:r>
+                        <a:rPr lang="en-US" b="1" dirty="0">
+                          <a:latin typeface="Courier New" panose="02070309020205020404" pitchFamily="49" charset="0"/>
+                          <a:cs typeface="Courier New" panose="02070309020205020404" pitchFamily="49" charset="0"/>
+                        </a:rPr>
+                        <a:t>(1,1)</a:t>
+                      </a:r>
+                      <a:endParaRPr lang="nl-NL" b="1" dirty="0">
+                        <a:latin typeface="Courier New" panose="02070309020205020404" pitchFamily="49" charset="0"/>
+                        <a:cs typeface="Courier New" panose="02070309020205020404" pitchFamily="49" charset="0"/>
+                      </a:endParaRPr>
+                    </a:p>
+                  </a:txBody>
+                  <a:tcPr anchor="ctr">
+                    <a:lnL w="12700" cap="flat" cmpd="sng" algn="ctr">
+                      <a:solidFill>
+                        <a:schemeClr val="tx1"/>
+                      </a:solidFill>
+                      <a:prstDash val="solid"/>
+                      <a:round/>
+                      <a:headEnd type="none" w="med" len="med"/>
+                      <a:tailEnd type="none" w="med" len="med"/>
+                    </a:lnL>
+                    <a:lnR w="12700" cap="flat" cmpd="sng" algn="ctr">
+                      <a:solidFill>
+                        <a:schemeClr val="tx1"/>
+                      </a:solidFill>
+                      <a:prstDash val="solid"/>
+                      <a:round/>
+                      <a:headEnd type="none" w="med" len="med"/>
+                      <a:tailEnd type="none" w="med" len="med"/>
+                    </a:lnR>
+                    <a:lnT w="12700" cap="flat" cmpd="sng" algn="ctr">
+                      <a:solidFill>
+                        <a:schemeClr val="tx1"/>
+                      </a:solidFill>
+                      <a:prstDash val="solid"/>
+                      <a:round/>
+                      <a:headEnd type="none" w="med" len="med"/>
+                      <a:tailEnd type="none" w="med" len="med"/>
+                    </a:lnT>
+                    <a:lnB w="12700" cap="flat" cmpd="sng" algn="ctr">
+                      <a:solidFill>
+                        <a:schemeClr val="tx1"/>
+                      </a:solidFill>
+                      <a:prstDash val="solid"/>
+                      <a:round/>
+                      <a:headEnd type="none" w="med" len="med"/>
+                      <a:tailEnd type="none" w="med" len="med"/>
+                    </a:lnB>
+                    <a:solidFill>
+                      <a:schemeClr val="bg1"/>
+                    </a:solidFill>
+                  </a:tcPr>
+                </a:tc>
+                <a:tc>
+                  <a:txBody>
+                    <a:bodyPr/>
+                    <a:lstStyle/>
+                    <a:p>
+                      <a:pPr marL="0" marR="0" lvl="0" indent="0" algn="ctr" defTabSz="914400" rtl="0" eaLnBrk="1" fontAlgn="auto" latinLnBrk="0" hangingPunct="1">
+                        <a:lnSpc>
+                          <a:spcPct val="100000"/>
+                        </a:lnSpc>
+                        <a:spcBef>
+                          <a:spcPts val="0"/>
+                        </a:spcBef>
+                        <a:spcAft>
+                          <a:spcPts val="0"/>
+                        </a:spcAft>
+                        <a:buClrTx/>
+                        <a:buSzTx/>
+                        <a:buFontTx/>
+                        <a:buNone/>
+                        <a:tabLst/>
+                        <a:defRPr/>
+                      </a:pPr>
+                      <a:r>
+                        <a:rPr lang="en-US" b="1" dirty="0">
+                          <a:latin typeface="Courier New" panose="02070309020205020404" pitchFamily="49" charset="0"/>
+                          <a:cs typeface="Courier New" panose="02070309020205020404" pitchFamily="49" charset="0"/>
+                        </a:rPr>
+                        <a:t>(2,1)</a:t>
+                      </a:r>
+                      <a:endParaRPr lang="nl-NL" b="1" dirty="0">
+                        <a:latin typeface="Courier New" panose="02070309020205020404" pitchFamily="49" charset="0"/>
+                        <a:cs typeface="Courier New" panose="02070309020205020404" pitchFamily="49" charset="0"/>
+                      </a:endParaRPr>
+                    </a:p>
+                  </a:txBody>
+                  <a:tcPr anchor="ctr">
+                    <a:lnL w="12700" cap="flat" cmpd="sng" algn="ctr">
+                      <a:solidFill>
+                        <a:schemeClr val="tx1"/>
+                      </a:solidFill>
+                      <a:prstDash val="solid"/>
+                      <a:round/>
+                      <a:headEnd type="none" w="med" len="med"/>
+                      <a:tailEnd type="none" w="med" len="med"/>
+                    </a:lnL>
+                    <a:lnR w="12700" cap="flat" cmpd="sng" algn="ctr">
+                      <a:solidFill>
+                        <a:schemeClr val="tx1"/>
+                      </a:solidFill>
+                      <a:prstDash val="solid"/>
+                      <a:round/>
+                      <a:headEnd type="none" w="med" len="med"/>
+                      <a:tailEnd type="none" w="med" len="med"/>
+                    </a:lnR>
+                    <a:lnT w="12700" cap="flat" cmpd="sng" algn="ctr">
+                      <a:solidFill>
+                        <a:schemeClr val="tx1"/>
+                      </a:solidFill>
+                      <a:prstDash val="solid"/>
+                      <a:round/>
+                      <a:headEnd type="none" w="med" len="med"/>
+                      <a:tailEnd type="none" w="med" len="med"/>
+                    </a:lnT>
+                    <a:lnB w="12700" cap="flat" cmpd="sng" algn="ctr">
+                      <a:solidFill>
+                        <a:schemeClr val="tx1"/>
+                      </a:solidFill>
+                      <a:prstDash val="solid"/>
+                      <a:round/>
+                      <a:headEnd type="none" w="med" len="med"/>
+                      <a:tailEnd type="none" w="med" len="med"/>
+                    </a:lnB>
+                    <a:solidFill>
+                      <a:schemeClr val="bg1"/>
+                    </a:solidFill>
+                  </a:tcPr>
+                </a:tc>
+                <a:extLst>
+                  <a:ext uri="{0D108BD9-81ED-4DB2-BD59-A6C34878D82A}">
+                    <a16:rowId xmlns:a16="http://schemas.microsoft.com/office/drawing/2014/main" val="789361174"/>
+                  </a:ext>
+                </a:extLst>
+              </a:tr>
+              <a:tr h="705067">
+                <a:tc>
+                  <a:txBody>
+                    <a:bodyPr/>
+                    <a:lstStyle/>
+                    <a:p>
+                      <a:pPr marL="0" marR="0" lvl="0" indent="0" algn="ctr" defTabSz="914400" rtl="0" eaLnBrk="1" fontAlgn="auto" latinLnBrk="0" hangingPunct="1">
+                        <a:lnSpc>
+                          <a:spcPct val="100000"/>
+                        </a:lnSpc>
+                        <a:spcBef>
+                          <a:spcPts val="0"/>
+                        </a:spcBef>
+                        <a:spcAft>
+                          <a:spcPts val="0"/>
+                        </a:spcAft>
+                        <a:buClrTx/>
+                        <a:buSzTx/>
+                        <a:buFontTx/>
+                        <a:buNone/>
+                        <a:tabLst/>
+                        <a:defRPr/>
+                      </a:pPr>
+                      <a:r>
+                        <a:rPr lang="en-US" b="1" dirty="0">
+                          <a:latin typeface="Courier New" panose="02070309020205020404" pitchFamily="49" charset="0"/>
+                          <a:cs typeface="Courier New" panose="02070309020205020404" pitchFamily="49" charset="0"/>
+                        </a:rPr>
+                        <a:t>(-2,2)</a:t>
+                      </a:r>
+                      <a:endParaRPr lang="nl-NL" b="1" dirty="0">
+                        <a:latin typeface="Courier New" panose="02070309020205020404" pitchFamily="49" charset="0"/>
+                        <a:cs typeface="Courier New" panose="02070309020205020404" pitchFamily="49" charset="0"/>
+                      </a:endParaRPr>
+                    </a:p>
+                  </a:txBody>
+                  <a:tcPr anchor="ctr">
+                    <a:lnL w="12700" cap="flat" cmpd="sng" algn="ctr">
+                      <a:solidFill>
+                        <a:schemeClr val="tx1"/>
+                      </a:solidFill>
+                      <a:prstDash val="solid"/>
+                      <a:round/>
+                      <a:headEnd type="none" w="med" len="med"/>
+                      <a:tailEnd type="none" w="med" len="med"/>
+                    </a:lnL>
+                    <a:lnR w="12700" cap="flat" cmpd="sng" algn="ctr">
+                      <a:solidFill>
+                        <a:schemeClr val="tx1"/>
+                      </a:solidFill>
+                      <a:prstDash val="solid"/>
+                      <a:round/>
+                      <a:headEnd type="none" w="med" len="med"/>
+                      <a:tailEnd type="none" w="med" len="med"/>
+                    </a:lnR>
+                    <a:lnT w="12700" cap="flat" cmpd="sng" algn="ctr">
+                      <a:solidFill>
+                        <a:schemeClr val="tx1"/>
+                      </a:solidFill>
+                      <a:prstDash val="solid"/>
+                      <a:round/>
+                      <a:headEnd type="none" w="med" len="med"/>
+                      <a:tailEnd type="none" w="med" len="med"/>
+                    </a:lnT>
+                    <a:lnB w="12700" cap="flat" cmpd="sng" algn="ctr">
+                      <a:solidFill>
+                        <a:schemeClr val="tx1"/>
+                      </a:solidFill>
+                      <a:prstDash val="solid"/>
+                      <a:round/>
+                      <a:headEnd type="none" w="med" len="med"/>
+                      <a:tailEnd type="none" w="med" len="med"/>
+                    </a:lnB>
+                    <a:solidFill>
+                      <a:schemeClr val="bg1"/>
+                    </a:solidFill>
+                  </a:tcPr>
+                </a:tc>
+                <a:tc>
+                  <a:txBody>
+                    <a:bodyPr/>
+                    <a:lstStyle/>
+                    <a:p>
+                      <a:pPr marL="0" marR="0" lvl="0" indent="0" algn="ctr" defTabSz="914400" rtl="0" eaLnBrk="1" fontAlgn="auto" latinLnBrk="0" hangingPunct="1">
+                        <a:lnSpc>
+                          <a:spcPct val="100000"/>
+                        </a:lnSpc>
+                        <a:spcBef>
+                          <a:spcPts val="0"/>
+                        </a:spcBef>
+                        <a:spcAft>
+                          <a:spcPts val="0"/>
+                        </a:spcAft>
+                        <a:buClrTx/>
+                        <a:buSzTx/>
+                        <a:buFontTx/>
+                        <a:buNone/>
+                        <a:tabLst/>
+                        <a:defRPr/>
+                      </a:pPr>
+                      <a:r>
+                        <a:rPr lang="en-US" b="1" dirty="0">
+                          <a:latin typeface="Courier New" panose="02070309020205020404" pitchFamily="49" charset="0"/>
+                          <a:cs typeface="Courier New" panose="02070309020205020404" pitchFamily="49" charset="0"/>
+                        </a:rPr>
+                        <a:t>(-1,2)</a:t>
+                      </a:r>
+                      <a:endParaRPr lang="nl-NL" b="1" dirty="0">
+                        <a:latin typeface="Courier New" panose="02070309020205020404" pitchFamily="49" charset="0"/>
+                        <a:cs typeface="Courier New" panose="02070309020205020404" pitchFamily="49" charset="0"/>
+                      </a:endParaRPr>
+                    </a:p>
+                  </a:txBody>
+                  <a:tcPr anchor="ctr">
+                    <a:lnL w="12700" cap="flat" cmpd="sng" algn="ctr">
+                      <a:solidFill>
+                        <a:schemeClr val="tx1"/>
+                      </a:solidFill>
+                      <a:prstDash val="solid"/>
+                      <a:round/>
+                      <a:headEnd type="none" w="med" len="med"/>
+                      <a:tailEnd type="none" w="med" len="med"/>
+                    </a:lnL>
+                    <a:lnR w="12700" cap="flat" cmpd="sng" algn="ctr">
+                      <a:solidFill>
+                        <a:schemeClr val="tx1"/>
+                      </a:solidFill>
+                      <a:prstDash val="solid"/>
+                      <a:round/>
+                      <a:headEnd type="none" w="med" len="med"/>
+                      <a:tailEnd type="none" w="med" len="med"/>
+                    </a:lnR>
+                    <a:lnT w="12700" cap="flat" cmpd="sng" algn="ctr">
+                      <a:solidFill>
+                        <a:schemeClr val="tx1"/>
+                      </a:solidFill>
+                      <a:prstDash val="solid"/>
+                      <a:round/>
+                      <a:headEnd type="none" w="med" len="med"/>
+                      <a:tailEnd type="none" w="med" len="med"/>
+                    </a:lnT>
+                    <a:lnB w="12700" cap="flat" cmpd="sng" algn="ctr">
+                      <a:solidFill>
+                        <a:schemeClr val="tx1"/>
+                      </a:solidFill>
+                      <a:prstDash val="solid"/>
+                      <a:round/>
+                      <a:headEnd type="none" w="med" len="med"/>
+                      <a:tailEnd type="none" w="med" len="med"/>
+                    </a:lnB>
+                    <a:solidFill>
+                      <a:schemeClr val="bg1"/>
+                    </a:solidFill>
+                  </a:tcPr>
+                </a:tc>
+                <a:tc>
+                  <a:txBody>
+                    <a:bodyPr/>
+                    <a:lstStyle/>
+                    <a:p>
+                      <a:pPr marL="0" marR="0" lvl="0" indent="0" algn="ctr" defTabSz="914400" rtl="0" eaLnBrk="1" fontAlgn="auto" latinLnBrk="0" hangingPunct="1">
+                        <a:lnSpc>
+                          <a:spcPct val="100000"/>
+                        </a:lnSpc>
+                        <a:spcBef>
+                          <a:spcPts val="0"/>
+                        </a:spcBef>
+                        <a:spcAft>
+                          <a:spcPts val="0"/>
+                        </a:spcAft>
+                        <a:buClrTx/>
+                        <a:buSzTx/>
+                        <a:buFontTx/>
+                        <a:buNone/>
+                        <a:tabLst/>
+                        <a:defRPr/>
+                      </a:pPr>
+                      <a:r>
+                        <a:rPr lang="en-US" b="1" dirty="0">
+                          <a:latin typeface="Courier New" panose="02070309020205020404" pitchFamily="49" charset="0"/>
+                          <a:cs typeface="Courier New" panose="02070309020205020404" pitchFamily="49" charset="0"/>
+                        </a:rPr>
+                        <a:t>(0,2)</a:t>
+                      </a:r>
+                      <a:endParaRPr lang="nl-NL" b="1" dirty="0">
+                        <a:latin typeface="Courier New" panose="02070309020205020404" pitchFamily="49" charset="0"/>
+                        <a:cs typeface="Courier New" panose="02070309020205020404" pitchFamily="49" charset="0"/>
+                      </a:endParaRPr>
+                    </a:p>
+                  </a:txBody>
+                  <a:tcPr anchor="ctr">
+                    <a:lnL w="12700" cap="flat" cmpd="sng" algn="ctr">
+                      <a:solidFill>
+                        <a:schemeClr val="tx1"/>
+                      </a:solidFill>
+                      <a:prstDash val="solid"/>
+                      <a:round/>
+                      <a:headEnd type="none" w="med" len="med"/>
+                      <a:tailEnd type="none" w="med" len="med"/>
+                    </a:lnL>
+                    <a:lnR w="12700" cap="flat" cmpd="sng" algn="ctr">
+                      <a:solidFill>
+                        <a:schemeClr val="tx1"/>
+                      </a:solidFill>
+                      <a:prstDash val="solid"/>
+                      <a:round/>
+                      <a:headEnd type="none" w="med" len="med"/>
+                      <a:tailEnd type="none" w="med" len="med"/>
+                    </a:lnR>
+                    <a:lnT w="12700" cap="flat" cmpd="sng" algn="ctr">
+                      <a:solidFill>
+                        <a:schemeClr val="tx1"/>
+                      </a:solidFill>
+                      <a:prstDash val="solid"/>
+                      <a:round/>
+                      <a:headEnd type="none" w="med" len="med"/>
+                      <a:tailEnd type="none" w="med" len="med"/>
+                    </a:lnT>
+                    <a:lnB w="12700" cap="flat" cmpd="sng" algn="ctr">
+                      <a:solidFill>
+                        <a:schemeClr val="tx1"/>
+                      </a:solidFill>
+                      <a:prstDash val="solid"/>
+                      <a:round/>
+                      <a:headEnd type="none" w="med" len="med"/>
+                      <a:tailEnd type="none" w="med" len="med"/>
+                    </a:lnB>
+                    <a:solidFill>
+                      <a:schemeClr val="bg1"/>
+                    </a:solidFill>
+                  </a:tcPr>
+                </a:tc>
+                <a:tc>
+                  <a:txBody>
+                    <a:bodyPr/>
+                    <a:lstStyle/>
+                    <a:p>
+                      <a:pPr marL="0" marR="0" lvl="0" indent="0" algn="ctr" defTabSz="914400" rtl="0" eaLnBrk="1" fontAlgn="auto" latinLnBrk="0" hangingPunct="1">
+                        <a:lnSpc>
+                          <a:spcPct val="100000"/>
+                        </a:lnSpc>
+                        <a:spcBef>
+                          <a:spcPts val="0"/>
+                        </a:spcBef>
+                        <a:spcAft>
+                          <a:spcPts val="0"/>
+                        </a:spcAft>
+                        <a:buClrTx/>
+                        <a:buSzTx/>
+                        <a:buFontTx/>
+                        <a:buNone/>
+                        <a:tabLst/>
+                        <a:defRPr/>
+                      </a:pPr>
+                      <a:r>
+                        <a:rPr lang="en-US" b="1" dirty="0">
+                          <a:latin typeface="Courier New" panose="02070309020205020404" pitchFamily="49" charset="0"/>
+                          <a:cs typeface="Courier New" panose="02070309020205020404" pitchFamily="49" charset="0"/>
+                        </a:rPr>
+                        <a:t>(1,2)</a:t>
+                      </a:r>
+                      <a:endParaRPr lang="nl-NL" b="1" dirty="0">
+                        <a:latin typeface="Courier New" panose="02070309020205020404" pitchFamily="49" charset="0"/>
+                        <a:cs typeface="Courier New" panose="02070309020205020404" pitchFamily="49" charset="0"/>
+                      </a:endParaRPr>
+                    </a:p>
+                  </a:txBody>
+                  <a:tcPr anchor="ctr">
+                    <a:lnL w="12700" cap="flat" cmpd="sng" algn="ctr">
+                      <a:solidFill>
+                        <a:schemeClr val="tx1"/>
+                      </a:solidFill>
+                      <a:prstDash val="solid"/>
+                      <a:round/>
+                      <a:headEnd type="none" w="med" len="med"/>
+                      <a:tailEnd type="none" w="med" len="med"/>
+                    </a:lnL>
+                    <a:lnR w="12700" cap="flat" cmpd="sng" algn="ctr">
+                      <a:solidFill>
+                        <a:schemeClr val="tx1"/>
+                      </a:solidFill>
+                      <a:prstDash val="solid"/>
+                      <a:round/>
+                      <a:headEnd type="none" w="med" len="med"/>
+                      <a:tailEnd type="none" w="med" len="med"/>
+                    </a:lnR>
+                    <a:lnT w="12700" cap="flat" cmpd="sng" algn="ctr">
+                      <a:solidFill>
+                        <a:schemeClr val="tx1"/>
+                      </a:solidFill>
+                      <a:prstDash val="solid"/>
+                      <a:round/>
+                      <a:headEnd type="none" w="med" len="med"/>
+                      <a:tailEnd type="none" w="med" len="med"/>
+                    </a:lnT>
+                    <a:lnB w="12700" cap="flat" cmpd="sng" algn="ctr">
+                      <a:solidFill>
+                        <a:schemeClr val="tx1"/>
+                      </a:solidFill>
+                      <a:prstDash val="solid"/>
+                      <a:round/>
+                      <a:headEnd type="none" w="med" len="med"/>
+                      <a:tailEnd type="none" w="med" len="med"/>
+                    </a:lnB>
+                    <a:solidFill>
+                      <a:schemeClr val="bg1"/>
+                    </a:solidFill>
+                  </a:tcPr>
+                </a:tc>
+                <a:tc>
+                  <a:txBody>
+                    <a:bodyPr/>
+                    <a:lstStyle/>
+                    <a:p>
+                      <a:pPr marL="0" marR="0" lvl="0" indent="0" algn="ctr" defTabSz="914400" rtl="0" eaLnBrk="1" fontAlgn="auto" latinLnBrk="0" hangingPunct="1">
+                        <a:lnSpc>
+                          <a:spcPct val="100000"/>
+                        </a:lnSpc>
+                        <a:spcBef>
+                          <a:spcPts val="0"/>
+                        </a:spcBef>
+                        <a:spcAft>
+                          <a:spcPts val="0"/>
+                        </a:spcAft>
+                        <a:buClrTx/>
+                        <a:buSzTx/>
+                        <a:buFontTx/>
+                        <a:buNone/>
+                        <a:tabLst/>
+                        <a:defRPr/>
+                      </a:pPr>
+                      <a:r>
+                        <a:rPr lang="en-US" b="1" dirty="0">
+                          <a:latin typeface="Courier New" panose="02070309020205020404" pitchFamily="49" charset="0"/>
+                          <a:cs typeface="Courier New" panose="02070309020205020404" pitchFamily="49" charset="0"/>
+                        </a:rPr>
+                        <a:t>(2,2)</a:t>
+                      </a:r>
+                      <a:endParaRPr lang="nl-NL" b="1" dirty="0">
+                        <a:latin typeface="Courier New" panose="02070309020205020404" pitchFamily="49" charset="0"/>
+                        <a:cs typeface="Courier New" panose="02070309020205020404" pitchFamily="49" charset="0"/>
+                      </a:endParaRPr>
+                    </a:p>
+                  </a:txBody>
+                  <a:tcPr anchor="ctr">
+                    <a:lnL w="12700" cap="flat" cmpd="sng" algn="ctr">
+                      <a:solidFill>
+                        <a:schemeClr val="tx1"/>
+                      </a:solidFill>
+                      <a:prstDash val="solid"/>
+                      <a:round/>
+                      <a:headEnd type="none" w="med" len="med"/>
+                      <a:tailEnd type="none" w="med" len="med"/>
+                    </a:lnL>
+                    <a:lnR w="12700" cap="flat" cmpd="sng" algn="ctr">
+                      <a:solidFill>
+                        <a:schemeClr val="tx1"/>
+                      </a:solidFill>
+                      <a:prstDash val="solid"/>
+                      <a:round/>
+                      <a:headEnd type="none" w="med" len="med"/>
+                      <a:tailEnd type="none" w="med" len="med"/>
+                    </a:lnR>
+                    <a:lnT w="12700" cap="flat" cmpd="sng" algn="ctr">
+                      <a:solidFill>
+                        <a:schemeClr val="tx1"/>
+                      </a:solidFill>
+                      <a:prstDash val="solid"/>
+                      <a:round/>
+                      <a:headEnd type="none" w="med" len="med"/>
+                      <a:tailEnd type="none" w="med" len="med"/>
+                    </a:lnT>
+                    <a:lnB w="12700" cap="flat" cmpd="sng" algn="ctr">
+                      <a:solidFill>
+                        <a:schemeClr val="tx1"/>
+                      </a:solidFill>
+                      <a:prstDash val="solid"/>
+                      <a:round/>
+                      <a:headEnd type="none" w="med" len="med"/>
+                      <a:tailEnd type="none" w="med" len="med"/>
+                    </a:lnB>
+                    <a:solidFill>
+                      <a:schemeClr val="bg1"/>
+                    </a:solidFill>
+                  </a:tcPr>
+                </a:tc>
+                <a:extLst>
+                  <a:ext uri="{0D108BD9-81ED-4DB2-BD59-A6C34878D82A}">
+                    <a16:rowId xmlns:a16="http://schemas.microsoft.com/office/drawing/2014/main" val="3450145968"/>
+                  </a:ext>
+                </a:extLst>
+              </a:tr>
+            </a:tbl>
+          </a:graphicData>
+        </a:graphic>
+      </p:graphicFrame>
+    </p:spTree>
+    <p:extLst>
+      <p:ext uri="{BB962C8B-B14F-4D97-AF65-F5344CB8AC3E}">
+        <p14:creationId xmlns:p14="http://schemas.microsoft.com/office/powerpoint/2010/main" val="3861025813"/>
+      </p:ext>
+    </p:extLst>
+  </p:cSld>
+  <p:clrMapOvr>
+    <a:masterClrMapping/>
+  </p:clrMapOvr>
+</p:sld>
+</file>
+
+<file path=ppt/slides/slide7.xml><?xml version="1.0" encoding="utf-8"?>
+<p:sld xmlns:a="http://schemas.openxmlformats.org/drawingml/2006/main" xmlns:r="http://schemas.openxmlformats.org/officeDocument/2006/relationships" xmlns:p="http://schemas.openxmlformats.org/presentationml/2006/main">
+  <p:cSld>
+    <p:spTree>
+      <p:nvGrpSpPr>
+        <p:cNvPr id="1" name=""/>
+        <p:cNvGrpSpPr/>
+        <p:nvPr/>
+      </p:nvGrpSpPr>
+      <p:grpSpPr>
+        <a:xfrm>
+          <a:off x="0" y="0"/>
+          <a:ext cx="0" cy="0"/>
+          <a:chOff x="0" y="0"/>
+          <a:chExt cx="0" cy="0"/>
+        </a:xfrm>
+      </p:grpSpPr>
+      <p:sp>
+        <p:nvSpPr>
+          <p:cNvPr id="2" name="Titel 1">
+            <a:extLst>
+              <a:ext uri="{FF2B5EF4-FFF2-40B4-BE49-F238E27FC236}">
+                <a16:creationId xmlns:a16="http://schemas.microsoft.com/office/drawing/2014/main" id="{D0ACE8D3-2E12-BA47-F79C-BEF8FCF74313}"/>
+              </a:ext>
+            </a:extLst>
+          </p:cNvPr>
+          <p:cNvSpPr>
+            <a:spLocks noGrp="1"/>
+          </p:cNvSpPr>
+          <p:nvPr>
+            <p:ph type="title"/>
+          </p:nvPr>
+        </p:nvSpPr>
+        <p:spPr/>
+        <p:txBody>
+          <a:bodyPr/>
+          <a:lstStyle/>
+          <a:p>
+            <a:r>
+              <a:rPr lang="en-US" dirty="0" err="1"/>
+              <a:t>SetTileFlags</a:t>
+            </a:r>
+            <a:endParaRPr lang="nl-NL" dirty="0"/>
+          </a:p>
+        </p:txBody>
+      </p:sp>
+      <p:sp>
+        <p:nvSpPr>
+          <p:cNvPr id="3" name="Tijdelijke aanduiding voor inhoud 2">
+            <a:extLst>
+              <a:ext uri="{FF2B5EF4-FFF2-40B4-BE49-F238E27FC236}">
+                <a16:creationId xmlns:a16="http://schemas.microsoft.com/office/drawing/2014/main" id="{F07DFD2B-98F7-C71C-27B3-8D428228EF93}"/>
+              </a:ext>
+            </a:extLst>
+          </p:cNvPr>
+          <p:cNvSpPr>
+            <a:spLocks noGrp="1"/>
+          </p:cNvSpPr>
+          <p:nvPr>
+            <p:ph idx="1"/>
+          </p:nvPr>
+        </p:nvSpPr>
+        <p:spPr>
+          <a:xfrm>
+            <a:off x="838200" y="1825625"/>
+            <a:ext cx="10515600" cy="2386452"/>
+          </a:xfrm>
+        </p:spPr>
+        <p:txBody>
+          <a:bodyPr>
+            <a:normAutofit fontScale="92500" lnSpcReduction="10000"/>
+          </a:bodyPr>
+          <a:lstStyle/>
+          <a:p>
+            <a:r>
+              <a:rPr lang="nl-NL" dirty="0"/>
+              <a:t>In </a:t>
+            </a:r>
+            <a:r>
+              <a:rPr lang="nl-NL" dirty="0" err="1"/>
+              <a:t>Unity</a:t>
+            </a:r>
+            <a:r>
+              <a:rPr lang="nl-NL" dirty="0"/>
+              <a:t> (specifiek de 2D </a:t>
+            </a:r>
+            <a:r>
+              <a:rPr lang="nl-NL" dirty="0" err="1"/>
+              <a:t>Tilemap</a:t>
+            </a:r>
+            <a:r>
+              <a:rPr lang="nl-NL" dirty="0"/>
+              <a:t> API) gebruik je </a:t>
+            </a:r>
+            <a:r>
+              <a:rPr lang="nl-NL" dirty="0" err="1"/>
+              <a:t>SetTileFlags</a:t>
+            </a:r>
+            <a:r>
+              <a:rPr lang="nl-NL" dirty="0"/>
+              <a:t> om eigenschappen (“</a:t>
+            </a:r>
+            <a:r>
+              <a:rPr lang="nl-NL" dirty="0" err="1"/>
+              <a:t>flags</a:t>
+            </a:r>
+            <a:r>
+              <a:rPr lang="nl-NL" dirty="0"/>
+              <a:t>”) van een </a:t>
+            </a:r>
+            <a:r>
+              <a:rPr lang="nl-NL" dirty="0" err="1"/>
+              <a:t>tile</a:t>
+            </a:r>
+            <a:r>
+              <a:rPr lang="nl-NL" dirty="0"/>
+              <a:t> op een bepaalde positie aan te passen.</a:t>
+            </a:r>
+          </a:p>
+          <a:p>
+            <a:r>
+              <a:rPr lang="nl-NL" dirty="0"/>
+              <a:t>De methode hoort bij </a:t>
+            </a:r>
+            <a:r>
+              <a:rPr lang="nl-NL" dirty="0" err="1">
+                <a:hlinkClick r:id="rId2"/>
+              </a:rPr>
+              <a:t>Unity</a:t>
+            </a:r>
+            <a:r>
+              <a:rPr lang="nl-NL" dirty="0">
+                <a:hlinkClick r:id="rId2"/>
+              </a:rPr>
+              <a:t> </a:t>
+            </a:r>
+            <a:r>
+              <a:rPr lang="nl-NL" dirty="0" err="1">
+                <a:hlinkClick r:id="rId2"/>
+              </a:rPr>
+              <a:t>Tilemap</a:t>
+            </a:r>
+            <a:r>
+              <a:rPr lang="nl-NL" dirty="0">
+                <a:hlinkClick r:id="rId2"/>
+              </a:rPr>
+              <a:t> API</a:t>
+            </a:r>
+            <a:r>
+              <a:rPr lang="nl-NL" dirty="0"/>
+              <a:t>.</a:t>
+            </a:r>
+          </a:p>
+          <a:p>
+            <a:endParaRPr lang="nl-NL" dirty="0"/>
+          </a:p>
+          <a:p>
+            <a:r>
+              <a:rPr lang="nl-NL" dirty="0"/>
+              <a:t>Basisvorm:</a:t>
+            </a:r>
+          </a:p>
+          <a:p>
+            <a:endParaRPr lang="nl-NL" dirty="0"/>
+          </a:p>
+        </p:txBody>
+      </p:sp>
+      <p:sp>
+        <p:nvSpPr>
+          <p:cNvPr id="5" name="Tekstvak 4">
+            <a:extLst>
+              <a:ext uri="{FF2B5EF4-FFF2-40B4-BE49-F238E27FC236}">
+                <a16:creationId xmlns:a16="http://schemas.microsoft.com/office/drawing/2014/main" id="{0F859E05-4DBA-CECE-CED9-FD2D8FAABAC6}"/>
+              </a:ext>
+            </a:extLst>
+          </p:cNvPr>
+          <p:cNvSpPr txBox="1"/>
+          <p:nvPr/>
+        </p:nvSpPr>
+        <p:spPr>
+          <a:xfrm>
+            <a:off x="2161972" y="4347014"/>
+            <a:ext cx="6094378" cy="369332"/>
+          </a:xfrm>
+          <a:prstGeom prst="rect">
+            <a:avLst/>
+          </a:prstGeom>
+          <a:solidFill>
+            <a:schemeClr val="bg1">
+              <a:lumMod val="85000"/>
+            </a:schemeClr>
+          </a:solidFill>
+        </p:spPr>
+        <p:txBody>
+          <a:bodyPr wrap="square">
+            <a:spAutoFit/>
+          </a:bodyPr>
+          <a:lstStyle/>
+          <a:p>
+            <a:pPr marL="0" indent="0">
+              <a:buNone/>
+            </a:pPr>
+            <a:r>
+              <a:rPr lang="nl-NL" b="1" dirty="0" err="1">
+                <a:latin typeface="Courier New" panose="02070309020205020404" pitchFamily="49" charset="0"/>
+                <a:cs typeface="Courier New" panose="02070309020205020404" pitchFamily="49" charset="0"/>
+              </a:rPr>
+              <a:t>myTilemap.SetTileFlags</a:t>
+            </a:r>
+            <a:r>
+              <a:rPr lang="nl-NL" b="1" dirty="0">
+                <a:latin typeface="Courier New" panose="02070309020205020404" pitchFamily="49" charset="0"/>
+                <a:cs typeface="Courier New" panose="02070309020205020404" pitchFamily="49" charset="0"/>
+              </a:rPr>
+              <a:t>(</a:t>
+            </a:r>
+            <a:r>
+              <a:rPr lang="nl-NL" b="1" dirty="0" err="1">
+                <a:latin typeface="Courier New" panose="02070309020205020404" pitchFamily="49" charset="0"/>
+                <a:cs typeface="Courier New" panose="02070309020205020404" pitchFamily="49" charset="0"/>
+              </a:rPr>
+              <a:t>position</a:t>
+            </a:r>
+            <a:r>
+              <a:rPr lang="nl-NL" b="1" dirty="0">
+                <a:latin typeface="Courier New" panose="02070309020205020404" pitchFamily="49" charset="0"/>
+                <a:cs typeface="Courier New" panose="02070309020205020404" pitchFamily="49" charset="0"/>
+              </a:rPr>
+              <a:t>, </a:t>
+            </a:r>
+            <a:r>
+              <a:rPr lang="nl-NL" b="1" dirty="0" err="1">
+                <a:latin typeface="Courier New" panose="02070309020205020404" pitchFamily="49" charset="0"/>
+                <a:cs typeface="Courier New" panose="02070309020205020404" pitchFamily="49" charset="0"/>
+              </a:rPr>
+              <a:t>flags</a:t>
+            </a:r>
+            <a:r>
+              <a:rPr lang="nl-NL" b="1" dirty="0">
+                <a:latin typeface="Courier New" panose="02070309020205020404" pitchFamily="49" charset="0"/>
+                <a:cs typeface="Courier New" panose="02070309020205020404" pitchFamily="49" charset="0"/>
+              </a:rPr>
+              <a:t>);</a:t>
+            </a:r>
+          </a:p>
+        </p:txBody>
+      </p:sp>
+    </p:spTree>
+    <p:extLst>
+      <p:ext uri="{BB962C8B-B14F-4D97-AF65-F5344CB8AC3E}">
+        <p14:creationId xmlns:p14="http://schemas.microsoft.com/office/powerpoint/2010/main" val="1909848993"/>
+      </p:ext>
+    </p:extLst>
+  </p:cSld>
+  <p:clrMapOvr>
+    <a:masterClrMapping/>
+  </p:clrMapOvr>
+</p:sld>
+</file>
+
+<file path=ppt/slides/slide8.xml><?xml version="1.0" encoding="utf-8"?>
+<p:sld xmlns:a="http://schemas.openxmlformats.org/drawingml/2006/main" xmlns:r="http://schemas.openxmlformats.org/officeDocument/2006/relationships" xmlns:p="http://schemas.openxmlformats.org/presentationml/2006/main">
+  <p:cSld>
+    <p:spTree>
+      <p:nvGrpSpPr>
+        <p:cNvPr id="1" name=""/>
+        <p:cNvGrpSpPr/>
+        <p:nvPr/>
+      </p:nvGrpSpPr>
+      <p:grpSpPr>
+        <a:xfrm>
+          <a:off x="0" y="0"/>
+          <a:ext cx="0" cy="0"/>
+          <a:chOff x="0" y="0"/>
+          <a:chExt cx="0" cy="0"/>
+        </a:xfrm>
+      </p:grpSpPr>
+      <p:sp>
+        <p:nvSpPr>
+          <p:cNvPr id="2" name="Titel 1">
+            <a:extLst>
+              <a:ext uri="{FF2B5EF4-FFF2-40B4-BE49-F238E27FC236}">
+                <a16:creationId xmlns:a16="http://schemas.microsoft.com/office/drawing/2014/main" id="{013F1738-05B5-C3A3-AD12-B1394E9E3F7C}"/>
+              </a:ext>
+            </a:extLst>
+          </p:cNvPr>
+          <p:cNvSpPr>
+            <a:spLocks noGrp="1"/>
+          </p:cNvSpPr>
+          <p:nvPr>
+            <p:ph type="title"/>
+          </p:nvPr>
+        </p:nvSpPr>
+        <p:spPr/>
+        <p:txBody>
+          <a:bodyPr/>
+          <a:lstStyle/>
+          <a:p>
+            <a:r>
+              <a:rPr lang="nl-NL" b="1" dirty="0"/>
+              <a:t>Waar zijn die </a:t>
+            </a:r>
+            <a:r>
+              <a:rPr lang="nl-NL" b="1" dirty="0" err="1"/>
+              <a:t>flags</a:t>
+            </a:r>
+            <a:r>
+              <a:rPr lang="nl-NL" b="1" dirty="0"/>
+              <a:t> voor?</a:t>
+            </a:r>
+            <a:endParaRPr lang="nl-NL" dirty="0"/>
+          </a:p>
+        </p:txBody>
+      </p:sp>
+      <p:sp>
+        <p:nvSpPr>
+          <p:cNvPr id="3" name="Tijdelijke aanduiding voor inhoud 2">
+            <a:extLst>
+              <a:ext uri="{FF2B5EF4-FFF2-40B4-BE49-F238E27FC236}">
+                <a16:creationId xmlns:a16="http://schemas.microsoft.com/office/drawing/2014/main" id="{B4118650-E652-06A6-3890-FBAD76D8837D}"/>
+              </a:ext>
+            </a:extLst>
+          </p:cNvPr>
+          <p:cNvSpPr>
+            <a:spLocks noGrp="1"/>
+          </p:cNvSpPr>
+          <p:nvPr>
+            <p:ph idx="1"/>
+          </p:nvPr>
+        </p:nvSpPr>
+        <p:spPr/>
+        <p:txBody>
+          <a:bodyPr/>
+          <a:lstStyle/>
+          <a:p>
+            <a:r>
+              <a:rPr lang="nl-NL" dirty="0" err="1"/>
+              <a:t>Tile</a:t>
+            </a:r>
+            <a:r>
+              <a:rPr lang="nl-NL" dirty="0"/>
+              <a:t> </a:t>
+            </a:r>
+            <a:r>
+              <a:rPr lang="nl-NL" dirty="0" err="1"/>
+              <a:t>flags</a:t>
+            </a:r>
+            <a:r>
+              <a:rPr lang="nl-NL" dirty="0"/>
+              <a:t> bepalen hoe een </a:t>
+            </a:r>
+            <a:r>
+              <a:rPr lang="nl-NL" dirty="0" err="1"/>
+              <a:t>tile</a:t>
+            </a:r>
+            <a:r>
+              <a:rPr lang="nl-NL" dirty="0"/>
+              <a:t> zich gedraagt in de </a:t>
+            </a:r>
+            <a:r>
+              <a:rPr lang="nl-NL" dirty="0" err="1"/>
+              <a:t>Tilemap</a:t>
+            </a:r>
+            <a:r>
+              <a:rPr lang="nl-NL" dirty="0"/>
+              <a:t>. Bijvoorbeeld:</a:t>
+            </a:r>
+          </a:p>
+          <a:p>
+            <a:pPr lvl="1"/>
+            <a:r>
+              <a:rPr lang="nl-NL" dirty="0"/>
+              <a:t>Of de </a:t>
+            </a:r>
+            <a:r>
+              <a:rPr lang="nl-NL" dirty="0" err="1"/>
+              <a:t>tilekleur</a:t>
+            </a:r>
+            <a:r>
+              <a:rPr lang="nl-NL" dirty="0"/>
+              <a:t> aangepast mag worden </a:t>
+            </a:r>
+          </a:p>
+          <a:p>
+            <a:pPr lvl="1"/>
+            <a:r>
+              <a:rPr lang="nl-NL" dirty="0"/>
+              <a:t>Of de </a:t>
+            </a:r>
+            <a:r>
+              <a:rPr lang="nl-NL" dirty="0" err="1"/>
+              <a:t>transform</a:t>
+            </a:r>
+            <a:r>
+              <a:rPr lang="nl-NL" dirty="0"/>
+              <a:t> (rotatie/schaal) aangepast mag worden </a:t>
+            </a:r>
+          </a:p>
+          <a:p>
+            <a:pPr lvl="1"/>
+            <a:r>
+              <a:rPr lang="nl-NL" dirty="0"/>
+              <a:t>Of de </a:t>
+            </a:r>
+            <a:r>
+              <a:rPr lang="nl-NL" dirty="0" err="1"/>
+              <a:t>tile</a:t>
+            </a:r>
+            <a:r>
+              <a:rPr lang="nl-NL" dirty="0"/>
+              <a:t> </a:t>
+            </a:r>
+            <a:r>
+              <a:rPr lang="nl-NL" dirty="0" err="1"/>
+              <a:t>gelockt</a:t>
+            </a:r>
+            <a:r>
+              <a:rPr lang="nl-NL" dirty="0"/>
+              <a:t> is </a:t>
+            </a:r>
+          </a:p>
+          <a:p>
+            <a:pPr lvl="1"/>
+            <a:r>
+              <a:rPr lang="nl-NL" dirty="0"/>
+              <a:t>Of </a:t>
+            </a:r>
+            <a:r>
+              <a:rPr lang="nl-NL" dirty="0" err="1"/>
+              <a:t>Unity</a:t>
+            </a:r>
+            <a:r>
+              <a:rPr lang="nl-NL" dirty="0"/>
+              <a:t> automatisch data mag overschrijven </a:t>
+            </a:r>
+          </a:p>
+          <a:p>
+            <a:endParaRPr lang="nl-NL" dirty="0"/>
+          </a:p>
+          <a:p>
+            <a:r>
+              <a:rPr lang="nl-NL" dirty="0"/>
+              <a:t>De </a:t>
+            </a:r>
+            <a:r>
+              <a:rPr lang="nl-NL" dirty="0" err="1"/>
+              <a:t>flags</a:t>
+            </a:r>
+            <a:r>
+              <a:rPr lang="nl-NL" dirty="0"/>
+              <a:t> komen uit de </a:t>
+            </a:r>
+            <a:r>
+              <a:rPr lang="nl-NL" dirty="0" err="1"/>
+              <a:t>enum</a:t>
+            </a:r>
+            <a:r>
+              <a:rPr lang="nl-NL" dirty="0"/>
+              <a:t> </a:t>
+            </a:r>
+            <a:r>
+              <a:rPr lang="nl-NL" dirty="0" err="1"/>
+              <a:t>TileFlags</a:t>
+            </a:r>
+            <a:r>
+              <a:rPr lang="nl-NL" dirty="0"/>
+              <a:t>.</a:t>
+            </a:r>
+          </a:p>
+          <a:p>
+            <a:endParaRPr lang="nl-NL" dirty="0"/>
+          </a:p>
+        </p:txBody>
+      </p:sp>
+    </p:spTree>
+    <p:extLst>
+      <p:ext uri="{BB962C8B-B14F-4D97-AF65-F5344CB8AC3E}">
+        <p14:creationId xmlns:p14="http://schemas.microsoft.com/office/powerpoint/2010/main" val="3301321409"/>
+      </p:ext>
+    </p:extLst>
+  </p:cSld>
+  <p:clrMapOvr>
+    <a:masterClrMapping/>
+  </p:clrMapOvr>
+</p:sld>
+</file>
+
+<file path=ppt/slides/slide9.xml><?xml version="1.0" encoding="utf-8"?>
+<p:sld xmlns:a="http://schemas.openxmlformats.org/drawingml/2006/main" xmlns:r="http://schemas.openxmlformats.org/officeDocument/2006/relationships" xmlns:p="http://schemas.openxmlformats.org/presentationml/2006/main">
+  <p:cSld>
+    <p:spTree>
+      <p:nvGrpSpPr>
+        <p:cNvPr id="1" name=""/>
+        <p:cNvGrpSpPr/>
+        <p:nvPr/>
+      </p:nvGrpSpPr>
+      <p:grpSpPr>
+        <a:xfrm>
+          <a:off x="0" y="0"/>
+          <a:ext cx="0" cy="0"/>
+          <a:chOff x="0" y="0"/>
+          <a:chExt cx="0" cy="0"/>
+        </a:xfrm>
+      </p:grpSpPr>
+      <p:sp>
+        <p:nvSpPr>
+          <p:cNvPr id="2" name="Titel 1">
+            <a:extLst>
+              <a:ext uri="{FF2B5EF4-FFF2-40B4-BE49-F238E27FC236}">
+                <a16:creationId xmlns:a16="http://schemas.microsoft.com/office/drawing/2014/main" id="{6D0DC205-209E-704D-F0B7-D67A851EFE86}"/>
+              </a:ext>
+            </a:extLst>
+          </p:cNvPr>
+          <p:cNvSpPr>
+            <a:spLocks noGrp="1"/>
+          </p:cNvSpPr>
+          <p:nvPr>
+            <p:ph type="title"/>
+          </p:nvPr>
+        </p:nvSpPr>
+        <p:spPr/>
+        <p:txBody>
+          <a:bodyPr/>
+          <a:lstStyle/>
+          <a:p>
+            <a:r>
+              <a:rPr lang="nl-NL" dirty="0" err="1"/>
+              <a:t>Veelgebruiktewaarden</a:t>
+            </a:r>
+            <a:r>
+              <a:rPr lang="nl-NL" dirty="0"/>
+              <a:t> voor </a:t>
+            </a:r>
+            <a:r>
+              <a:rPr lang="nl-NL" dirty="0" err="1"/>
+              <a:t>TileFlags</a:t>
+            </a:r>
+            <a:r>
+              <a:rPr lang="nl-NL" dirty="0"/>
+              <a:t>:</a:t>
+            </a:r>
+          </a:p>
+        </p:txBody>
+      </p:sp>
+      <p:sp>
+        <p:nvSpPr>
+          <p:cNvPr id="3" name="Tijdelijke aanduiding voor inhoud 2">
+            <a:extLst>
+              <a:ext uri="{FF2B5EF4-FFF2-40B4-BE49-F238E27FC236}">
+                <a16:creationId xmlns:a16="http://schemas.microsoft.com/office/drawing/2014/main" id="{BFD9C73C-7807-59D9-D2EB-27C2E097E579}"/>
+              </a:ext>
+            </a:extLst>
+          </p:cNvPr>
+          <p:cNvSpPr>
+            <a:spLocks noGrp="1"/>
+          </p:cNvSpPr>
+          <p:nvPr>
+            <p:ph idx="1"/>
+          </p:nvPr>
+        </p:nvSpPr>
+        <p:spPr>
+          <a:xfrm>
+            <a:off x="838200" y="1825625"/>
+            <a:ext cx="10515600" cy="1724971"/>
+          </a:xfrm>
+          <a:solidFill>
+            <a:schemeClr val="bg1">
+              <a:lumMod val="85000"/>
+            </a:schemeClr>
+          </a:solidFill>
+        </p:spPr>
+        <p:txBody>
+          <a:bodyPr/>
+          <a:lstStyle/>
+          <a:p>
+            <a:r>
+              <a:rPr lang="nl-NL" b="1" dirty="0" err="1">
+                <a:latin typeface="Courier New" panose="02070309020205020404" pitchFamily="49" charset="0"/>
+                <a:cs typeface="Courier New" panose="02070309020205020404" pitchFamily="49" charset="0"/>
+              </a:rPr>
+              <a:t>TileFlags</a:t>
+            </a:r>
+            <a:r>
+              <a:rPr lang="nl-NL" dirty="0" err="1">
+                <a:latin typeface="Courier New" panose="02070309020205020404" pitchFamily="49" charset="0"/>
+                <a:cs typeface="Courier New" panose="02070309020205020404" pitchFamily="49" charset="0"/>
+              </a:rPr>
+              <a:t>.None</a:t>
+            </a:r>
+            <a:br>
+              <a:rPr lang="nl-NL" dirty="0">
+                <a:latin typeface="Courier New" panose="02070309020205020404" pitchFamily="49" charset="0"/>
+                <a:cs typeface="Courier New" panose="02070309020205020404" pitchFamily="49" charset="0"/>
+              </a:rPr>
+            </a:br>
+            <a:r>
+              <a:rPr lang="nl-NL" b="1" dirty="0" err="1">
+                <a:latin typeface="Courier New" panose="02070309020205020404" pitchFamily="49" charset="0"/>
+                <a:cs typeface="Courier New" panose="02070309020205020404" pitchFamily="49" charset="0"/>
+              </a:rPr>
+              <a:t>TileFlags</a:t>
+            </a:r>
+            <a:r>
+              <a:rPr lang="nl-NL" dirty="0" err="1">
+                <a:latin typeface="Courier New" panose="02070309020205020404" pitchFamily="49" charset="0"/>
+                <a:cs typeface="Courier New" panose="02070309020205020404" pitchFamily="49" charset="0"/>
+              </a:rPr>
+              <a:t>.LockColor</a:t>
+            </a:r>
+            <a:br>
+              <a:rPr lang="nl-NL" dirty="0">
+                <a:latin typeface="Courier New" panose="02070309020205020404" pitchFamily="49" charset="0"/>
+                <a:cs typeface="Courier New" panose="02070309020205020404" pitchFamily="49" charset="0"/>
+              </a:rPr>
+            </a:br>
+            <a:r>
+              <a:rPr lang="nl-NL" b="1" dirty="0" err="1">
+                <a:latin typeface="Courier New" panose="02070309020205020404" pitchFamily="49" charset="0"/>
+                <a:cs typeface="Courier New" panose="02070309020205020404" pitchFamily="49" charset="0"/>
+              </a:rPr>
+              <a:t>TileFlags</a:t>
+            </a:r>
+            <a:r>
+              <a:rPr lang="nl-NL" dirty="0" err="1">
+                <a:latin typeface="Courier New" panose="02070309020205020404" pitchFamily="49" charset="0"/>
+                <a:cs typeface="Courier New" panose="02070309020205020404" pitchFamily="49" charset="0"/>
+              </a:rPr>
+              <a:t>.LockTransform</a:t>
+            </a:r>
+            <a:br>
+              <a:rPr lang="nl-NL" dirty="0">
+                <a:latin typeface="Courier New" panose="02070309020205020404" pitchFamily="49" charset="0"/>
+                <a:cs typeface="Courier New" panose="02070309020205020404" pitchFamily="49" charset="0"/>
+              </a:rPr>
+            </a:br>
+            <a:r>
+              <a:rPr lang="nl-NL" b="1" dirty="0" err="1">
+                <a:latin typeface="Courier New" panose="02070309020205020404" pitchFamily="49" charset="0"/>
+                <a:cs typeface="Courier New" panose="02070309020205020404" pitchFamily="49" charset="0"/>
+              </a:rPr>
+              <a:t>TileFlags</a:t>
+            </a:r>
+            <a:r>
+              <a:rPr lang="nl-NL" dirty="0" err="1">
+                <a:latin typeface="Courier New" panose="02070309020205020404" pitchFamily="49" charset="0"/>
+                <a:cs typeface="Courier New" panose="02070309020205020404" pitchFamily="49" charset="0"/>
+              </a:rPr>
+              <a:t>.InstantiateGameObjectRuntimeOnly</a:t>
+            </a:r>
+            <a:endParaRPr lang="nl-NL" dirty="0">
+              <a:latin typeface="Courier New" panose="02070309020205020404" pitchFamily="49" charset="0"/>
+              <a:cs typeface="Courier New" panose="02070309020205020404" pitchFamily="49" charset="0"/>
+            </a:endParaRPr>
+          </a:p>
+        </p:txBody>
+      </p:sp>
+    </p:spTree>
+    <p:extLst>
+      <p:ext uri="{BB962C8B-B14F-4D97-AF65-F5344CB8AC3E}">
+        <p14:creationId xmlns:p14="http://schemas.microsoft.com/office/powerpoint/2010/main" val="753931195"/>
       </p:ext>
     </p:extLst>
   </p:cSld>
@@ -7208,23 +8254,6 @@
 </file>
 
 <file path=customXml/item1.xml><?xml version="1.0" encoding="utf-8"?>
-<p:properties xmlns:p="http://schemas.microsoft.com/office/2006/metadata/properties" xmlns:xsi="http://www.w3.org/2001/XMLSchema-instance" xmlns:pc="http://schemas.microsoft.com/office/infopath/2007/PartnerControls">
-  <documentManagement>
-    <_activity xmlns="0ea95f8c-d148-44ae-916f-e4fae07bb092" xsi:nil="true"/>
-  </documentManagement>
-</p:properties>
-</file>
-
-<file path=customXml/item2.xml><?xml version="1.0" encoding="utf-8"?>
-<?mso-contentType ?>
-<FormTemplates xmlns="http://schemas.microsoft.com/sharepoint/v3/contenttype/forms">
-  <Display>DocumentLibraryForm</Display>
-  <Edit>DocumentLibraryForm</Edit>
-  <New>DocumentLibraryForm</New>
-</FormTemplates>
-</file>
-
-<file path=customXml/item3.xml><?xml version="1.0" encoding="utf-8"?>
 <ct:contentTypeSchema xmlns:ct="http://schemas.microsoft.com/office/2006/metadata/contentType" xmlns:ma="http://schemas.microsoft.com/office/2006/metadata/properties/metaAttributes" ct:_="" ma:_="" ma:contentTypeName="Document" ma:contentTypeID="0x0101003D382338EF70044D9C062BABC4AAC4F2" ma:contentTypeVersion="18" ma:contentTypeDescription="Een nieuw document maken." ma:contentTypeScope="" ma:versionID="1e53bdee3ced94a1d85284f686879e7d">
   <xsd:schema xmlns:xsd="http://www.w3.org/2001/XMLSchema" xmlns:xs="http://www.w3.org/2001/XMLSchema" xmlns:p="http://schemas.microsoft.com/office/2006/metadata/properties" xmlns:ns3="07db6276-f26f-4be5-81e0-f9ee6746fca8" xmlns:ns4="0ea95f8c-d148-44ae-916f-e4fae07bb092" targetNamespace="http://schemas.microsoft.com/office/2006/metadata/properties" ma:root="true" ma:fieldsID="4f339d748e41cee103f7abe631a1b5e5" ns3:_="" ns4:_="">
     <xsd:import namespace="07db6276-f26f-4be5-81e0-f9ee6746fca8"/>
@@ -7477,7 +8506,43 @@
 </ct:contentTypeSchema>
 </file>
 
+<file path=customXml/item2.xml><?xml version="1.0" encoding="utf-8"?>
+<p:properties xmlns:p="http://schemas.microsoft.com/office/2006/metadata/properties" xmlns:xsi="http://www.w3.org/2001/XMLSchema-instance" xmlns:pc="http://schemas.microsoft.com/office/infopath/2007/PartnerControls">
+  <documentManagement>
+    <_activity xmlns="0ea95f8c-d148-44ae-916f-e4fae07bb092" xsi:nil="true"/>
+  </documentManagement>
+</p:properties>
+</file>
+
+<file path=customXml/item3.xml><?xml version="1.0" encoding="utf-8"?>
+<?mso-contentType ?>
+<FormTemplates xmlns="http://schemas.microsoft.com/sharepoint/v3/contenttype/forms">
+  <Display>DocumentLibraryForm</Display>
+  <Edit>DocumentLibraryForm</Edit>
+  <New>DocumentLibraryForm</New>
+</FormTemplates>
+</file>
+
 <file path=customXml/itemProps1.xml><?xml version="1.0" encoding="utf-8"?>
+<ds:datastoreItem xmlns:ds="http://schemas.openxmlformats.org/officeDocument/2006/customXml" ds:itemID="{17E89673-DD47-4BE7-84CC-D4AA7D41630F}">
+  <ds:schemaRefs>
+    <ds:schemaRef ds:uri="http://schemas.microsoft.com/office/2006/metadata/contentType"/>
+    <ds:schemaRef ds:uri="http://schemas.microsoft.com/office/2006/metadata/properties/metaAttributes"/>
+    <ds:schemaRef ds:uri="http://www.w3.org/2001/XMLSchema"/>
+    <ds:schemaRef ds:uri="http://schemas.microsoft.com/office/2006/metadata/properties"/>
+    <ds:schemaRef ds:uri="07db6276-f26f-4be5-81e0-f9ee6746fca8"/>
+    <ds:schemaRef ds:uri="0ea95f8c-d148-44ae-916f-e4fae07bb092"/>
+    <ds:schemaRef ds:uri="http://schemas.microsoft.com/office/2006/documentManagement/types"/>
+    <ds:schemaRef ds:uri="http://schemas.microsoft.com/office/infopath/2007/PartnerControls"/>
+    <ds:schemaRef ds:uri="http://schemas.openxmlformats.org/package/2006/metadata/core-properties"/>
+    <ds:schemaRef ds:uri="http://purl.org/dc/elements/1.1/"/>
+    <ds:schemaRef ds:uri="http://purl.org/dc/terms/"/>
+    <ds:schemaRef ds:uri="http://schemas.microsoft.com/internal/obd"/>
+  </ds:schemaRefs>
+</ds:datastoreItem>
+</file>
+
+<file path=customXml/itemProps2.xml><?xml version="1.0" encoding="utf-8"?>
 <ds:datastoreItem xmlns:ds="http://schemas.openxmlformats.org/officeDocument/2006/customXml" ds:itemID="{4AE02E84-4242-4C95-906B-10487FB4E1EE}">
   <ds:schemaRefs>
     <ds:schemaRef ds:uri="http://purl.org/dc/elements/1.1/"/>
@@ -7494,29 +8559,10 @@
 </ds:datastoreItem>
 </file>
 
-<file path=customXml/itemProps2.xml><?xml version="1.0" encoding="utf-8"?>
+<file path=customXml/itemProps3.xml><?xml version="1.0" encoding="utf-8"?>
 <ds:datastoreItem xmlns:ds="http://schemas.openxmlformats.org/officeDocument/2006/customXml" ds:itemID="{FE951165-B379-4FBD-9FD8-D14F0F4D64C9}">
   <ds:schemaRefs>
     <ds:schemaRef ds:uri="http://schemas.microsoft.com/sharepoint/v3/contenttype/forms"/>
   </ds:schemaRefs>
 </ds:datastoreItem>
-</file>
-
-<file path=customXml/itemProps3.xml><?xml version="1.0" encoding="utf-8"?>
-<ds:datastoreItem xmlns:ds="http://schemas.openxmlformats.org/officeDocument/2006/customXml" ds:itemID="{17E89673-DD47-4BE7-84CC-D4AA7D41630F}">
-  <ds:schemaRefs>
-    <ds:schemaRef ds:uri="http://schemas.microsoft.com/office/2006/metadata/contentType"/>
-    <ds:schemaRef ds:uri="http://schemas.microsoft.com/office/2006/metadata/properties/metaAttributes"/>
-    <ds:schemaRef ds:uri="http://www.w3.org/2001/XMLSchema"/>
-    <ds:schemaRef ds:uri="http://schemas.microsoft.com/office/2006/metadata/properties"/>
-    <ds:schemaRef ds:uri="07db6276-f26f-4be5-81e0-f9ee6746fca8"/>
-    <ds:schemaRef ds:uri="0ea95f8c-d148-44ae-916f-e4fae07bb092"/>
-    <ds:schemaRef ds:uri="http://schemas.microsoft.com/office/2006/documentManagement/types"/>
-    <ds:schemaRef ds:uri="http://schemas.microsoft.com/office/infopath/2007/PartnerControls"/>
-    <ds:schemaRef ds:uri="http://schemas.openxmlformats.org/package/2006/metadata/core-properties"/>
-    <ds:schemaRef ds:uri="http://purl.org/dc/elements/1.1/"/>
-    <ds:schemaRef ds:uri="http://purl.org/dc/terms/"/>
-    <ds:schemaRef ds:uri="http://schemas.microsoft.com/internal/obd"/>
-  </ds:schemaRefs>
-</ds:datastoreItem>
 </file>
--- a/M4/GDV_2D_Gym/les2/gdv-2d-gym-les2.pptx
+++ b/M4/GDV_2D_Gym/les2/gdv-2d-gym-les2.pptx
@@ -10,11 +10,11 @@
     <p:sldId id="260" r:id="rId7"/>
     <p:sldId id="267" r:id="rId8"/>
     <p:sldId id="261" r:id="rId9"/>
-    <p:sldId id="269" r:id="rId10"/>
-    <p:sldId id="272" r:id="rId11"/>
-    <p:sldId id="273" r:id="rId12"/>
-    <p:sldId id="274" r:id="rId13"/>
-    <p:sldId id="275" r:id="rId14"/>
+    <p:sldId id="275" r:id="rId10"/>
+    <p:sldId id="269" r:id="rId11"/>
+    <p:sldId id="272" r:id="rId12"/>
+    <p:sldId id="273" r:id="rId13"/>
+    <p:sldId id="274" r:id="rId14"/>
     <p:sldId id="276" r:id="rId15"/>
   </p:sldIdLst>
   <p:sldSz cx="12192000" cy="6858000"/>
@@ -271,7 +271,7 @@
           <a:p>
             <a:fld id="{7F6255D4-ABB5-456D-9970-B21DD0297007}" type="datetimeFigureOut">
               <a:rPr lang="en-US" smtClean="0"/>
-              <a:t>5/12/2026</a:t>
+              <a:t>5/13/2026</a:t>
             </a:fld>
             <a:endParaRPr lang="en-US"/>
           </a:p>
@@ -471,7 +471,7 @@
           <a:p>
             <a:fld id="{7F6255D4-ABB5-456D-9970-B21DD0297007}" type="datetimeFigureOut">
               <a:rPr lang="en-US" smtClean="0"/>
-              <a:t>5/12/2026</a:t>
+              <a:t>5/13/2026</a:t>
             </a:fld>
             <a:endParaRPr lang="en-US"/>
           </a:p>
@@ -681,7 +681,7 @@
           <a:p>
             <a:fld id="{7F6255D4-ABB5-456D-9970-B21DD0297007}" type="datetimeFigureOut">
               <a:rPr lang="en-US" smtClean="0"/>
-              <a:t>5/12/2026</a:t>
+              <a:t>5/13/2026</a:t>
             </a:fld>
             <a:endParaRPr lang="en-US"/>
           </a:p>
@@ -881,7 +881,7 @@
           <a:p>
             <a:fld id="{7F6255D4-ABB5-456D-9970-B21DD0297007}" type="datetimeFigureOut">
               <a:rPr lang="en-US" smtClean="0"/>
-              <a:t>5/12/2026</a:t>
+              <a:t>5/13/2026</a:t>
             </a:fld>
             <a:endParaRPr lang="en-US"/>
           </a:p>
@@ -1157,7 +1157,7 @@
           <a:p>
             <a:fld id="{7F6255D4-ABB5-456D-9970-B21DD0297007}" type="datetimeFigureOut">
               <a:rPr lang="en-US" smtClean="0"/>
-              <a:t>5/12/2026</a:t>
+              <a:t>5/13/2026</a:t>
             </a:fld>
             <a:endParaRPr lang="en-US"/>
           </a:p>
@@ -1425,7 +1425,7 @@
           <a:p>
             <a:fld id="{7F6255D4-ABB5-456D-9970-B21DD0297007}" type="datetimeFigureOut">
               <a:rPr lang="en-US" smtClean="0"/>
-              <a:t>5/12/2026</a:t>
+              <a:t>5/13/2026</a:t>
             </a:fld>
             <a:endParaRPr lang="en-US"/>
           </a:p>
@@ -1840,7 +1840,7 @@
           <a:p>
             <a:fld id="{7F6255D4-ABB5-456D-9970-B21DD0297007}" type="datetimeFigureOut">
               <a:rPr lang="en-US" smtClean="0"/>
-              <a:t>5/12/2026</a:t>
+              <a:t>5/13/2026</a:t>
             </a:fld>
             <a:endParaRPr lang="en-US"/>
           </a:p>
@@ -1982,7 +1982,7 @@
           <a:p>
             <a:fld id="{7F6255D4-ABB5-456D-9970-B21DD0297007}" type="datetimeFigureOut">
               <a:rPr lang="en-US" smtClean="0"/>
-              <a:t>5/12/2026</a:t>
+              <a:t>5/13/2026</a:t>
             </a:fld>
             <a:endParaRPr lang="en-US"/>
           </a:p>
@@ -2095,7 +2095,7 @@
           <a:p>
             <a:fld id="{7F6255D4-ABB5-456D-9970-B21DD0297007}" type="datetimeFigureOut">
               <a:rPr lang="en-US" smtClean="0"/>
-              <a:t>5/12/2026</a:t>
+              <a:t>5/13/2026</a:t>
             </a:fld>
             <a:endParaRPr lang="en-US"/>
           </a:p>
@@ -2408,7 +2408,7 @@
           <a:p>
             <a:fld id="{7F6255D4-ABB5-456D-9970-B21DD0297007}" type="datetimeFigureOut">
               <a:rPr lang="en-US" smtClean="0"/>
-              <a:t>5/12/2026</a:t>
+              <a:t>5/13/2026</a:t>
             </a:fld>
             <a:endParaRPr lang="en-US"/>
           </a:p>
@@ -2697,7 +2697,7 @@
           <a:p>
             <a:fld id="{7F6255D4-ABB5-456D-9970-B21DD0297007}" type="datetimeFigureOut">
               <a:rPr lang="en-US" smtClean="0"/>
-              <a:t>5/12/2026</a:t>
+              <a:t>5/13/2026</a:t>
             </a:fld>
             <a:endParaRPr lang="en-US"/>
           </a:p>
@@ -2940,7 +2940,7 @@
           <a:p>
             <a:fld id="{7F6255D4-ABB5-456D-9970-B21DD0297007}" type="datetimeFigureOut">
               <a:rPr lang="en-US" smtClean="0"/>
-              <a:t>5/12/2026</a:t>
+              <a:t>5/13/2026</a:t>
             </a:fld>
             <a:endParaRPr lang="en-US"/>
           </a:p>
@@ -4270,7 +4270,7 @@
           <p:cNvPr id="2" name="Titel 1">
             <a:extLst>
               <a:ext uri="{FF2B5EF4-FFF2-40B4-BE49-F238E27FC236}">
-                <a16:creationId xmlns:a16="http://schemas.microsoft.com/office/drawing/2014/main" id="{E56AF117-C362-3968-CCA3-017E428D1388}"/>
+                <a16:creationId xmlns:a16="http://schemas.microsoft.com/office/drawing/2014/main" id="{6D0DC205-209E-704D-F0B7-D67A851EFE86}"/>
               </a:ext>
             </a:extLst>
           </p:cNvPr>
@@ -4287,38 +4287,21 @@
           <a:lstStyle/>
           <a:p>
             <a:r>
-              <a:rPr lang="en-US" dirty="0" err="1"/>
-              <a:t>Verander</a:t>
-            </a:r>
-            <a:r>
-              <a:rPr lang="en-US" dirty="0"/>
-              <a:t> </a:t>
-            </a:r>
-            <a:r>
-              <a:rPr lang="en-US" dirty="0" err="1"/>
-              <a:t>een</a:t>
-            </a:r>
-            <a:r>
-              <a:rPr lang="en-US" dirty="0"/>
-              <a:t> </a:t>
-            </a:r>
-            <a:r>
-              <a:rPr lang="en-US" dirty="0" err="1"/>
-              <a:t>kleur</a:t>
-            </a:r>
-            <a:r>
-              <a:rPr lang="en-US" dirty="0"/>
-              <a:t> van </a:t>
-            </a:r>
-            <a:r>
-              <a:rPr lang="en-US" dirty="0" err="1"/>
-              <a:t>een</a:t>
-            </a:r>
-            <a:r>
-              <a:rPr lang="en-US" dirty="0"/>
-              <a:t> Tile</a:t>
-            </a:r>
-            <a:endParaRPr lang="nl-NL" dirty="0"/>
+              <a:rPr lang="nl-NL" dirty="0" err="1"/>
+              <a:t>Veelgebruiktewaarden</a:t>
+            </a:r>
+            <a:r>
+              <a:rPr lang="nl-NL" dirty="0"/>
+              <a:t> voor </a:t>
+            </a:r>
+            <a:r>
+              <a:rPr lang="nl-NL" dirty="0" err="1"/>
+              <a:t>TileFlags</a:t>
+            </a:r>
+            <a:r>
+              <a:rPr lang="nl-NL" dirty="0"/>
+              <a:t>:</a:t>
+            </a:r>
           </a:p>
         </p:txBody>
       </p:sp>
@@ -4327,7 +4310,7 @@
           <p:cNvPr id="3" name="Tijdelijke aanduiding voor inhoud 2">
             <a:extLst>
               <a:ext uri="{FF2B5EF4-FFF2-40B4-BE49-F238E27FC236}">
-                <a16:creationId xmlns:a16="http://schemas.microsoft.com/office/drawing/2014/main" id="{9DAEAE60-D897-7F9D-CC84-FE0405E83947}"/>
+                <a16:creationId xmlns:a16="http://schemas.microsoft.com/office/drawing/2014/main" id="{BFD9C73C-7807-59D9-D2EB-27C2E097E579}"/>
               </a:ext>
             </a:extLst>
           </p:cNvPr>
@@ -4341,7 +4324,7 @@
         <p:spPr>
           <a:xfrm>
             <a:off x="838200" y="1825625"/>
-            <a:ext cx="10515600" cy="956486"/>
+            <a:ext cx="10515600" cy="1724971"/>
           </a:xfrm>
           <a:solidFill>
             <a:schemeClr val="bg1">
@@ -4353,43 +4336,19 @@
           <a:bodyPr/>
           <a:lstStyle/>
           <a:p>
-            <a:pPr marL="0" indent="0">
-              <a:buNone/>
-            </a:pPr>
+            <a:r>
+              <a:rPr lang="nl-NL" b="1" dirty="0" err="1">
+                <a:latin typeface="Courier New" panose="02070309020205020404" pitchFamily="49" charset="0"/>
+                <a:cs typeface="Courier New" panose="02070309020205020404" pitchFamily="49" charset="0"/>
+              </a:rPr>
+              <a:t>TileFlags</a:t>
+            </a:r>
             <a:r>
               <a:rPr lang="nl-NL" dirty="0" err="1">
                 <a:latin typeface="Courier New" panose="02070309020205020404" pitchFamily="49" charset="0"/>
                 <a:cs typeface="Courier New" panose="02070309020205020404" pitchFamily="49" charset="0"/>
               </a:rPr>
-              <a:t>tilemap.</a:t>
-            </a:r>
-            <a:r>
-              <a:rPr lang="nl-NL" b="1" dirty="0" err="1">
-                <a:latin typeface="Courier New" panose="02070309020205020404" pitchFamily="49" charset="0"/>
-                <a:cs typeface="Courier New" panose="02070309020205020404" pitchFamily="49" charset="0"/>
-              </a:rPr>
-              <a:t>SetTileFlags</a:t>
-            </a:r>
-            <a:r>
-              <a:rPr lang="nl-NL" dirty="0">
-                <a:latin typeface="Courier New" panose="02070309020205020404" pitchFamily="49" charset="0"/>
-                <a:cs typeface="Courier New" panose="02070309020205020404" pitchFamily="49" charset="0"/>
-              </a:rPr>
-              <a:t>(pos, </a:t>
-            </a:r>
-            <a:r>
-              <a:rPr lang="nl-NL" dirty="0" err="1">
-                <a:latin typeface="Courier New" panose="02070309020205020404" pitchFamily="49" charset="0"/>
-                <a:cs typeface="Courier New" panose="02070309020205020404" pitchFamily="49" charset="0"/>
-              </a:rPr>
-              <a:t>TileFlags.None</a:t>
-            </a:r>
-            <a:r>
-              <a:rPr lang="nl-NL" dirty="0">
-                <a:latin typeface="Courier New" panose="02070309020205020404" pitchFamily="49" charset="0"/>
-                <a:cs typeface="Courier New" panose="02070309020205020404" pitchFamily="49" charset="0"/>
-              </a:rPr>
-              <a:t>);</a:t>
+              <a:t>.None</a:t>
             </a:r>
             <a:br>
               <a:rPr lang="nl-NL" dirty="0">
@@ -4398,50 +4357,70 @@
               </a:rPr>
             </a:br>
             <a:r>
+              <a:rPr lang="nl-NL" b="1" dirty="0" err="1">
+                <a:latin typeface="Courier New" panose="02070309020205020404" pitchFamily="49" charset="0"/>
+                <a:cs typeface="Courier New" panose="02070309020205020404" pitchFamily="49" charset="0"/>
+              </a:rPr>
+              <a:t>TileFlags</a:t>
+            </a:r>
+            <a:r>
               <a:rPr lang="nl-NL" dirty="0" err="1">
                 <a:latin typeface="Courier New" panose="02070309020205020404" pitchFamily="49" charset="0"/>
                 <a:cs typeface="Courier New" panose="02070309020205020404" pitchFamily="49" charset="0"/>
               </a:rPr>
-              <a:t>tilemap.</a:t>
-            </a:r>
+              <a:t>.LockColor</a:t>
+            </a:r>
+            <a:br>
+              <a:rPr lang="nl-NL" dirty="0">
+                <a:latin typeface="Courier New" panose="02070309020205020404" pitchFamily="49" charset="0"/>
+                <a:cs typeface="Courier New" panose="02070309020205020404" pitchFamily="49" charset="0"/>
+              </a:rPr>
+            </a:br>
             <a:r>
               <a:rPr lang="nl-NL" b="1" dirty="0" err="1">
                 <a:latin typeface="Courier New" panose="02070309020205020404" pitchFamily="49" charset="0"/>
                 <a:cs typeface="Courier New" panose="02070309020205020404" pitchFamily="49" charset="0"/>
               </a:rPr>
-              <a:t>SetColor</a:t>
-            </a:r>
-            <a:r>
+              <a:t>TileFlags</a:t>
+            </a:r>
+            <a:r>
+              <a:rPr lang="nl-NL" dirty="0" err="1">
+                <a:latin typeface="Courier New" panose="02070309020205020404" pitchFamily="49" charset="0"/>
+                <a:cs typeface="Courier New" panose="02070309020205020404" pitchFamily="49" charset="0"/>
+              </a:rPr>
+              <a:t>.LockTransform</a:t>
+            </a:r>
+            <a:br>
               <a:rPr lang="nl-NL" dirty="0">
                 <a:latin typeface="Courier New" panose="02070309020205020404" pitchFamily="49" charset="0"/>
                 <a:cs typeface="Courier New" panose="02070309020205020404" pitchFamily="49" charset="0"/>
               </a:rPr>
-              <a:t>(pos, </a:t>
+            </a:br>
+            <a:r>
+              <a:rPr lang="nl-NL" b="1" dirty="0" err="1">
+                <a:latin typeface="Courier New" panose="02070309020205020404" pitchFamily="49" charset="0"/>
+                <a:cs typeface="Courier New" panose="02070309020205020404" pitchFamily="49" charset="0"/>
+              </a:rPr>
+              <a:t>TileFlags</a:t>
             </a:r>
             <a:r>
               <a:rPr lang="nl-NL" dirty="0" err="1">
                 <a:latin typeface="Courier New" panose="02070309020205020404" pitchFamily="49" charset="0"/>
                 <a:cs typeface="Courier New" panose="02070309020205020404" pitchFamily="49" charset="0"/>
               </a:rPr>
-              <a:t>Color.red</a:t>
-            </a:r>
-            <a:r>
-              <a:rPr lang="nl-NL" dirty="0">
-                <a:latin typeface="Courier New" panose="02070309020205020404" pitchFamily="49" charset="0"/>
-                <a:cs typeface="Courier New" panose="02070309020205020404" pitchFamily="49" charset="0"/>
-              </a:rPr>
-              <a:t>);</a:t>
-            </a:r>
-          </a:p>
-          <a:p>
-            <a:endParaRPr lang="nl-NL" dirty="0"/>
+              <a:t>.InstantiateGameObjectRuntimeOnly</a:t>
+            </a:r>
+            <a:endParaRPr lang="nl-NL" dirty="0">
+              <a:latin typeface="Courier New" panose="02070309020205020404" pitchFamily="49" charset="0"/>
+              <a:cs typeface="Courier New" panose="02070309020205020404" pitchFamily="49" charset="0"/>
+            </a:endParaRPr>
           </a:p>
         </p:txBody>
       </p:sp>
     </p:spTree>
     <p:extLst>
       <p:ext uri="{BB962C8B-B14F-4D97-AF65-F5344CB8AC3E}">
-        <p14:creationId xmlns:p14="http://schemas.microsoft.com/office/powerpoint/2010/main" val="3858322853"/>
+        <p14:creationId xmlns:p14="http://schemas.microsoft.com/office/powerpoint/2010/main" val="753931195"/>
       </p:ext>
     </p:extLst>
   </p:cSld>
@@ -5194,6 +5173,209 @@
           <p:cNvPr id="2" name="Titel 1">
             <a:extLst>
               <a:ext uri="{FF2B5EF4-FFF2-40B4-BE49-F238E27FC236}">
+                <a16:creationId xmlns:a16="http://schemas.microsoft.com/office/drawing/2014/main" id="{E56AF117-C362-3968-CCA3-017E428D1388}"/>
+              </a:ext>
+            </a:extLst>
+          </p:cNvPr>
+          <p:cNvSpPr>
+            <a:spLocks noGrp="1"/>
+          </p:cNvSpPr>
+          <p:nvPr>
+            <p:ph type="title"/>
+          </p:nvPr>
+        </p:nvSpPr>
+        <p:spPr/>
+        <p:txBody>
+          <a:bodyPr/>
+          <a:lstStyle/>
+          <a:p>
+            <a:r>
+              <a:rPr lang="en-US" dirty="0" err="1"/>
+              <a:t>Verander</a:t>
+            </a:r>
+            <a:r>
+              <a:rPr lang="en-US" dirty="0"/>
+              <a:t> </a:t>
+            </a:r>
+            <a:r>
+              <a:rPr lang="en-US" dirty="0" err="1"/>
+              <a:t>een</a:t>
+            </a:r>
+            <a:r>
+              <a:rPr lang="en-US" dirty="0"/>
+              <a:t> </a:t>
+            </a:r>
+            <a:r>
+              <a:rPr lang="en-US" dirty="0" err="1"/>
+              <a:t>kleur</a:t>
+            </a:r>
+            <a:r>
+              <a:rPr lang="en-US" dirty="0"/>
+              <a:t> van </a:t>
+            </a:r>
+            <a:r>
+              <a:rPr lang="en-US" dirty="0" err="1"/>
+              <a:t>een</a:t>
+            </a:r>
+            <a:r>
+              <a:rPr lang="en-US" dirty="0"/>
+              <a:t> Tile</a:t>
+            </a:r>
+            <a:endParaRPr lang="nl-NL" dirty="0"/>
+          </a:p>
+        </p:txBody>
+      </p:sp>
+      <p:sp>
+        <p:nvSpPr>
+          <p:cNvPr id="3" name="Tijdelijke aanduiding voor inhoud 2">
+            <a:extLst>
+              <a:ext uri="{FF2B5EF4-FFF2-40B4-BE49-F238E27FC236}">
+                <a16:creationId xmlns:a16="http://schemas.microsoft.com/office/drawing/2014/main" id="{9DAEAE60-D897-7F9D-CC84-FE0405E83947}"/>
+              </a:ext>
+            </a:extLst>
+          </p:cNvPr>
+          <p:cNvSpPr>
+            <a:spLocks noGrp="1"/>
+          </p:cNvSpPr>
+          <p:nvPr>
+            <p:ph idx="1"/>
+          </p:nvPr>
+        </p:nvSpPr>
+        <p:spPr>
+          <a:xfrm>
+            <a:off x="838200" y="1825625"/>
+            <a:ext cx="10515600" cy="956486"/>
+          </a:xfrm>
+          <a:solidFill>
+            <a:schemeClr val="bg1">
+              <a:lumMod val="85000"/>
+            </a:schemeClr>
+          </a:solidFill>
+        </p:spPr>
+        <p:txBody>
+          <a:bodyPr/>
+          <a:lstStyle/>
+          <a:p>
+            <a:pPr marL="0" indent="0">
+              <a:buNone/>
+            </a:pPr>
+            <a:r>
+              <a:rPr lang="nl-NL" dirty="0" err="1">
+                <a:latin typeface="Courier New" panose="02070309020205020404" pitchFamily="49" charset="0"/>
+                <a:cs typeface="Courier New" panose="02070309020205020404" pitchFamily="49" charset="0"/>
+              </a:rPr>
+              <a:t>tilemap.</a:t>
+            </a:r>
+            <a:r>
+              <a:rPr lang="nl-NL" b="1" dirty="0" err="1">
+                <a:latin typeface="Courier New" panose="02070309020205020404" pitchFamily="49" charset="0"/>
+                <a:cs typeface="Courier New" panose="02070309020205020404" pitchFamily="49" charset="0"/>
+              </a:rPr>
+              <a:t>SetTileFlags</a:t>
+            </a:r>
+            <a:r>
+              <a:rPr lang="nl-NL" dirty="0">
+                <a:latin typeface="Courier New" panose="02070309020205020404" pitchFamily="49" charset="0"/>
+                <a:cs typeface="Courier New" panose="02070309020205020404" pitchFamily="49" charset="0"/>
+              </a:rPr>
+              <a:t>(pos, </a:t>
+            </a:r>
+            <a:r>
+              <a:rPr lang="nl-NL" dirty="0" err="1">
+                <a:latin typeface="Courier New" panose="02070309020205020404" pitchFamily="49" charset="0"/>
+                <a:cs typeface="Courier New" panose="02070309020205020404" pitchFamily="49" charset="0"/>
+              </a:rPr>
+              <a:t>TileFlags.None</a:t>
+            </a:r>
+            <a:r>
+              <a:rPr lang="nl-NL" dirty="0">
+                <a:latin typeface="Courier New" panose="02070309020205020404" pitchFamily="49" charset="0"/>
+                <a:cs typeface="Courier New" panose="02070309020205020404" pitchFamily="49" charset="0"/>
+              </a:rPr>
+              <a:t>);</a:t>
+            </a:r>
+            <a:br>
+              <a:rPr lang="nl-NL" dirty="0">
+                <a:latin typeface="Courier New" panose="02070309020205020404" pitchFamily="49" charset="0"/>
+                <a:cs typeface="Courier New" panose="02070309020205020404" pitchFamily="49" charset="0"/>
+              </a:rPr>
+            </a:br>
+            <a:r>
+              <a:rPr lang="nl-NL" dirty="0" err="1">
+                <a:latin typeface="Courier New" panose="02070309020205020404" pitchFamily="49" charset="0"/>
+                <a:cs typeface="Courier New" panose="02070309020205020404" pitchFamily="49" charset="0"/>
+              </a:rPr>
+              <a:t>tilemap.</a:t>
+            </a:r>
+            <a:r>
+              <a:rPr lang="nl-NL" b="1" dirty="0" err="1">
+                <a:latin typeface="Courier New" panose="02070309020205020404" pitchFamily="49" charset="0"/>
+                <a:cs typeface="Courier New" panose="02070309020205020404" pitchFamily="49" charset="0"/>
+              </a:rPr>
+              <a:t>SetColor</a:t>
+            </a:r>
+            <a:r>
+              <a:rPr lang="nl-NL" dirty="0">
+                <a:latin typeface="Courier New" panose="02070309020205020404" pitchFamily="49" charset="0"/>
+                <a:cs typeface="Courier New" panose="02070309020205020404" pitchFamily="49" charset="0"/>
+              </a:rPr>
+              <a:t>(pos, </a:t>
+            </a:r>
+            <a:r>
+              <a:rPr lang="nl-NL" dirty="0" err="1">
+                <a:latin typeface="Courier New" panose="02070309020205020404" pitchFamily="49" charset="0"/>
+                <a:cs typeface="Courier New" panose="02070309020205020404" pitchFamily="49" charset="0"/>
+              </a:rPr>
+              <a:t>Color.red</a:t>
+            </a:r>
+            <a:r>
+              <a:rPr lang="nl-NL" dirty="0">
+                <a:latin typeface="Courier New" panose="02070309020205020404" pitchFamily="49" charset="0"/>
+                <a:cs typeface="Courier New" panose="02070309020205020404" pitchFamily="49" charset="0"/>
+              </a:rPr>
+              <a:t>);</a:t>
+            </a:r>
+          </a:p>
+          <a:p>
+            <a:endParaRPr lang="nl-NL" dirty="0"/>
+          </a:p>
+        </p:txBody>
+      </p:sp>
+    </p:spTree>
+    <p:extLst>
+      <p:ext uri="{BB962C8B-B14F-4D97-AF65-F5344CB8AC3E}">
+        <p14:creationId xmlns:p14="http://schemas.microsoft.com/office/powerpoint/2010/main" val="3858322853"/>
+      </p:ext>
+    </p:extLst>
+  </p:cSld>
+  <p:clrMapOvr>
+    <a:masterClrMapping/>
+  </p:clrMapOvr>
+</p:sld>
+</file>
+
+<file path=ppt/slides/slide7.xml><?xml version="1.0" encoding="utf-8"?>
+<p:sld xmlns:a="http://schemas.openxmlformats.org/drawingml/2006/main" xmlns:r="http://schemas.openxmlformats.org/officeDocument/2006/relationships" xmlns:p="http://schemas.openxmlformats.org/presentationml/2006/main">
+  <p:cSld>
+    <p:spTree>
+      <p:nvGrpSpPr>
+        <p:cNvPr id="1" name=""/>
+        <p:cNvGrpSpPr/>
+        <p:nvPr/>
+      </p:nvGrpSpPr>
+      <p:grpSpPr>
+        <a:xfrm>
+          <a:off x="0" y="0"/>
+          <a:ext cx="0" cy="0"/>
+          <a:chOff x="0" y="0"/>
+          <a:chExt cx="0" cy="0"/>
+        </a:xfrm>
+      </p:grpSpPr>
+      <p:sp>
+        <p:nvSpPr>
+          <p:cNvPr id="2" name="Titel 1">
+            <a:extLst>
+              <a:ext uri="{FF2B5EF4-FFF2-40B4-BE49-F238E27FC236}">
                 <a16:creationId xmlns:a16="http://schemas.microsoft.com/office/drawing/2014/main" id="{FE45CA3E-C9D6-04E4-C92D-157A40F1CBB5}"/>
               </a:ext>
             </a:extLst>
@@ -5254,14 +5436,14 @@
             <p:ph idx="1"/>
             <p:extLst>
               <p:ext uri="{D42A27DB-BD31-4B8C-83A1-F6EECF244321}">
-                <p14:modId xmlns:p14="http://schemas.microsoft.com/office/powerpoint/2010/main" val="3460058198"/>
+                <p14:modId xmlns:p14="http://schemas.microsoft.com/office/powerpoint/2010/main" val="2175130075"/>
               </p:ext>
             </p:extLst>
           </p:nvPr>
         </p:nvGraphicFramePr>
         <p:xfrm>
           <a:off x="838200" y="1825625"/>
-          <a:ext cx="9696855" cy="3524589"/>
+          <a:ext cx="9696855" cy="3464723"/>
         </p:xfrm>
         <a:graphic>
           <a:graphicData uri="http://schemas.openxmlformats.org/drawingml/2006/table">
@@ -5306,7 +5488,7 @@
                   </a:extLst>
                 </a:gridCol>
               </a:tblGrid>
-              <a:tr h="705067">
+              <a:tr h="645201">
                 <a:tc>
                   <a:txBody>
                     <a:bodyPr/>
@@ -5334,7 +5516,7 @@
                           <a:latin typeface="Courier New" panose="02070309020205020404" pitchFamily="49" charset="0"/>
                           <a:cs typeface="Courier New" panose="02070309020205020404" pitchFamily="49" charset="0"/>
                         </a:rPr>
-                        <a:t>(-2,-2)</a:t>
+                        <a:t>(-2,-2,0)</a:t>
                       </a:r>
                       <a:endParaRPr lang="nl-NL" b="1" dirty="0">
                         <a:latin typeface="Courier New" panose="02070309020205020404" pitchFamily="49" charset="0"/>
@@ -5411,7 +5593,7 @@
                           <a:latin typeface="Courier New" panose="02070309020205020404" pitchFamily="49" charset="0"/>
                           <a:cs typeface="Courier New" panose="02070309020205020404" pitchFamily="49" charset="0"/>
                         </a:rPr>
-                        <a:t>(-1,-2)</a:t>
+                        <a:t>(-1,-2,0)</a:t>
                       </a:r>
                       <a:endParaRPr lang="nl-NL" b="1" dirty="0">
                         <a:latin typeface="Courier New" panose="02070309020205020404" pitchFamily="49" charset="0"/>
@@ -5488,7 +5670,7 @@
                           <a:latin typeface="Courier New" panose="02070309020205020404" pitchFamily="49" charset="0"/>
                           <a:cs typeface="Courier New" panose="02070309020205020404" pitchFamily="49" charset="0"/>
                         </a:rPr>
-                        <a:t>(0,-2)</a:t>
+                        <a:t>(0,-2,0)</a:t>
                       </a:r>
                       <a:endParaRPr lang="nl-NL" b="1" dirty="0">
                         <a:latin typeface="Courier New" panose="02070309020205020404" pitchFamily="49" charset="0"/>
@@ -5565,7 +5747,7 @@
                           <a:latin typeface="Courier New" panose="02070309020205020404" pitchFamily="49" charset="0"/>
                           <a:cs typeface="Courier New" panose="02070309020205020404" pitchFamily="49" charset="0"/>
                         </a:rPr>
-                        <a:t>(1,-2)</a:t>
+                        <a:t>(1,-2,0)</a:t>
                       </a:r>
                       <a:endParaRPr lang="nl-NL" b="1" dirty="0">
                         <a:latin typeface="Courier New" panose="02070309020205020404" pitchFamily="49" charset="0"/>
@@ -5642,7 +5824,7 @@
                           <a:latin typeface="Courier New" panose="02070309020205020404" pitchFamily="49" charset="0"/>
                           <a:cs typeface="Courier New" panose="02070309020205020404" pitchFamily="49" charset="0"/>
                         </a:rPr>
-                        <a:t>(2,-2)</a:t>
+                        <a:t>(2,-2,0)</a:t>
                       </a:r>
                       <a:endParaRPr lang="nl-NL" b="1" dirty="0">
                         <a:latin typeface="Courier New" panose="02070309020205020404" pitchFamily="49" charset="0"/>
@@ -5726,7 +5908,7 @@
                           <a:latin typeface="Courier New" panose="02070309020205020404" pitchFamily="49" charset="0"/>
                           <a:cs typeface="Courier New" panose="02070309020205020404" pitchFamily="49" charset="0"/>
                         </a:rPr>
-                        <a:t>(-2,-1)</a:t>
+                        <a:t>(-2,-1,0)</a:t>
                       </a:r>
                       <a:endParaRPr lang="nl-NL" b="1" dirty="0">
                         <a:latin typeface="Courier New" panose="02070309020205020404" pitchFamily="49" charset="0"/>
@@ -5803,7 +5985,7 @@
                           <a:latin typeface="Courier New" panose="02070309020205020404" pitchFamily="49" charset="0"/>
                           <a:cs typeface="Courier New" panose="02070309020205020404" pitchFamily="49" charset="0"/>
                         </a:rPr>
-                        <a:t>(-1,-1)</a:t>
+                        <a:t>(-1,-1,0)</a:t>
                       </a:r>
                       <a:endParaRPr lang="nl-NL" b="1" dirty="0">
                         <a:latin typeface="Courier New" panose="02070309020205020404" pitchFamily="49" charset="0"/>
@@ -5880,7 +6062,7 @@
                           <a:latin typeface="Courier New" panose="02070309020205020404" pitchFamily="49" charset="0"/>
                           <a:cs typeface="Courier New" panose="02070309020205020404" pitchFamily="49" charset="0"/>
                         </a:rPr>
-                        <a:t>(0,-1)</a:t>
+                        <a:t>(0,-1,0)</a:t>
                       </a:r>
                       <a:endParaRPr lang="nl-NL" b="1" dirty="0">
                         <a:latin typeface="Courier New" panose="02070309020205020404" pitchFamily="49" charset="0"/>
@@ -5957,7 +6139,7 @@
                           <a:latin typeface="Courier New" panose="02070309020205020404" pitchFamily="49" charset="0"/>
                           <a:cs typeface="Courier New" panose="02070309020205020404" pitchFamily="49" charset="0"/>
                         </a:rPr>
-                        <a:t>(1,-1)</a:t>
+                        <a:t>(1,-1,0)</a:t>
                       </a:r>
                       <a:endParaRPr lang="nl-NL" b="1" dirty="0">
                         <a:latin typeface="Courier New" panose="02070309020205020404" pitchFamily="49" charset="0"/>
@@ -6034,7 +6216,7 @@
                           <a:latin typeface="Courier New" panose="02070309020205020404" pitchFamily="49" charset="0"/>
                           <a:cs typeface="Courier New" panose="02070309020205020404" pitchFamily="49" charset="0"/>
                         </a:rPr>
-                        <a:t>(2,-1)</a:t>
+                        <a:t>(2,-1,0)</a:t>
                       </a:r>
                       <a:endParaRPr lang="nl-NL" b="1" dirty="0">
                         <a:latin typeface="Courier New" panose="02070309020205020404" pitchFamily="49" charset="0"/>
@@ -6118,7 +6300,7 @@
                           <a:latin typeface="Courier New" panose="02070309020205020404" pitchFamily="49" charset="0"/>
                           <a:cs typeface="Courier New" panose="02070309020205020404" pitchFamily="49" charset="0"/>
                         </a:rPr>
-                        <a:t>(-2,0)</a:t>
+                        <a:t>(-2,0,0)</a:t>
                       </a:r>
                       <a:endParaRPr lang="nl-NL" b="1" dirty="0">
                         <a:latin typeface="Courier New" panose="02070309020205020404" pitchFamily="49" charset="0"/>
@@ -6195,7 +6377,7 @@
                           <a:latin typeface="Courier New" panose="02070309020205020404" pitchFamily="49" charset="0"/>
                           <a:cs typeface="Courier New" panose="02070309020205020404" pitchFamily="49" charset="0"/>
                         </a:rPr>
-                        <a:t>(-1,0)</a:t>
+                        <a:t>(-1,0,0)</a:t>
                       </a:r>
                       <a:endParaRPr lang="nl-NL" b="1" dirty="0">
                         <a:latin typeface="Courier New" panose="02070309020205020404" pitchFamily="49" charset="0"/>
@@ -6256,7 +6438,7 @@
                           <a:latin typeface="Courier New" panose="02070309020205020404" pitchFamily="49" charset="0"/>
                           <a:cs typeface="Courier New" panose="02070309020205020404" pitchFamily="49" charset="0"/>
                         </a:rPr>
-                        <a:t>(0,0)</a:t>
+                        <a:t>(0,0,0)</a:t>
                       </a:r>
                       <a:endParaRPr lang="nl-NL" b="1" dirty="0">
                         <a:latin typeface="Courier New" panose="02070309020205020404" pitchFamily="49" charset="0"/>
@@ -6335,7 +6517,7 @@
                           <a:latin typeface="Courier New" panose="02070309020205020404" pitchFamily="49" charset="0"/>
                           <a:cs typeface="Courier New" panose="02070309020205020404" pitchFamily="49" charset="0"/>
                         </a:rPr>
-                        <a:t>(1,0)</a:t>
+                        <a:t>(1,0,0)</a:t>
                       </a:r>
                       <a:endParaRPr lang="nl-NL" b="1" dirty="0">
                         <a:latin typeface="Courier New" panose="02070309020205020404" pitchFamily="49" charset="0"/>
@@ -6412,7 +6594,7 @@
                           <a:latin typeface="Courier New" panose="02070309020205020404" pitchFamily="49" charset="0"/>
                           <a:cs typeface="Courier New" panose="02070309020205020404" pitchFamily="49" charset="0"/>
                         </a:rPr>
-                        <a:t>(2,0)</a:t>
+                        <a:t>(2,0,0)</a:t>
                       </a:r>
                       <a:endParaRPr lang="nl-NL" b="1" dirty="0">
                         <a:latin typeface="Courier New" panose="02070309020205020404" pitchFamily="49" charset="0"/>
@@ -6496,7 +6678,7 @@
                           <a:latin typeface="Courier New" panose="02070309020205020404" pitchFamily="49" charset="0"/>
                           <a:cs typeface="Courier New" panose="02070309020205020404" pitchFamily="49" charset="0"/>
                         </a:rPr>
-                        <a:t>(-2,1)</a:t>
+                        <a:t>(-2,1,0)</a:t>
                       </a:r>
                       <a:endParaRPr lang="nl-NL" b="1" dirty="0">
                         <a:latin typeface="Courier New" panose="02070309020205020404" pitchFamily="49" charset="0"/>
@@ -6573,7 +6755,7 @@
                           <a:latin typeface="Courier New" panose="02070309020205020404" pitchFamily="49" charset="0"/>
                           <a:cs typeface="Courier New" panose="02070309020205020404" pitchFamily="49" charset="0"/>
                         </a:rPr>
-                        <a:t>(-1,1)</a:t>
+                        <a:t>(-1,1,0)</a:t>
                       </a:r>
                       <a:endParaRPr lang="nl-NL" b="1" dirty="0">
                         <a:latin typeface="Courier New" panose="02070309020205020404" pitchFamily="49" charset="0"/>
@@ -6650,7 +6832,7 @@
                           <a:latin typeface="Courier New" panose="02070309020205020404" pitchFamily="49" charset="0"/>
                           <a:cs typeface="Courier New" panose="02070309020205020404" pitchFamily="49" charset="0"/>
                         </a:rPr>
-                        <a:t>(0,1)</a:t>
+                        <a:t>(0,1,0)</a:t>
                       </a:r>
                       <a:endParaRPr lang="nl-NL" b="1" dirty="0">
                         <a:latin typeface="Courier New" panose="02070309020205020404" pitchFamily="49" charset="0"/>
@@ -6727,7 +6909,7 @@
                           <a:latin typeface="Courier New" panose="02070309020205020404" pitchFamily="49" charset="0"/>
                           <a:cs typeface="Courier New" panose="02070309020205020404" pitchFamily="49" charset="0"/>
                         </a:rPr>
-                        <a:t>(1,1)</a:t>
+                        <a:t>(1,1,0)</a:t>
                       </a:r>
                       <a:endParaRPr lang="nl-NL" b="1" dirty="0">
                         <a:latin typeface="Courier New" panose="02070309020205020404" pitchFamily="49" charset="0"/>
@@ -6804,7 +6986,7 @@
                           <a:latin typeface="Courier New" panose="02070309020205020404" pitchFamily="49" charset="0"/>
                           <a:cs typeface="Courier New" panose="02070309020205020404" pitchFamily="49" charset="0"/>
                         </a:rPr>
-                        <a:t>(2,1)</a:t>
+                        <a:t>(2,1,0)</a:t>
                       </a:r>
                       <a:endParaRPr lang="nl-NL" b="1" dirty="0">
                         <a:latin typeface="Courier New" panose="02070309020205020404" pitchFamily="49" charset="0"/>
@@ -6888,7 +7070,7 @@
                           <a:latin typeface="Courier New" panose="02070309020205020404" pitchFamily="49" charset="0"/>
                           <a:cs typeface="Courier New" panose="02070309020205020404" pitchFamily="49" charset="0"/>
                         </a:rPr>
-                        <a:t>(-2,2)</a:t>
+                        <a:t>(-2,2,0)</a:t>
                       </a:r>
                       <a:endParaRPr lang="nl-NL" b="1" dirty="0">
                         <a:latin typeface="Courier New" panose="02070309020205020404" pitchFamily="49" charset="0"/>
@@ -6965,7 +7147,7 @@
                           <a:latin typeface="Courier New" panose="02070309020205020404" pitchFamily="49" charset="0"/>
                           <a:cs typeface="Courier New" panose="02070309020205020404" pitchFamily="49" charset="0"/>
                         </a:rPr>
-                        <a:t>(-1,2)</a:t>
+                        <a:t>(-1,2,0)</a:t>
                       </a:r>
                       <a:endParaRPr lang="nl-NL" b="1" dirty="0">
                         <a:latin typeface="Courier New" panose="02070309020205020404" pitchFamily="49" charset="0"/>
@@ -7042,7 +7224,7 @@
                           <a:latin typeface="Courier New" panose="02070309020205020404" pitchFamily="49" charset="0"/>
                           <a:cs typeface="Courier New" panose="02070309020205020404" pitchFamily="49" charset="0"/>
                         </a:rPr>
-                        <a:t>(0,2)</a:t>
+                        <a:t>(0,2,0)</a:t>
                       </a:r>
                       <a:endParaRPr lang="nl-NL" b="1" dirty="0">
                         <a:latin typeface="Courier New" panose="02070309020205020404" pitchFamily="49" charset="0"/>
@@ -7119,7 +7301,7 @@
                           <a:latin typeface="Courier New" panose="02070309020205020404" pitchFamily="49" charset="0"/>
                           <a:cs typeface="Courier New" panose="02070309020205020404" pitchFamily="49" charset="0"/>
                         </a:rPr>
-                        <a:t>(1,2)</a:t>
+                        <a:t>(1,2,0)</a:t>
                       </a:r>
                       <a:endParaRPr lang="nl-NL" b="1" dirty="0">
                         <a:latin typeface="Courier New" panose="02070309020205020404" pitchFamily="49" charset="0"/>
@@ -7196,7 +7378,7 @@
                           <a:latin typeface="Courier New" panose="02070309020205020404" pitchFamily="49" charset="0"/>
                           <a:cs typeface="Courier New" panose="02070309020205020404" pitchFamily="49" charset="0"/>
                         </a:rPr>
-                        <a:t>(2,2)</a:t>
+                        <a:t>(2,2,0)</a:t>
                       </a:r>
                       <a:endParaRPr lang="nl-NL" b="1" dirty="0">
                         <a:latin typeface="Courier New" panose="02070309020205020404" pitchFamily="49" charset="0"/>
@@ -7269,266 +7451,6 @@
 </p:sld>
 </file>
 
-<file path=ppt/slides/slide7.xml><?xml version="1.0" encoding="utf-8"?>
-<p:sld xmlns:a="http://schemas.openxmlformats.org/drawingml/2006/main" xmlns:r="http://schemas.openxmlformats.org/officeDocument/2006/relationships" xmlns:p="http://schemas.openxmlformats.org/presentationml/2006/main">
-  <p:cSld>
-    <p:spTree>
-      <p:nvGrpSpPr>
-        <p:cNvPr id="1" name=""/>
-        <p:cNvGrpSpPr/>
-        <p:nvPr/>
-      </p:nvGrpSpPr>
-      <p:grpSpPr>
-        <a:xfrm>
-          <a:off x="0" y="0"/>
-          <a:ext cx="0" cy="0"/>
-          <a:chOff x="0" y="0"/>
-          <a:chExt cx="0" cy="0"/>
-        </a:xfrm>
-      </p:grpSpPr>
-      <p:sp>
-        <p:nvSpPr>
-          <p:cNvPr id="2" name="Titel 1">
-            <a:extLst>
-              <a:ext uri="{FF2B5EF4-FFF2-40B4-BE49-F238E27FC236}">
-                <a16:creationId xmlns:a16="http://schemas.microsoft.com/office/drawing/2014/main" id="{D0ACE8D3-2E12-BA47-F79C-BEF8FCF74313}"/>
-              </a:ext>
-            </a:extLst>
-          </p:cNvPr>
-          <p:cNvSpPr>
-            <a:spLocks noGrp="1"/>
-          </p:cNvSpPr>
-          <p:nvPr>
-            <p:ph type="title"/>
-          </p:nvPr>
-        </p:nvSpPr>
-        <p:spPr/>
-        <p:txBody>
-          <a:bodyPr/>
-          <a:lstStyle/>
-          <a:p>
-            <a:r>
-              <a:rPr lang="en-US" dirty="0" err="1"/>
-              <a:t>SetTileFlags</a:t>
-            </a:r>
-            <a:endParaRPr lang="nl-NL" dirty="0"/>
-          </a:p>
-        </p:txBody>
-      </p:sp>
-      <p:sp>
-        <p:nvSpPr>
-          <p:cNvPr id="3" name="Tijdelijke aanduiding voor inhoud 2">
-            <a:extLst>
-              <a:ext uri="{FF2B5EF4-FFF2-40B4-BE49-F238E27FC236}">
-                <a16:creationId xmlns:a16="http://schemas.microsoft.com/office/drawing/2014/main" id="{F07DFD2B-98F7-C71C-27B3-8D428228EF93}"/>
-              </a:ext>
-            </a:extLst>
-          </p:cNvPr>
-          <p:cNvSpPr>
-            <a:spLocks noGrp="1"/>
-          </p:cNvSpPr>
-          <p:nvPr>
-            <p:ph idx="1"/>
-          </p:nvPr>
-        </p:nvSpPr>
-        <p:spPr>
-          <a:xfrm>
-            <a:off x="838200" y="1825625"/>
-            <a:ext cx="10515600" cy="2386452"/>
-          </a:xfrm>
-        </p:spPr>
-        <p:txBody>
-          <a:bodyPr>
-            <a:normAutofit fontScale="92500" lnSpcReduction="10000"/>
-          </a:bodyPr>
-          <a:lstStyle/>
-          <a:p>
-            <a:r>
-              <a:rPr lang="nl-NL" dirty="0"/>
-              <a:t>In </a:t>
-            </a:r>
-            <a:r>
-              <a:rPr lang="nl-NL" dirty="0" err="1"/>
-              <a:t>Unity</a:t>
-            </a:r>
-            <a:r>
-              <a:rPr lang="nl-NL" dirty="0"/>
-              <a:t> (specifiek de 2D </a:t>
-            </a:r>
-            <a:r>
-              <a:rPr lang="nl-NL" dirty="0" err="1"/>
-              <a:t>Tilemap</a:t>
-            </a:r>
-            <a:r>
-              <a:rPr lang="nl-NL" dirty="0"/>
-              <a:t> API) gebruik je </a:t>
-            </a:r>
-            <a:r>
-              <a:rPr lang="nl-NL" dirty="0" err="1"/>
-              <a:t>SetTileFlags</a:t>
-            </a:r>
-            <a:r>
-              <a:rPr lang="nl-NL" dirty="0"/>
-              <a:t> om eigenschappen (“</a:t>
-            </a:r>
-            <a:r>
-              <a:rPr lang="nl-NL" dirty="0" err="1"/>
-              <a:t>flags</a:t>
-            </a:r>
-            <a:r>
-              <a:rPr lang="nl-NL" dirty="0"/>
-              <a:t>”) van een </a:t>
-            </a:r>
-            <a:r>
-              <a:rPr lang="nl-NL" dirty="0" err="1"/>
-              <a:t>tile</a:t>
-            </a:r>
-            <a:r>
-              <a:rPr lang="nl-NL" dirty="0"/>
-              <a:t> op een bepaalde positie aan te passen.</a:t>
-            </a:r>
-          </a:p>
-          <a:p>
-            <a:r>
-              <a:rPr lang="nl-NL" dirty="0"/>
-              <a:t>De methode hoort bij </a:t>
-            </a:r>
-            <a:r>
-              <a:rPr lang="nl-NL" dirty="0" err="1">
-                <a:hlinkClick r:id="rId2"/>
-              </a:rPr>
-              <a:t>Unity</a:t>
-            </a:r>
-            <a:r>
-              <a:rPr lang="nl-NL" dirty="0">
-                <a:hlinkClick r:id="rId2"/>
-              </a:rPr>
-              <a:t> </a:t>
-            </a:r>
-            <a:r>
-              <a:rPr lang="nl-NL" dirty="0" err="1">
-                <a:hlinkClick r:id="rId2"/>
-              </a:rPr>
-              <a:t>Tilemap</a:t>
-            </a:r>
-            <a:r>
-              <a:rPr lang="nl-NL" dirty="0">
-                <a:hlinkClick r:id="rId2"/>
-              </a:rPr>
-              <a:t> API</a:t>
-            </a:r>
-            <a:r>
-              <a:rPr lang="nl-NL" dirty="0"/>
-              <a:t>.</a:t>
-            </a:r>
-          </a:p>
-          <a:p>
-            <a:endParaRPr lang="nl-NL" dirty="0"/>
-          </a:p>
-          <a:p>
-            <a:r>
-              <a:rPr lang="nl-NL" dirty="0"/>
-              <a:t>Basisvorm:</a:t>
-            </a:r>
-          </a:p>
-          <a:p>
-            <a:endParaRPr lang="nl-NL" dirty="0"/>
-          </a:p>
-        </p:txBody>
-      </p:sp>
-      <p:sp>
-        <p:nvSpPr>
-          <p:cNvPr id="5" name="Tekstvak 4">
-            <a:extLst>
-              <a:ext uri="{FF2B5EF4-FFF2-40B4-BE49-F238E27FC236}">
-                <a16:creationId xmlns:a16="http://schemas.microsoft.com/office/drawing/2014/main" id="{0F859E05-4DBA-CECE-CED9-FD2D8FAABAC6}"/>
-              </a:ext>
-            </a:extLst>
-          </p:cNvPr>
-          <p:cNvSpPr txBox="1"/>
-          <p:nvPr/>
-        </p:nvSpPr>
-        <p:spPr>
-          <a:xfrm>
-            <a:off x="2161972" y="4347014"/>
-            <a:ext cx="6094378" cy="369332"/>
-          </a:xfrm>
-          <a:prstGeom prst="rect">
-            <a:avLst/>
-          </a:prstGeom>
-          <a:solidFill>
-            <a:schemeClr val="bg1">
-              <a:lumMod val="85000"/>
-            </a:schemeClr>
-          </a:solidFill>
-        </p:spPr>
-        <p:txBody>
-          <a:bodyPr wrap="square">
-            <a:spAutoFit/>
-          </a:bodyPr>
-          <a:lstStyle/>
-          <a:p>
-            <a:pPr marL="0" indent="0">
-              <a:buNone/>
-            </a:pPr>
-            <a:r>
-              <a:rPr lang="nl-NL" b="1" dirty="0" err="1">
-                <a:latin typeface="Courier New" panose="02070309020205020404" pitchFamily="49" charset="0"/>
-                <a:cs typeface="Courier New" panose="02070309020205020404" pitchFamily="49" charset="0"/>
-              </a:rPr>
-              <a:t>myTilemap.SetTileFlags</a:t>
-            </a:r>
-            <a:r>
-              <a:rPr lang="nl-NL" b="1" dirty="0">
-                <a:latin typeface="Courier New" panose="02070309020205020404" pitchFamily="49" charset="0"/>
-                <a:cs typeface="Courier New" panose="02070309020205020404" pitchFamily="49" charset="0"/>
-              </a:rPr>
-              <a:t>(</a:t>
-            </a:r>
-            <a:r>
-              <a:rPr lang="nl-NL" b="1" dirty="0" err="1">
-                <a:latin typeface="Courier New" panose="02070309020205020404" pitchFamily="49" charset="0"/>
-                <a:cs typeface="Courier New" panose="02070309020205020404" pitchFamily="49" charset="0"/>
-              </a:rPr>
-              <a:t>position</a:t>
-            </a:r>
-            <a:r>
-              <a:rPr lang="nl-NL" b="1" dirty="0">
-                <a:latin typeface="Courier New" panose="02070309020205020404" pitchFamily="49" charset="0"/>
-                <a:cs typeface="Courier New" panose="02070309020205020404" pitchFamily="49" charset="0"/>
-              </a:rPr>
-              <a:t>, </a:t>
-            </a:r>
-            <a:r>
-              <a:rPr lang="nl-NL" b="1" dirty="0" err="1">
-                <a:latin typeface="Courier New" panose="02070309020205020404" pitchFamily="49" charset="0"/>
-                <a:cs typeface="Courier New" panose="02070309020205020404" pitchFamily="49" charset="0"/>
-              </a:rPr>
-              <a:t>flags</a:t>
-            </a:r>
-            <a:r>
-              <a:rPr lang="nl-NL" b="1" dirty="0">
-                <a:latin typeface="Courier New" panose="02070309020205020404" pitchFamily="49" charset="0"/>
-                <a:cs typeface="Courier New" panose="02070309020205020404" pitchFamily="49" charset="0"/>
-              </a:rPr>
-              <a:t>);</a:t>
-            </a:r>
-          </a:p>
-        </p:txBody>
-      </p:sp>
-    </p:spTree>
-    <p:extLst>
-      <p:ext uri="{BB962C8B-B14F-4D97-AF65-F5344CB8AC3E}">
-        <p14:creationId xmlns:p14="http://schemas.microsoft.com/office/powerpoint/2010/main" val="1909848993"/>
-      </p:ext>
-    </p:extLst>
-  </p:cSld>
-  <p:clrMapOvr>
-    <a:masterClrMapping/>
-  </p:clrMapOvr>
-</p:sld>
-</file>
-
 <file path=ppt/slides/slide8.xml><?xml version="1.0" encoding="utf-8"?>
 <p:sld xmlns:a="http://schemas.openxmlformats.org/drawingml/2006/main" xmlns:r="http://schemas.openxmlformats.org/officeDocument/2006/relationships" xmlns:p="http://schemas.openxmlformats.org/presentationml/2006/main">
   <p:cSld>
@@ -7551,7 +7473,7 @@
           <p:cNvPr id="2" name="Titel 1">
             <a:extLst>
               <a:ext uri="{FF2B5EF4-FFF2-40B4-BE49-F238E27FC236}">
-                <a16:creationId xmlns:a16="http://schemas.microsoft.com/office/drawing/2014/main" id="{013F1738-05B5-C3A3-AD12-B1394E9E3F7C}"/>
+                <a16:creationId xmlns:a16="http://schemas.microsoft.com/office/drawing/2014/main" id="{D0ACE8D3-2E12-BA47-F79C-BEF8FCF74313}"/>
               </a:ext>
             </a:extLst>
           </p:cNvPr>
@@ -7568,16 +7490,8 @@
           <a:lstStyle/>
           <a:p>
             <a:r>
-              <a:rPr lang="nl-NL" b="1" dirty="0"/>
-              <a:t>Waar zijn die </a:t>
-            </a:r>
-            <a:r>
-              <a:rPr lang="nl-NL" b="1" dirty="0" err="1"/>
-              <a:t>flags</a:t>
-            </a:r>
-            <a:r>
-              <a:rPr lang="nl-NL" b="1" dirty="0"/>
-              <a:t> voor?</a:t>
+              <a:rPr lang="en-US" dirty="0" err="1"/>
+              <a:t>SetTileFlags</a:t>
             </a:r>
             <a:endParaRPr lang="nl-NL" dirty="0"/>
           </a:p>
@@ -7588,7 +7502,7 @@
           <p:cNvPr id="3" name="Tijdelijke aanduiding voor inhoud 2">
             <a:extLst>
               <a:ext uri="{FF2B5EF4-FFF2-40B4-BE49-F238E27FC236}">
-                <a16:creationId xmlns:a16="http://schemas.microsoft.com/office/drawing/2014/main" id="{B4118650-E652-06A6-3890-FBAD76D8837D}"/>
+                <a16:creationId xmlns:a16="http://schemas.microsoft.com/office/drawing/2014/main" id="{F07DFD2B-98F7-C71C-27B3-8D428228EF93}"/>
               </a:ext>
             </a:extLst>
           </p:cNvPr>
@@ -7599,18 +7513,45 @@
             <p:ph idx="1"/>
           </p:nvPr>
         </p:nvSpPr>
-        <p:spPr/>
-        <p:txBody>
-          <a:bodyPr/>
+        <p:spPr>
+          <a:xfrm>
+            <a:off x="838200" y="1825625"/>
+            <a:ext cx="10515600" cy="2386452"/>
+          </a:xfrm>
+        </p:spPr>
+        <p:txBody>
+          <a:bodyPr>
+            <a:normAutofit fontScale="92500" lnSpcReduction="10000"/>
+          </a:bodyPr>
           <a:lstStyle/>
           <a:p>
             <a:r>
+              <a:rPr lang="nl-NL" dirty="0"/>
+              <a:t>In </a:t>
+            </a:r>
+            <a:r>
               <a:rPr lang="nl-NL" dirty="0" err="1"/>
-              <a:t>Tile</a:t>
+              <a:t>Unity</a:t>
             </a:r>
             <a:r>
               <a:rPr lang="nl-NL" dirty="0"/>
-              <a:t> </a:t>
+              <a:t> (specifiek de 2D </a:t>
+            </a:r>
+            <a:r>
+              <a:rPr lang="nl-NL" dirty="0" err="1"/>
+              <a:t>Tilemap</a:t>
+            </a:r>
+            <a:r>
+              <a:rPr lang="nl-NL" dirty="0"/>
+              <a:t> API) gebruik je </a:t>
+            </a:r>
+            <a:r>
+              <a:rPr lang="nl-NL" dirty="0" err="1"/>
+              <a:t>SetTileFlags</a:t>
+            </a:r>
+            <a:r>
+              <a:rPr lang="nl-NL" dirty="0"/>
+              <a:t> om eigenschappen (“</a:t>
             </a:r>
             <a:r>
               <a:rPr lang="nl-NL" dirty="0" err="1"/>
@@ -7618,7 +7559,7 @@
             </a:r>
             <a:r>
               <a:rPr lang="nl-NL" dirty="0"/>
-              <a:t> bepalen hoe een </a:t>
+              <a:t>”) van een </a:t>
             </a:r>
             <a:r>
               <a:rPr lang="nl-NL" dirty="0" err="1"/>
@@ -7626,112 +7567,37 @@
             </a:r>
             <a:r>
               <a:rPr lang="nl-NL" dirty="0"/>
-              <a:t> zich gedraagt in de </a:t>
-            </a:r>
-            <a:r>
-              <a:rPr lang="nl-NL" dirty="0" err="1"/>
+              <a:t> op een bepaalde positie aan te passen.</a:t>
+            </a:r>
+          </a:p>
+          <a:p>
+            <a:r>
+              <a:rPr lang="nl-NL" dirty="0"/>
+              <a:t>De methode hoort bij </a:t>
+            </a:r>
+            <a:r>
+              <a:rPr lang="nl-NL" dirty="0" err="1">
+                <a:hlinkClick r:id="rId2"/>
+              </a:rPr>
+              <a:t>Unity</a:t>
+            </a:r>
+            <a:r>
+              <a:rPr lang="nl-NL" dirty="0">
+                <a:hlinkClick r:id="rId2"/>
+              </a:rPr>
+              <a:t> </a:t>
+            </a:r>
+            <a:r>
+              <a:rPr lang="nl-NL" dirty="0" err="1">
+                <a:hlinkClick r:id="rId2"/>
+              </a:rPr>
               <a:t>Tilemap</a:t>
             </a:r>
             <a:r>
-              <a:rPr lang="nl-NL" dirty="0"/>
-              <a:t>. Bijvoorbeeld:</a:t>
-            </a:r>
-          </a:p>
-          <a:p>
-            <a:pPr lvl="1"/>
-            <a:r>
-              <a:rPr lang="nl-NL" dirty="0"/>
-              <a:t>Of de </a:t>
-            </a:r>
-            <a:r>
-              <a:rPr lang="nl-NL" dirty="0" err="1"/>
-              <a:t>tilekleur</a:t>
-            </a:r>
-            <a:r>
-              <a:rPr lang="nl-NL" dirty="0"/>
-              <a:t> aangepast mag worden </a:t>
-            </a:r>
-          </a:p>
-          <a:p>
-            <a:pPr lvl="1"/>
-            <a:r>
-              <a:rPr lang="nl-NL" dirty="0"/>
-              <a:t>Of de </a:t>
-            </a:r>
-            <a:r>
-              <a:rPr lang="nl-NL" dirty="0" err="1"/>
-              <a:t>transform</a:t>
-            </a:r>
-            <a:r>
-              <a:rPr lang="nl-NL" dirty="0"/>
-              <a:t> (rotatie/schaal) aangepast mag worden </a:t>
-            </a:r>
-          </a:p>
-          <a:p>
-            <a:pPr lvl="1"/>
-            <a:r>
-              <a:rPr lang="nl-NL" dirty="0"/>
-              <a:t>Of de </a:t>
-            </a:r>
-            <a:r>
-              <a:rPr lang="nl-NL" dirty="0" err="1"/>
-              <a:t>tile</a:t>
-            </a:r>
-            <a:r>
-              <a:rPr lang="nl-NL" dirty="0"/>
-              <a:t> </a:t>
-            </a:r>
-            <a:r>
-              <a:rPr lang="nl-NL" dirty="0" err="1"/>
-              <a:t>gelockt</a:t>
-            </a:r>
-            <a:r>
-              <a:rPr lang="nl-NL" dirty="0"/>
-              <a:t> is </a:t>
-            </a:r>
-          </a:p>
-          <a:p>
-            <a:pPr lvl="1"/>
-            <a:r>
-              <a:rPr lang="nl-NL" dirty="0"/>
-              <a:t>Of </a:t>
-            </a:r>
-            <a:r>
-              <a:rPr lang="nl-NL" dirty="0" err="1"/>
-              <a:t>Unity</a:t>
-            </a:r>
-            <a:r>
-              <a:rPr lang="nl-NL" dirty="0"/>
-              <a:t> automatisch data mag overschrijven </a:t>
-            </a:r>
-          </a:p>
-          <a:p>
-            <a:endParaRPr lang="nl-NL" dirty="0"/>
-          </a:p>
-          <a:p>
-            <a:r>
-              <a:rPr lang="nl-NL" dirty="0"/>
-              <a:t>De </a:t>
-            </a:r>
-            <a:r>
-              <a:rPr lang="nl-NL" dirty="0" err="1"/>
-              <a:t>flags</a:t>
-            </a:r>
-            <a:r>
-              <a:rPr lang="nl-NL" dirty="0"/>
-              <a:t> komen uit de </a:t>
-            </a:r>
-            <a:r>
-              <a:rPr lang="nl-NL" dirty="0" err="1"/>
-              <a:t>enum</a:t>
-            </a:r>
-            <a:r>
-              <a:rPr lang="nl-NL" dirty="0"/>
-              <a:t> </a:t>
-            </a:r>
-            <a:r>
-              <a:rPr lang="nl-NL" dirty="0" err="1"/>
-              <a:t>TileFlags</a:t>
+              <a:rPr lang="nl-NL" dirty="0">
+                <a:hlinkClick r:id="rId2"/>
+              </a:rPr>
+              <a:t> API</a:t>
             </a:r>
             <a:r>
               <a:rPr lang="nl-NL" dirty="0"/>
@@ -7740,13 +7606,102 @@
           </a:p>
           <a:p>
             <a:endParaRPr lang="nl-NL" dirty="0"/>
+          </a:p>
+          <a:p>
+            <a:r>
+              <a:rPr lang="nl-NL" dirty="0"/>
+              <a:t>Basisvorm:</a:t>
+            </a:r>
+          </a:p>
+          <a:p>
+            <a:endParaRPr lang="nl-NL" dirty="0"/>
+          </a:p>
+        </p:txBody>
+      </p:sp>
+      <p:sp>
+        <p:nvSpPr>
+          <p:cNvPr id="5" name="Tekstvak 4">
+            <a:extLst>
+              <a:ext uri="{FF2B5EF4-FFF2-40B4-BE49-F238E27FC236}">
+                <a16:creationId xmlns:a16="http://schemas.microsoft.com/office/drawing/2014/main" id="{0F859E05-4DBA-CECE-CED9-FD2D8FAABAC6}"/>
+              </a:ext>
+            </a:extLst>
+          </p:cNvPr>
+          <p:cNvSpPr txBox="1"/>
+          <p:nvPr/>
+        </p:nvSpPr>
+        <p:spPr>
+          <a:xfrm>
+            <a:off x="2161972" y="4347014"/>
+            <a:ext cx="6094378" cy="369332"/>
+          </a:xfrm>
+          <a:prstGeom prst="rect">
+            <a:avLst/>
+          </a:prstGeom>
+          <a:solidFill>
+            <a:schemeClr val="bg1">
+              <a:lumMod val="85000"/>
+            </a:schemeClr>
+          </a:solidFill>
+        </p:spPr>
+        <p:txBody>
+          <a:bodyPr wrap="square">
+            <a:spAutoFit/>
+          </a:bodyPr>
+          <a:lstStyle/>
+          <a:p>
+            <a:pPr marL="0" indent="0">
+              <a:buNone/>
+            </a:pPr>
+            <a:r>
+              <a:rPr lang="nl-NL" b="1" dirty="0" err="1">
+                <a:latin typeface="Courier New" panose="02070309020205020404" pitchFamily="49" charset="0"/>
+                <a:cs typeface="Courier New" panose="02070309020205020404" pitchFamily="49" charset="0"/>
+              </a:rPr>
+              <a:t>myTilemap.SetTileFlags</a:t>
+            </a:r>
+            <a:r>
+              <a:rPr lang="nl-NL" b="1" dirty="0">
+                <a:latin typeface="Courier New" panose="02070309020205020404" pitchFamily="49" charset="0"/>
+                <a:cs typeface="Courier New" panose="02070309020205020404" pitchFamily="49" charset="0"/>
+              </a:rPr>
+              <a:t>(</a:t>
+            </a:r>
+            <a:r>
+              <a:rPr lang="nl-NL" b="1" dirty="0" err="1">
+                <a:latin typeface="Courier New" panose="02070309020205020404" pitchFamily="49" charset="0"/>
+                <a:cs typeface="Courier New" panose="02070309020205020404" pitchFamily="49" charset="0"/>
+              </a:rPr>
+              <a:t>position</a:t>
+            </a:r>
+            <a:r>
+              <a:rPr lang="nl-NL" b="1" dirty="0">
+                <a:latin typeface="Courier New" panose="02070309020205020404" pitchFamily="49" charset="0"/>
+                <a:cs typeface="Courier New" panose="02070309020205020404" pitchFamily="49" charset="0"/>
+              </a:rPr>
+              <a:t>, </a:t>
+            </a:r>
+            <a:r>
+              <a:rPr lang="nl-NL" b="1" dirty="0" err="1">
+                <a:latin typeface="Courier New" panose="02070309020205020404" pitchFamily="49" charset="0"/>
+                <a:cs typeface="Courier New" panose="02070309020205020404" pitchFamily="49" charset="0"/>
+              </a:rPr>
+              <a:t>flags</a:t>
+            </a:r>
+            <a:r>
+              <a:rPr lang="nl-NL" b="1" dirty="0">
+                <a:latin typeface="Courier New" panose="02070309020205020404" pitchFamily="49" charset="0"/>
+                <a:cs typeface="Courier New" panose="02070309020205020404" pitchFamily="49" charset="0"/>
+              </a:rPr>
+              <a:t>);</a:t>
+            </a:r>
           </a:p>
         </p:txBody>
       </p:sp>
     </p:spTree>
     <p:extLst>
       <p:ext uri="{BB962C8B-B14F-4D97-AF65-F5344CB8AC3E}">
-        <p14:creationId xmlns:p14="http://schemas.microsoft.com/office/powerpoint/2010/main" val="3301321409"/>
+        <p14:creationId xmlns:p14="http://schemas.microsoft.com/office/powerpoint/2010/main" val="1909848993"/>
       </p:ext>
     </p:extLst>
   </p:cSld>
@@ -7778,7 +7733,7 @@
           <p:cNvPr id="2" name="Titel 1">
             <a:extLst>
               <a:ext uri="{FF2B5EF4-FFF2-40B4-BE49-F238E27FC236}">
-                <a16:creationId xmlns:a16="http://schemas.microsoft.com/office/drawing/2014/main" id="{6D0DC205-209E-704D-F0B7-D67A851EFE86}"/>
+                <a16:creationId xmlns:a16="http://schemas.microsoft.com/office/drawing/2014/main" id="{013F1738-05B5-C3A3-AD12-B1394E9E3F7C}"/>
               </a:ext>
             </a:extLst>
           </p:cNvPr>
@@ -7795,12 +7750,166 @@
           <a:lstStyle/>
           <a:p>
             <a:r>
+              <a:rPr lang="nl-NL" b="1" dirty="0"/>
+              <a:t>Waar zijn die </a:t>
+            </a:r>
+            <a:r>
+              <a:rPr lang="nl-NL" b="1" dirty="0" err="1"/>
+              <a:t>flags</a:t>
+            </a:r>
+            <a:r>
+              <a:rPr lang="nl-NL" b="1" dirty="0"/>
+              <a:t> voor?</a:t>
+            </a:r>
+            <a:endParaRPr lang="nl-NL" dirty="0"/>
+          </a:p>
+        </p:txBody>
+      </p:sp>
+      <p:sp>
+        <p:nvSpPr>
+          <p:cNvPr id="3" name="Tijdelijke aanduiding voor inhoud 2">
+            <a:extLst>
+              <a:ext uri="{FF2B5EF4-FFF2-40B4-BE49-F238E27FC236}">
+                <a16:creationId xmlns:a16="http://schemas.microsoft.com/office/drawing/2014/main" id="{B4118650-E652-06A6-3890-FBAD76D8837D}"/>
+              </a:ext>
+            </a:extLst>
+          </p:cNvPr>
+          <p:cNvSpPr>
+            <a:spLocks noGrp="1"/>
+          </p:cNvSpPr>
+          <p:nvPr>
+            <p:ph idx="1"/>
+          </p:nvPr>
+        </p:nvSpPr>
+        <p:spPr/>
+        <p:txBody>
+          <a:bodyPr/>
+          <a:lstStyle/>
+          <a:p>
+            <a:r>
               <a:rPr lang="nl-NL" dirty="0" err="1"/>
-              <a:t>Veelgebruiktewaarden</a:t>
+              <a:t>Tile</a:t>
             </a:r>
             <a:r>
               <a:rPr lang="nl-NL" dirty="0"/>
-              <a:t> voor </a:t>
+              <a:t> </a:t>
+            </a:r>
+            <a:r>
+              <a:rPr lang="nl-NL" dirty="0" err="1"/>
+              <a:t>flags</a:t>
+            </a:r>
+            <a:r>
+              <a:rPr lang="nl-NL" dirty="0"/>
+              <a:t> bepalen hoe een </a:t>
+            </a:r>
+            <a:r>
+              <a:rPr lang="nl-NL" dirty="0" err="1"/>
+              <a:t>tile</a:t>
+            </a:r>
+            <a:r>
+              <a:rPr lang="nl-NL" dirty="0"/>
+              <a:t> zich gedraagt in de </a:t>
+            </a:r>
+            <a:r>
+              <a:rPr lang="nl-NL" dirty="0" err="1"/>
+              <a:t>Tilemap</a:t>
+            </a:r>
+            <a:r>
+              <a:rPr lang="nl-NL" dirty="0"/>
+              <a:t>. Bijvoorbeeld:</a:t>
+            </a:r>
+          </a:p>
+          <a:p>
+            <a:pPr lvl="1"/>
+            <a:r>
+              <a:rPr lang="nl-NL" dirty="0"/>
+              <a:t>Of de </a:t>
+            </a:r>
+            <a:r>
+              <a:rPr lang="nl-NL" dirty="0" err="1"/>
+              <a:t>tilekleur</a:t>
+            </a:r>
+            <a:r>
+              <a:rPr lang="nl-NL" dirty="0"/>
+              <a:t> aangepast mag worden </a:t>
+            </a:r>
+          </a:p>
+          <a:p>
+            <a:pPr lvl="1"/>
+            <a:r>
+              <a:rPr lang="nl-NL" dirty="0"/>
+              <a:t>Of de </a:t>
+            </a:r>
+            <a:r>
+              <a:rPr lang="nl-NL" dirty="0" err="1"/>
+              <a:t>transform</a:t>
+            </a:r>
+            <a:r>
+              <a:rPr lang="nl-NL" dirty="0"/>
+              <a:t> (rotatie/schaal) aangepast mag worden </a:t>
+            </a:r>
+          </a:p>
+          <a:p>
+            <a:pPr lvl="1"/>
+            <a:r>
+              <a:rPr lang="nl-NL" dirty="0"/>
+              <a:t>Of de </a:t>
+            </a:r>
+            <a:r>
+              <a:rPr lang="nl-NL" dirty="0" err="1"/>
+              <a:t>tile</a:t>
+            </a:r>
+            <a:r>
+              <a:rPr lang="nl-NL" dirty="0"/>
+              <a:t> </a:t>
+            </a:r>
+            <a:r>
+              <a:rPr lang="nl-NL" dirty="0" err="1"/>
+              <a:t>gelockt</a:t>
+            </a:r>
+            <a:r>
+              <a:rPr lang="nl-NL" dirty="0"/>
+              <a:t> is </a:t>
+            </a:r>
+          </a:p>
+          <a:p>
+            <a:pPr lvl="1"/>
+            <a:r>
+              <a:rPr lang="nl-NL" dirty="0"/>
+              <a:t>Of </a:t>
+            </a:r>
+            <a:r>
+              <a:rPr lang="nl-NL" dirty="0" err="1"/>
+              <a:t>Unity</a:t>
+            </a:r>
+            <a:r>
+              <a:rPr lang="nl-NL" dirty="0"/>
+              <a:t> automatisch data mag overschrijven </a:t>
+            </a:r>
+          </a:p>
+          <a:p>
+            <a:endParaRPr lang="nl-NL" dirty="0"/>
+          </a:p>
+          <a:p>
+            <a:r>
+              <a:rPr lang="nl-NL" dirty="0"/>
+              <a:t>De </a:t>
+            </a:r>
+            <a:r>
+              <a:rPr lang="nl-NL" dirty="0" err="1"/>
+              <a:t>flags</a:t>
+            </a:r>
+            <a:r>
+              <a:rPr lang="nl-NL" dirty="0"/>
+              <a:t> komen uit de </a:t>
+            </a:r>
+            <a:r>
+              <a:rPr lang="nl-NL" dirty="0" err="1"/>
+              <a:t>enum</a:t>
+            </a:r>
+            <a:r>
+              <a:rPr lang="nl-NL" dirty="0"/>
+              <a:t> </a:t>
             </a:r>
             <a:r>
               <a:rPr lang="nl-NL" dirty="0" err="1"/>
@@ -7808,127 +7917,18 @@
             </a:r>
             <a:r>
               <a:rPr lang="nl-NL" dirty="0"/>
-              <a:t>:</a:t>
-            </a:r>
-          </a:p>
-        </p:txBody>
-      </p:sp>
-      <p:sp>
-        <p:nvSpPr>
-          <p:cNvPr id="3" name="Tijdelijke aanduiding voor inhoud 2">
-            <a:extLst>
-              <a:ext uri="{FF2B5EF4-FFF2-40B4-BE49-F238E27FC236}">
-                <a16:creationId xmlns:a16="http://schemas.microsoft.com/office/drawing/2014/main" id="{BFD9C73C-7807-59D9-D2EB-27C2E097E579}"/>
-              </a:ext>
-            </a:extLst>
-          </p:cNvPr>
-          <p:cNvSpPr>
-            <a:spLocks noGrp="1"/>
-          </p:cNvSpPr>
-          <p:nvPr>
-            <p:ph idx="1"/>
-          </p:nvPr>
-        </p:nvSpPr>
-        <p:spPr>
-          <a:xfrm>
-            <a:off x="838200" y="1825625"/>
-            <a:ext cx="10515600" cy="1724971"/>
-          </a:xfrm>
-          <a:solidFill>
-            <a:schemeClr val="bg1">
-              <a:lumMod val="85000"/>
-            </a:schemeClr>
-          </a:solidFill>
-        </p:spPr>
-        <p:txBody>
-          <a:bodyPr/>
-          <a:lstStyle/>
-          <a:p>
-            <a:r>
-              <a:rPr lang="nl-NL" b="1" dirty="0" err="1">
-                <a:latin typeface="Courier New" panose="02070309020205020404" pitchFamily="49" charset="0"/>
-                <a:cs typeface="Courier New" panose="02070309020205020404" pitchFamily="49" charset="0"/>
-              </a:rPr>
-              <a:t>TileFlags</a:t>
-            </a:r>
-            <a:r>
-              <a:rPr lang="nl-NL" dirty="0" err="1">
-                <a:latin typeface="Courier New" panose="02070309020205020404" pitchFamily="49" charset="0"/>
-                <a:cs typeface="Courier New" panose="02070309020205020404" pitchFamily="49" charset="0"/>
-              </a:rPr>
-              <a:t>.None</a:t>
-            </a:r>
-            <a:br>
-              <a:rPr lang="nl-NL" dirty="0">
-                <a:latin typeface="Courier New" panose="02070309020205020404" pitchFamily="49" charset="0"/>
-                <a:cs typeface="Courier New" panose="02070309020205020404" pitchFamily="49" charset="0"/>
-              </a:rPr>
-            </a:br>
-            <a:r>
-              <a:rPr lang="nl-NL" b="1" dirty="0" err="1">
-                <a:latin typeface="Courier New" panose="02070309020205020404" pitchFamily="49" charset="0"/>
-                <a:cs typeface="Courier New" panose="02070309020205020404" pitchFamily="49" charset="0"/>
-              </a:rPr>
-              <a:t>TileFlags</a:t>
-            </a:r>
-            <a:r>
-              <a:rPr lang="nl-NL" dirty="0" err="1">
-                <a:latin typeface="Courier New" panose="02070309020205020404" pitchFamily="49" charset="0"/>
-                <a:cs typeface="Courier New" panose="02070309020205020404" pitchFamily="49" charset="0"/>
-              </a:rPr>
-              <a:t>.LockColor</a:t>
-            </a:r>
-            <a:br>
-              <a:rPr lang="nl-NL" dirty="0">
-                <a:latin typeface="Courier New" panose="02070309020205020404" pitchFamily="49" charset="0"/>
-                <a:cs typeface="Courier New" panose="02070309020205020404" pitchFamily="49" charset="0"/>
-              </a:rPr>
-            </a:br>
-            <a:r>
-              <a:rPr lang="nl-NL" b="1" dirty="0" err="1">
-                <a:latin typeface="Courier New" panose="02070309020205020404" pitchFamily="49" charset="0"/>
-                <a:cs typeface="Courier New" panose="02070309020205020404" pitchFamily="49" charset="0"/>
-              </a:rPr>
-              <a:t>TileFlags</a:t>
-            </a:r>
-            <a:r>
-              <a:rPr lang="nl-NL" dirty="0" err="1">
-                <a:latin typeface="Courier New" panose="02070309020205020404" pitchFamily="49" charset="0"/>
-                <a:cs typeface="Courier New" panose="02070309020205020404" pitchFamily="49" charset="0"/>
-              </a:rPr>
-              <a:t>.LockTransform</a:t>
-            </a:r>
-            <a:br>
-              <a:rPr lang="nl-NL" dirty="0">
-                <a:latin typeface="Courier New" panose="02070309020205020404" pitchFamily="49" charset="0"/>
-                <a:cs typeface="Courier New" panose="02070309020205020404" pitchFamily="49" charset="0"/>
-              </a:rPr>
-            </a:br>
-            <a:r>
-              <a:rPr lang="nl-NL" b="1" dirty="0" err="1">
-                <a:latin typeface="Courier New" panose="02070309020205020404" pitchFamily="49" charset="0"/>
-                <a:cs typeface="Courier New" panose="02070309020205020404" pitchFamily="49" charset="0"/>
-              </a:rPr>
-              <a:t>TileFlags</a:t>
-            </a:r>
-            <a:r>
-              <a:rPr lang="nl-NL" dirty="0" err="1">
-                <a:latin typeface="Courier New" panose="02070309020205020404" pitchFamily="49" charset="0"/>
-                <a:cs typeface="Courier New" panose="02070309020205020404" pitchFamily="49" charset="0"/>
-              </a:rPr>
-              <a:t>.InstantiateGameObjectRuntimeOnly</a:t>
-            </a:r>
-            <a:endParaRPr lang="nl-NL" dirty="0">
-              <a:latin typeface="Courier New" panose="02070309020205020404" pitchFamily="49" charset="0"/>
-              <a:cs typeface="Courier New" panose="02070309020205020404" pitchFamily="49" charset="0"/>
-            </a:endParaRPr>
+              <a:t>.</a:t>
+            </a:r>
+          </a:p>
+          <a:p>
+            <a:endParaRPr lang="nl-NL" dirty="0"/>
           </a:p>
         </p:txBody>
       </p:sp>
     </p:spTree>
     <p:extLst>
       <p:ext uri="{BB962C8B-B14F-4D97-AF65-F5344CB8AC3E}">
-        <p14:creationId xmlns:p14="http://schemas.microsoft.com/office/powerpoint/2010/main" val="753931195"/>
+        <p14:creationId xmlns:p14="http://schemas.microsoft.com/office/powerpoint/2010/main" val="3301321409"/>
       </p:ext>
     </p:extLst>
   </p:cSld>
@@ -8254,6 +8254,14 @@
 </file>
 
 <file path=customXml/item1.xml><?xml version="1.0" encoding="utf-8"?>
+<p:properties xmlns:p="http://schemas.microsoft.com/office/2006/metadata/properties" xmlns:xsi="http://www.w3.org/2001/XMLSchema-instance" xmlns:pc="http://schemas.microsoft.com/office/infopath/2007/PartnerControls">
+  <documentManagement>
+    <_activity xmlns="0ea95f8c-d148-44ae-916f-e4fae07bb092" xsi:nil="true"/>
+  </documentManagement>
+</p:properties>
+</file>
+
+<file path=customXml/item2.xml><?xml version="1.0" encoding="utf-8"?>
 <ct:contentTypeSchema xmlns:ct="http://schemas.microsoft.com/office/2006/metadata/contentType" xmlns:ma="http://schemas.microsoft.com/office/2006/metadata/properties/metaAttributes" ct:_="" ma:_="" ma:contentTypeName="Document" ma:contentTypeID="0x0101003D382338EF70044D9C062BABC4AAC4F2" ma:contentTypeVersion="18" ma:contentTypeDescription="Een nieuw document maken." ma:contentTypeScope="" ma:versionID="1e53bdee3ced94a1d85284f686879e7d">
   <xsd:schema xmlns:xsd="http://www.w3.org/2001/XMLSchema" xmlns:xs="http://www.w3.org/2001/XMLSchema" xmlns:p="http://schemas.microsoft.com/office/2006/metadata/properties" xmlns:ns3="07db6276-f26f-4be5-81e0-f9ee6746fca8" xmlns:ns4="0ea95f8c-d148-44ae-916f-e4fae07bb092" targetNamespace="http://schemas.microsoft.com/office/2006/metadata/properties" ma:root="true" ma:fieldsID="4f339d748e41cee103f7abe631a1b5e5" ns3:_="" ns4:_="">
     <xsd:import namespace="07db6276-f26f-4be5-81e0-f9ee6746fca8"/>
@@ -8506,14 +8514,6 @@
 </ct:contentTypeSchema>
 </file>
 
-<file path=customXml/item2.xml><?xml version="1.0" encoding="utf-8"?>
-<p:properties xmlns:p="http://schemas.microsoft.com/office/2006/metadata/properties" xmlns:xsi="http://www.w3.org/2001/XMLSchema-instance" xmlns:pc="http://schemas.microsoft.com/office/infopath/2007/PartnerControls">
-  <documentManagement>
-    <_activity xmlns="0ea95f8c-d148-44ae-916f-e4fae07bb092" xsi:nil="true"/>
-  </documentManagement>
-</p:properties>
-</file>
-
 <file path=customXml/item3.xml><?xml version="1.0" encoding="utf-8"?>
 <?mso-contentType ?>
 <FormTemplates xmlns="http://schemas.microsoft.com/sharepoint/v3/contenttype/forms">
@@ -8524,6 +8524,23 @@
 </file>
 
 <file path=customXml/itemProps1.xml><?xml version="1.0" encoding="utf-8"?>
+<ds:datastoreItem xmlns:ds="http://schemas.openxmlformats.org/officeDocument/2006/customXml" ds:itemID="{4AE02E84-4242-4C95-906B-10487FB4E1EE}">
+  <ds:schemaRefs>
+    <ds:schemaRef ds:uri="http://purl.org/dc/elements/1.1/"/>
+    <ds:schemaRef ds:uri="http://purl.org/dc/dcmitype/"/>
+    <ds:schemaRef ds:uri="http://schemas.microsoft.com/office/2006/metadata/properties"/>
+    <ds:schemaRef ds:uri="http://schemas.microsoft.com/office/2006/documentManagement/types"/>
+    <ds:schemaRef ds:uri="07db6276-f26f-4be5-81e0-f9ee6746fca8"/>
+    <ds:schemaRef ds:uri="http://schemas.microsoft.com/office/infopath/2007/PartnerControls"/>
+    <ds:schemaRef ds:uri="http://schemas.openxmlformats.org/package/2006/metadata/core-properties"/>
+    <ds:schemaRef ds:uri="0ea95f8c-d148-44ae-916f-e4fae07bb092"/>
+    <ds:schemaRef ds:uri="http://www.w3.org/XML/1998/namespace"/>
+    <ds:schemaRef ds:uri="http://purl.org/dc/terms/"/>
+  </ds:schemaRefs>
+</ds:datastoreItem>
+</file>
+
+<file path=customXml/itemProps2.xml><?xml version="1.0" encoding="utf-8"?>
 <ds:datastoreItem xmlns:ds="http://schemas.openxmlformats.org/officeDocument/2006/customXml" ds:itemID="{17E89673-DD47-4BE7-84CC-D4AA7D41630F}">
   <ds:schemaRefs>
     <ds:schemaRef ds:uri="http://schemas.microsoft.com/office/2006/metadata/contentType"/>
@@ -8542,23 +8559,6 @@
 </ds:datastoreItem>
 </file>
 
-<file path=customXml/itemProps2.xml><?xml version="1.0" encoding="utf-8"?>
-<ds:datastoreItem xmlns:ds="http://schemas.openxmlformats.org/officeDocument/2006/customXml" ds:itemID="{4AE02E84-4242-4C95-906B-10487FB4E1EE}">
-  <ds:schemaRefs>
-    <ds:schemaRef ds:uri="http://purl.org/dc/elements/1.1/"/>
-    <ds:schemaRef ds:uri="http://purl.org/dc/dcmitype/"/>
-    <ds:schemaRef ds:uri="http://schemas.microsoft.com/office/2006/metadata/properties"/>
-    <ds:schemaRef ds:uri="http://schemas.microsoft.com/office/2006/documentManagement/types"/>
-    <ds:schemaRef ds:uri="07db6276-f26f-4be5-81e0-f9ee6746fca8"/>
-    <ds:schemaRef ds:uri="http://schemas.microsoft.com/office/infopath/2007/PartnerControls"/>
-    <ds:schemaRef ds:uri="http://schemas.openxmlformats.org/package/2006/metadata/core-properties"/>
-    <ds:schemaRef ds:uri="0ea95f8c-d148-44ae-916f-e4fae07bb092"/>
-    <ds:schemaRef ds:uri="http://www.w3.org/XML/1998/namespace"/>
-    <ds:schemaRef ds:uri="http://purl.org/dc/terms/"/>
-  </ds:schemaRefs>
-</ds:datastoreItem>
-</file>
-
 <file path=customXml/itemProps3.xml><?xml version="1.0" encoding="utf-8"?>
 <ds:datastoreItem xmlns:ds="http://schemas.openxmlformats.org/officeDocument/2006/customXml" ds:itemID="{FE951165-B379-4FBD-9FD8-D14F0F4D64C9}">
   <ds:schemaRefs>
